--- a/docs/presentation/HESTIM-Planner-presentation.pptx
+++ b/docs/presentation/HESTIM-Planner-presentation.pptx
@@ -112,28 +112,28 @@
   <p:extLst>
     <p:ext uri="{521415D9-36F7-43E2-AB2F-B90AF26B5E84}">
       <p14:sectionLst xmlns:p14="http://schemas.microsoft.com/office/powerpoint/2010/main">
-        <p14:section name="Ouverture" id="{624febf0-d58a-a9e0-3b3c-9aea93368142}">
+        <p14:section name="Ouverture" id="{47fe19dc-f3a8-d0f6-b946-955a5c7bb45b}">
           <p14:sldIdLst>
             <p14:sldId id="256"/>
           </p14:sldIdLst>
         </p14:section>
-        <p14:section name="Le constat" id="{a2e0d926-dae4-fcc5-0fbd-ceffbbbff702}">
+        <p14:section name="Le constat" id="{3bb71db2-c99f-e2c2-903a-8bf9eabf45ca}">
           <p14:sldIdLst>
             <p14:sldId id="257"/>
           </p14:sldIdLst>
         </p14:section>
-        <p14:section name="L'offre" id="{26f4b2ab-c680-8e95-adeb-71b368758ec0}">
+        <p14:section name="L'offre" id="{83c99044-5bea-511d-e787-0f5a6739c6ee}">
           <p14:sldIdLst>
             <p14:sldId id="258"/>
             <p14:sldId id="259"/>
           </p14:sldIdLst>
         </p14:section>
-        <p14:section name="Les bénéfices" id="{2e6541ab-00b4-d844-aad9-402a0836a7fe}">
+        <p14:section name="Les bénéfices" id="{1ad43cfa-db0f-d536-2c2f-15ed6b367c3e}">
           <p14:sldIdLst>
             <p14:sldId id="260"/>
           </p14:sldIdLst>
         </p14:section>
-        <p14:section name="La suite" id="{75a9f957-2975-3bd8-2e16-b6ced48a3871}">
+        <p14:section name="La suite" id="{679fd210-9a0c-69b1-bccd-15ac7a68f1d3}">
           <p14:sldIdLst>
             <p14:sldId id="261"/>
           </p14:sldIdLst>
@@ -3064,7 +3064,7 @@
                 <a:ea typeface="Barlow Condensed" pitchFamily="34" charset="-122"/>
                 <a:cs typeface="Barlow Condensed" pitchFamily="34" charset="-120"/>
               </a:rPr>
-              <a:t>Sites de jeux externes</a:t>
+              <a:t>Sites de jeux</a:t>
             </a:r>
             <a:endParaRPr lang="en-US" sz="1900" dirty="0"/>
           </a:p>
@@ -3103,7 +3103,7 @@
                 <a:ea typeface="Barlow" pitchFamily="34" charset="-122"/>
                 <a:cs typeface="Barlow" pitchFamily="34" charset="-120"/>
               </a:rPr>
-              <a:t>Quiz et jeux en anglais et dans d'autres matières</a:t>
+              <a:t>Quiz et jeux externes, en anglais et dans d'autres matières</a:t>
             </a:r>
             <a:endParaRPr lang="en-US" sz="1300" dirty="0"/>
           </a:p>
@@ -5420,8 +5420,8 @@
         </p:nvSpPr>
         <p:spPr>
           <a:xfrm>
-            <a:off x="548640" y="1325880"/>
-            <a:ext cx="1417320" cy="1051560"/>
+            <a:off x="548640" y="1188720"/>
+            <a:ext cx="3474720" cy="822960"/>
           </a:xfrm>
           <a:prstGeom prst="rect">
             <a:avLst/>
@@ -5459,17 +5459,17 @@
         </p:nvSpPr>
         <p:spPr>
           <a:xfrm>
-            <a:off x="2057400" y="1325880"/>
-            <a:ext cx="2057400" cy="1051560"/>
-          </a:xfrm>
-          <a:prstGeom prst="rect">
-            <a:avLst/>
-          </a:prstGeom>
-          <a:noFill/>
-          <a:ln/>
-        </p:spPr>
-        <p:txBody>
-          <a:bodyPr wrap="square" lIns="0" tIns="0" rIns="0" bIns="0" rtlCol="0" anchor="ctr"/>
+            <a:off x="548640" y="2011680"/>
+            <a:ext cx="3474720" cy="548640"/>
+          </a:xfrm>
+          <a:prstGeom prst="rect">
+            <a:avLst/>
+          </a:prstGeom>
+          <a:noFill/>
+          <a:ln/>
+        </p:spPr>
+        <p:txBody>
+          <a:bodyPr wrap="square" lIns="0" tIns="0" rIns="0" bIns="0" rtlCol="0" anchor="t"/>
           <a:lstStyle/>
           <a:p>
             <a:pPr indent="0" marL="0">
@@ -5498,8 +5498,8 @@
         </p:nvSpPr>
         <p:spPr>
           <a:xfrm>
-            <a:off x="4297680" y="1325880"/>
-            <a:ext cx="1417320" cy="1051560"/>
+            <a:off x="4325112" y="1188720"/>
+            <a:ext cx="3474720" cy="822960"/>
           </a:xfrm>
           <a:prstGeom prst="rect">
             <a:avLst/>
@@ -5537,17 +5537,17 @@
         </p:nvSpPr>
         <p:spPr>
           <a:xfrm>
-            <a:off x="5806440" y="1325880"/>
-            <a:ext cx="2057400" cy="1051560"/>
-          </a:xfrm>
-          <a:prstGeom prst="rect">
-            <a:avLst/>
-          </a:prstGeom>
-          <a:noFill/>
-          <a:ln/>
-        </p:spPr>
-        <p:txBody>
-          <a:bodyPr wrap="square" lIns="0" tIns="0" rIns="0" bIns="0" rtlCol="0" anchor="ctr"/>
+            <a:off x="4325112" y="2011680"/>
+            <a:ext cx="3474720" cy="548640"/>
+          </a:xfrm>
+          <a:prstGeom prst="rect">
+            <a:avLst/>
+          </a:prstGeom>
+          <a:noFill/>
+          <a:ln/>
+        </p:spPr>
+        <p:txBody>
+          <a:bodyPr wrap="square" lIns="0" tIns="0" rIns="0" bIns="0" rtlCol="0" anchor="t"/>
           <a:lstStyle/>
           <a:p>
             <a:pPr indent="0" marL="0">
@@ -5576,8 +5576,8 @@
         </p:nvSpPr>
         <p:spPr>
           <a:xfrm>
-            <a:off x="8046720" y="1325880"/>
-            <a:ext cx="1417320" cy="1051560"/>
+            <a:off x="8101584" y="1188720"/>
+            <a:ext cx="3474720" cy="822960"/>
           </a:xfrm>
           <a:prstGeom prst="rect">
             <a:avLst/>
@@ -5615,17 +5615,17 @@
         </p:nvSpPr>
         <p:spPr>
           <a:xfrm>
-            <a:off x="9555480" y="1325880"/>
-            <a:ext cx="2057400" cy="1051560"/>
-          </a:xfrm>
-          <a:prstGeom prst="rect">
-            <a:avLst/>
-          </a:prstGeom>
-          <a:noFill/>
-          <a:ln/>
-        </p:spPr>
-        <p:txBody>
-          <a:bodyPr wrap="square" lIns="0" tIns="0" rIns="0" bIns="0" rtlCol="0" anchor="ctr"/>
+            <a:off x="8101584" y="2011680"/>
+            <a:ext cx="3474720" cy="548640"/>
+          </a:xfrm>
+          <a:prstGeom prst="rect">
+            <a:avLst/>
+          </a:prstGeom>
+          <a:noFill/>
+          <a:ln/>
+        </p:spPr>
+        <p:txBody>
+          <a:bodyPr wrap="square" lIns="0" tIns="0" rIns="0" bIns="0" rtlCol="0" anchor="t"/>
           <a:lstStyle/>
           <a:p>
             <a:pPr indent="0" marL="0">
@@ -5654,8 +5654,8 @@
         </p:nvSpPr>
         <p:spPr>
           <a:xfrm>
-            <a:off x="548640" y="2743200"/>
-            <a:ext cx="2606040" cy="3246120"/>
+            <a:off x="548640" y="2834640"/>
+            <a:ext cx="2606040" cy="3154680"/>
           </a:xfrm>
           <a:prstGeom prst="roundRect">
             <a:avLst>
@@ -5681,7 +5681,7 @@
         </p:nvSpPr>
         <p:spPr>
           <a:xfrm>
-            <a:off x="804672" y="3017520"/>
+            <a:off x="804672" y="3108960"/>
             <a:ext cx="603504" cy="603504"/>
           </a:xfrm>
           <a:prstGeom prst="ellipse">
@@ -5714,7 +5714,7 @@
         </p:blipFill>
         <p:spPr>
           <a:xfrm>
-            <a:off x="949513" y="3162361"/>
+            <a:off x="949513" y="3253801"/>
             <a:ext cx="313822" cy="313822"/>
           </a:xfrm>
           <a:prstGeom prst="rect">
@@ -5730,7 +5730,7 @@
         </p:nvSpPr>
         <p:spPr>
           <a:xfrm>
-            <a:off x="804672" y="3767328"/>
+            <a:off x="804672" y="3858768"/>
             <a:ext cx="2148840" cy="411480"/>
           </a:xfrm>
           <a:prstGeom prst="rect">
@@ -5769,7 +5769,7 @@
         </p:nvSpPr>
         <p:spPr>
           <a:xfrm>
-            <a:off x="804672" y="4251960"/>
+            <a:off x="804672" y="4343400"/>
             <a:ext cx="2148840" cy="1554480"/>
           </a:xfrm>
           <a:prstGeom prst="rect">
@@ -5808,8 +5808,8 @@
         </p:nvSpPr>
         <p:spPr>
           <a:xfrm>
-            <a:off x="3367735" y="2743200"/>
-            <a:ext cx="2606040" cy="3246120"/>
+            <a:off x="3367735" y="2834640"/>
+            <a:ext cx="2606040" cy="3154680"/>
           </a:xfrm>
           <a:prstGeom prst="roundRect">
             <a:avLst>
@@ -5835,7 +5835,7 @@
         </p:nvSpPr>
         <p:spPr>
           <a:xfrm>
-            <a:off x="3623767" y="3017520"/>
+            <a:off x="3623767" y="3108960"/>
             <a:ext cx="603504" cy="603504"/>
           </a:xfrm>
           <a:prstGeom prst="ellipse">
@@ -5868,7 +5868,7 @@
         </p:blipFill>
         <p:spPr>
           <a:xfrm>
-            <a:off x="3768608" y="3162361"/>
+            <a:off x="3768608" y="3253801"/>
             <a:ext cx="313822" cy="313822"/>
           </a:xfrm>
           <a:prstGeom prst="rect">
@@ -5884,7 +5884,7 @@
         </p:nvSpPr>
         <p:spPr>
           <a:xfrm>
-            <a:off x="3623767" y="3767328"/>
+            <a:off x="3623767" y="3858768"/>
             <a:ext cx="2148840" cy="411480"/>
           </a:xfrm>
           <a:prstGeom prst="rect">
@@ -5923,7 +5923,7 @@
         </p:nvSpPr>
         <p:spPr>
           <a:xfrm>
-            <a:off x="3623767" y="4251960"/>
+            <a:off x="3623767" y="4343400"/>
             <a:ext cx="2148840" cy="1554480"/>
           </a:xfrm>
           <a:prstGeom prst="rect">
@@ -5962,8 +5962,8 @@
         </p:nvSpPr>
         <p:spPr>
           <a:xfrm>
-            <a:off x="6186830" y="2743200"/>
-            <a:ext cx="2606040" cy="3246120"/>
+            <a:off x="6186830" y="2834640"/>
+            <a:ext cx="2606040" cy="3154680"/>
           </a:xfrm>
           <a:prstGeom prst="roundRect">
             <a:avLst>
@@ -5989,7 +5989,7 @@
         </p:nvSpPr>
         <p:spPr>
           <a:xfrm>
-            <a:off x="6442862" y="3017520"/>
+            <a:off x="6442862" y="3108960"/>
             <a:ext cx="603504" cy="603504"/>
           </a:xfrm>
           <a:prstGeom prst="ellipse">
@@ -6022,7 +6022,7 @@
         </p:blipFill>
         <p:spPr>
           <a:xfrm>
-            <a:off x="6587703" y="3162361"/>
+            <a:off x="6587703" y="3253801"/>
             <a:ext cx="313822" cy="313822"/>
           </a:xfrm>
           <a:prstGeom prst="rect">
@@ -6038,7 +6038,7 @@
         </p:nvSpPr>
         <p:spPr>
           <a:xfrm>
-            <a:off x="6442862" y="3767328"/>
+            <a:off x="6442862" y="3858768"/>
             <a:ext cx="2148840" cy="411480"/>
           </a:xfrm>
           <a:prstGeom prst="rect">
@@ -6077,7 +6077,7 @@
         </p:nvSpPr>
         <p:spPr>
           <a:xfrm>
-            <a:off x="6442862" y="4251960"/>
+            <a:off x="6442862" y="4343400"/>
             <a:ext cx="2148840" cy="1554480"/>
           </a:xfrm>
           <a:prstGeom prst="rect">
@@ -6116,8 +6116,8 @@
         </p:nvSpPr>
         <p:spPr>
           <a:xfrm>
-            <a:off x="9005926" y="2743200"/>
-            <a:ext cx="2606040" cy="3246120"/>
+            <a:off x="9005926" y="2834640"/>
+            <a:ext cx="2606040" cy="3154680"/>
           </a:xfrm>
           <a:prstGeom prst="roundRect">
             <a:avLst>
@@ -6143,7 +6143,7 @@
         </p:nvSpPr>
         <p:spPr>
           <a:xfrm>
-            <a:off x="9261958" y="3017520"/>
+            <a:off x="9261958" y="3108960"/>
             <a:ext cx="603504" cy="603504"/>
           </a:xfrm>
           <a:prstGeom prst="ellipse">
@@ -6176,7 +6176,7 @@
         </p:blipFill>
         <p:spPr>
           <a:xfrm>
-            <a:off x="9406799" y="3162361"/>
+            <a:off x="9406799" y="3253801"/>
             <a:ext cx="313822" cy="313822"/>
           </a:xfrm>
           <a:prstGeom prst="rect">
@@ -6192,7 +6192,7 @@
         </p:nvSpPr>
         <p:spPr>
           <a:xfrm>
-            <a:off x="9261958" y="3767328"/>
+            <a:off x="9261958" y="3858768"/>
             <a:ext cx="2148840" cy="411480"/>
           </a:xfrm>
           <a:prstGeom prst="rect">
@@ -6231,7 +6231,7 @@
         </p:nvSpPr>
         <p:spPr>
           <a:xfrm>
-            <a:off x="9261958" y="4251960"/>
+            <a:off x="9261958" y="4343400"/>
             <a:ext cx="2148840" cy="1554480"/>
           </a:xfrm>
           <a:prstGeom prst="rect">
@@ -6431,7 +6431,7 @@
         </p:blipFill>
         <p:spPr>
           <a:xfrm>
-            <a:off x="640080" y="2176272"/>
+            <a:off x="640080" y="2212848"/>
             <a:ext cx="329184" cy="329184"/>
           </a:xfrm>
           <a:prstGeom prst="rect">
@@ -6447,7 +6447,7 @@
         </p:nvSpPr>
         <p:spPr>
           <a:xfrm>
-            <a:off x="1143000" y="2103120"/>
+            <a:off x="1143000" y="2121408"/>
             <a:ext cx="4754880" cy="502920"/>
           </a:xfrm>
           <a:prstGeom prst="rect">
@@ -6472,7 +6472,7 @@
                 <a:ea typeface="Barlow" pitchFamily="34" charset="-122"/>
                 <a:cs typeface="Barlow" pitchFamily="34" charset="-120"/>
               </a:rPr>
-              <a:t>Le site pour l'administration, les enseignants et les étudiants</a:t>
+              <a:t>Le site web, pour toute l'école</a:t>
             </a:r>
             <a:endParaRPr lang="en-US" sz="1700" dirty="0"/>
           </a:p>
@@ -6494,7 +6494,7 @@
         </p:blipFill>
         <p:spPr>
           <a:xfrm>
-            <a:off x="640080" y="2889504"/>
+            <a:off x="640080" y="3017520"/>
             <a:ext cx="329184" cy="329184"/>
           </a:xfrm>
           <a:prstGeom prst="rect">
@@ -6510,7 +6510,7 @@
         </p:nvSpPr>
         <p:spPr>
           <a:xfrm>
-            <a:off x="1143000" y="2816352"/>
+            <a:off x="1143000" y="2926080"/>
             <a:ext cx="4754880" cy="502920"/>
           </a:xfrm>
           <a:prstGeom prst="rect">
@@ -6557,7 +6557,7 @@
         </p:blipFill>
         <p:spPr>
           <a:xfrm>
-            <a:off x="640080" y="3602736"/>
+            <a:off x="640080" y="3822192"/>
             <a:ext cx="329184" cy="329184"/>
           </a:xfrm>
           <a:prstGeom prst="rect">
@@ -6573,7 +6573,7 @@
         </p:nvSpPr>
         <p:spPr>
           <a:xfrm>
-            <a:off x="1143000" y="3529584"/>
+            <a:off x="1143000" y="3730752"/>
             <a:ext cx="4754880" cy="502920"/>
           </a:xfrm>
           <a:prstGeom prst="rect">
@@ -6620,7 +6620,7 @@
         </p:blipFill>
         <p:spPr>
           <a:xfrm>
-            <a:off x="640080" y="4315968"/>
+            <a:off x="640080" y="4626864"/>
             <a:ext cx="329184" cy="329184"/>
           </a:xfrm>
           <a:prstGeom prst="rect">
@@ -6636,7 +6636,7 @@
         </p:nvSpPr>
         <p:spPr>
           <a:xfrm>
-            <a:off x="1143000" y="4242816"/>
+            <a:off x="1143000" y="4535424"/>
             <a:ext cx="4754880" cy="502920"/>
           </a:xfrm>
           <a:prstGeom prst="rect">

--- a/docs/presentation/HESTIM-Planner-presentation.pptx
+++ b/docs/presentation/HESTIM-Planner-presentation.pptx
@@ -112,28 +112,28 @@
   <p:extLst>
     <p:ext uri="{521415D9-36F7-43E2-AB2F-B90AF26B5E84}">
       <p14:sectionLst xmlns:p14="http://schemas.microsoft.com/office/powerpoint/2010/main">
-        <p14:section name="Ouverture" id="{47fe19dc-f3a8-d0f6-b946-955a5c7bb45b}">
+        <p14:section name="Ouverture" id="{285ceb5d-d8e5-2c32-6413-d13d06e412e2}">
           <p14:sldIdLst>
             <p14:sldId id="256"/>
           </p14:sldIdLst>
         </p14:section>
-        <p14:section name="Le constat" id="{3bb71db2-c99f-e2c2-903a-8bf9eabf45ca}">
+        <p14:section name="Le constat" id="{0ea975ae-988d-d4bb-1dd7-f901d6f03fa3}">
           <p14:sldIdLst>
             <p14:sldId id="257"/>
           </p14:sldIdLst>
         </p14:section>
-        <p14:section name="L'offre" id="{83c99044-5bea-511d-e787-0f5a6739c6ee}">
+        <p14:section name="L'offre" id="{4bd6e78a-50d3-b733-530c-792eb1e09b7d}">
           <p14:sldIdLst>
             <p14:sldId id="258"/>
             <p14:sldId id="259"/>
           </p14:sldIdLst>
         </p14:section>
-        <p14:section name="Les bénéfices" id="{1ad43cfa-db0f-d536-2c2f-15ed6b367c3e}">
+        <p14:section name="Les bénéfices" id="{863e12bc-e198-6254-7035-058d26c6fedd}">
           <p14:sldIdLst>
             <p14:sldId id="260"/>
           </p14:sldIdLst>
         </p14:section>
-        <p14:section name="La suite" id="{679fd210-9a0c-69b1-bccd-15ac7a68f1d3}">
+        <p14:section name="La suite" id="{29c394f4-54b5-3e22-9110-7458f0f1ba1d}">
           <p14:sldIdLst>
             <p14:sldId id="261"/>
           </p14:sldIdLst>
@@ -543,7 +543,7 @@
             <a:r>
               <a:rPr lang="en-US" dirty="0"/>
               <a:t>≈ 20 s.
-« Bonjour. Une école, ce sont des centaines de cours chaque mois, des salles qui changent, des supports, des devoirs, des quiz… et des étudiants qui doivent savoir, à chaque instant, où aller et quoi préparer.
+« Bonjour. Une école, ce sont des centaines de cours chaque mois, des salles qui changent, des annonces, des supports, des devoirs, des quiz… et des étudiants qui doivent savoir, à chaque instant, où aller et quoi préparer.
 HESTIM Planner réunit tout cela dans une seule application, sur le téléphone de chaque étudiant et sur l'ordinateur de chaque enseignant. Elle est déjà en ligne. »</a:t>
             </a:r>
             <a:endParaRPr lang="en-US" dirty="0"/>
@@ -633,8 +633,9 @@
             <a:r>
               <a:rPr lang="en-US" dirty="0"/>
               <a:t>≈ 35 s.
-« Aujourd'hui, l'école communique avec six outils différents. Les informations partent par Gmail, à tout le monde. L'emploi du temps est envoyé en PDF chaque mois, et il faut le re-télécharger à chaque changement. Les reports de dernière minute passent par des groupes WhatsApp. Les devoirs vivent dans Classroom, les cours dans Moodle, et pour jouer en anglais ou réviser, on passe par des sites extérieurs.
-Résultat : l'information arrive en retard, les équipes saisissent la même chose plusieurs fois, et les données de nos étudiants sont éparpillées chez des services externes. »</a:t>
+« Aujourd'hui, l'école travaille avec cinq outils différents. Les informations partent par Gmail, à tout le monde. L'emploi du temps est envoyé en PDF chaque mois, et il faut le re-télécharger à chaque changement. Les devoirs vivent dans Classroom, les cours dans Moodle, et pour jouer en anglais ou réviser, on passe par des sites extérieurs.
+Résultat : l'information arrive en retard, les équipes saisissent la même chose plusieurs fois, et les données de nos étudiants sont éparpillées chez des services externes. »
+Si on demande : WhatsApp reste le moyen de joindre les parents (absences, retards de paiement) et certains cas particuliers ; la plateforme ne le remplace pas.</a:t>
             </a:r>
             <a:endParaRPr lang="en-US" dirty="0"/>
           </a:p>
@@ -724,8 +725,8 @@
               <a:rPr lang="en-US" dirty="0"/>
               <a:t>≈ 35 s.
 « HESTIM Planner remplace cet éparpillement par une seule application, avec un seul compte.
-Quatre services. Un emploi du temps vivant : la semaine, le mois, le détail de chaque cours, toujours à jour. Des alertes instantanées : si un cours est reporté ou change de salle, l'étudiant le sait tout de suite, sur son téléphone. Une bibliothèque de cours : tous les supports rangés par module. Et des jeux et des quiz intégrés : en classe ou en devoir, corrigés automatiquement, et les résultats restent à l'école. »
-Démonstration possible : ouvrir l'application sur le téléphone (onglets Semaine puis Jeux).</a:t>
+Quatre services. Un emploi du temps vivant : la semaine, le mois, le détail de chaque cours, toujours à jour, et il s'ajoute même à l'agenda du téléphone. Des annonces et des alertes : un cours reporté, une salle qui change, une information pour une filière ou un groupe, et seuls les étudiants concernés sont prévenus. Une bibliothèque : les supports de chaque module, lisibles même sans connexion, avec les retours de stage des anciens et des idées de projets. Et des activités : quiz, devoirs et jeux, choisis par l'enseignant pour vérifier qu'une notion est comprise ou pour s'entraîner. »
+Démonstration possible : ouvrir l'application sur le téléphone (onglets Semaine, Bibliothèque puis Activités).</a:t>
             </a:r>
             <a:endParaRPr lang="en-US" dirty="0"/>
           </a:p>
@@ -814,8 +815,8 @@
             <a:r>
               <a:rPr lang="en-US" dirty="0"/>
               <a:t>≈ 35 s.
-« Concrètement, outil par outil. Les informations de cours ne partent plus à tout le monde par Gmail : elles arrivent aux seuls étudiants concernés. Le PDF du mois devient un emploi du temps vivant, et le PDF officiel reste disponible. Les reports ne passent plus par WhatsApp : l'alerte est automatique, avec la nouvelle salle et la nouvelle heure. Classroom et Moodle sont remplacés par la bibliothèque et les devoirs en quiz, corrigés tout seuls. Et les jeux sont dans l'application : pas de publicité, pas de compte externe, et l'école garde les résultats. »
-Si on demande : les annonces générales (vie de l'école) restent sur Gmail pour l'instant ; les annonces ciblées par filière et par groupe sont la prochaine étape.</a:t>
+« Concrètement, outil par outil. Les informations ne partent plus à tout le monde par Gmail : l'école publie des annonces ciblées, par filière, par groupe ou par classe, et chaque report déclenche une alerte automatique. Le PDF du mois devient un emploi du temps vivant, qui s'ajoute à l'agenda du téléphone, et le PDF officiel reste disponible. Classroom est remplacé par des devoirs en quiz, corrigés tout seuls, ou en fichier à rendre, notés par l'enseignant. Moodle est remplacé par une bibliothèque rangée par module, qu'on lit sur son téléphone, même sans connexion. Et les jeux deviennent des activités choisies par l'enseignant : pas de publicité, pas de compte externe, et l'école garde les résultats. »
+Si on demande : WhatsApp reste pour joindre les parents ; l'appel en classe se fait aussi dans l'application, par un QR code que les étudiants scannent.</a:t>
             </a:r>
             <a:endParaRPr lang="en-US" dirty="0"/>
           </a:p>
@@ -904,8 +905,8 @@
             <a:r>
               <a:rPr lang="en-US" dirty="0"/>
               <a:t>≈ 35 s.
-« Ce que chacun y gagne. Pour la direction et la scolarité : l'emploi du temps d'un semestre entier est proposé automatiquement — 2 620 séances placées en 90 secondes sur notre serveur — et les conflits sont signalés avant qu'ils ne posent problème.
-Pour les enseignants : un seul endroit pour leurs cours, leurs supports et leurs quiz. Pour les étudiants : toute leur vie d'école dans la poche, en français ou en anglais. Et pour l'école : une image moderne, et des données qui restent chez elle. »</a:t>
+« Ce que chacun y gagne. Pour la direction et la scolarité : l'emploi du temps d'un semestre entier est proposé automatiquement, 2 620 séances placées en 90 secondes, les conflits sont signalés avant qu'ils ne posent problème, et les présences remontent toutes seules.
+Pour les enseignants : l'appel se fait en un QR code, et leurs cours, leurs devoirs et leurs activités sont au même endroit. Pour les étudiants : toute leur vie d'école dans la poche, en français ou en anglais. Et pour l'école : une image moderne, et des données qui restent chez elle. »</a:t>
             </a:r>
             <a:endParaRPr lang="en-US" dirty="0"/>
           </a:p>
@@ -994,9 +995,9 @@
             <a:r>
               <a:rPr lang="en-US" dirty="0"/>
               <a:t>≈ 25 s.
-« Tout ce que je viens de vous montrer est en ligne aujourd'hui : le site, l'application sur iPhone et Android, la bibliothèque et les jeux.
-Nous proposons de commencer par un pilote d'un semestre avec une filière, d'ajouter les annonces ciblées pour remplacer les envois Gmail, puis d'ouvrir la plateforme à toute l'école — et demain à d'autres établissements.
-HESTIM Planner : l'école, à l'heure. Merci. »</a:t>
+« Tout ce que je viens de vous montrer est en ligne aujourd'hui : le site, l'application sur iPhone et Android, les annonces, l'agenda, la bibliothèque, les devoirs, les activités et l'appel par QR code.
+Nous proposons de commencer par un pilote d'un semestre avec une filière, d'activer les notifications sur le téléphone et de publier l'application sur les stores, puis d'ouvrir la plateforme à toute l'école, et demain à d'autres établissements.
+HESTIM Planner, l'école à l'heure. Merci. »</a:t>
             </a:r>
             <a:endParaRPr lang="en-US" dirty="0"/>
           </a:p>
@@ -1958,7 +1959,7 @@
                 <a:ea typeface="Barlow Condensed" pitchFamily="34" charset="-122"/>
                 <a:cs typeface="Barlow Condensed" pitchFamily="34" charset="-120"/>
               </a:rPr>
-              <a:t>Emploi du temps · Alertes · Cours · Jeux et quiz</a:t>
+              <a:t>Emploi du temps · Annonces · Bibliothèque · Activités</a:t>
             </a:r>
             <a:endParaRPr lang="en-US" sz="2000" dirty="0"/>
           </a:p>
@@ -2124,6 +2125,383 @@
   <p:clrMapOvr>
     <a:masterClrMapping/>
   </p:clrMapOvr>
+  <p:transition spd="med">
+    <p:fade/>
+  </p:transition>
+  <p:timing>
+    <p:tnLst>
+      <p:par>
+        <p:cTn id="1" dur="indefinite" restart="never" nodeType="tmRoot">
+          <p:childTnLst>
+            <p:seq concurrent="1" nextAc="seek">
+              <p:cTn id="2" dur="indefinite" nodeType="mainSeq">
+                <p:childTnLst>
+                  <p:par>
+                    <p:cTn id="3" fill="hold">
+                      <p:stCondLst>
+                        <p:cond delay="indefinite"/>
+                        <p:cond evt="onBegin" delay="0">
+                          <p:tn val="2"/>
+                        </p:cond>
+                      </p:stCondLst>
+                      <p:childTnLst>
+                        <p:par>
+                          <p:cTn id="4" fill="hold">
+                            <p:stCondLst>
+                              <p:cond delay="0"/>
+                            </p:stCondLst>
+                            <p:childTnLst>
+                              <p:par>
+                                <p:cTn id="5" presetID="10" presetClass="entr" presetSubtype="0" fill="hold" grpId="0" nodeType="afterEffect">
+                                  <p:stCondLst>
+                                    <p:cond delay="0"/>
+                                  </p:stCondLst>
+                                  <p:childTnLst>
+                                    <p:set>
+                                      <p:cBhvr>
+                                        <p:cTn id="6" dur="1" fill="hold">
+                                          <p:stCondLst>
+                                            <p:cond delay="0"/>
+                                          </p:stCondLst>
+                                        </p:cTn>
+                                        <p:tgtEl>
+                                          <p:spTgt spid="2"/>
+                                        </p:tgtEl>
+                                        <p:attrNameLst>
+                                          <p:attrName>style.visibility</p:attrName>
+                                        </p:attrNameLst>
+                                      </p:cBhvr>
+                                      <p:to>
+                                        <p:strVal val="visible"/>
+                                      </p:to>
+                                    </p:set>
+                                    <p:animEffect transition="in" filter="fade">
+                                      <p:cBhvr>
+                                        <p:cTn id="7" dur="500"/>
+                                        <p:tgtEl>
+                                          <p:spTgt spid="2"/>
+                                        </p:tgtEl>
+                                      </p:cBhvr>
+                                    </p:animEffect>
+                                  </p:childTnLst>
+                                </p:cTn>
+                              </p:par>
+                              <p:par>
+                                <p:cTn id="8" presetID="10" presetClass="entr" presetSubtype="0" fill="hold" grpId="0" nodeType="withEffect">
+                                  <p:stCondLst>
+                                    <p:cond delay="0"/>
+                                  </p:stCondLst>
+                                  <p:childTnLst>
+                                    <p:set>
+                                      <p:cBhvr>
+                                        <p:cTn id="9" dur="1" fill="hold">
+                                          <p:stCondLst>
+                                            <p:cond delay="0"/>
+                                          </p:stCondLst>
+                                        </p:cTn>
+                                        <p:tgtEl>
+                                          <p:spTgt spid="3"/>
+                                        </p:tgtEl>
+                                        <p:attrNameLst>
+                                          <p:attrName>style.visibility</p:attrName>
+                                        </p:attrNameLst>
+                                      </p:cBhvr>
+                                      <p:to>
+                                        <p:strVal val="visible"/>
+                                      </p:to>
+                                    </p:set>
+                                    <p:animEffect transition="in" filter="fade">
+                                      <p:cBhvr>
+                                        <p:cTn id="10" dur="500"/>
+                                        <p:tgtEl>
+                                          <p:spTgt spid="3"/>
+                                        </p:tgtEl>
+                                      </p:cBhvr>
+                                    </p:animEffect>
+                                  </p:childTnLst>
+                                </p:cTn>
+                              </p:par>
+                              <p:par>
+                                <p:cTn id="11" presetID="10" presetClass="entr" presetSubtype="0" fill="hold" grpId="0" nodeType="withEffect">
+                                  <p:stCondLst>
+                                    <p:cond delay="300"/>
+                                  </p:stCondLst>
+                                  <p:childTnLst>
+                                    <p:set>
+                                      <p:cBhvr>
+                                        <p:cTn id="12" dur="1" fill="hold">
+                                          <p:stCondLst>
+                                            <p:cond delay="0"/>
+                                          </p:stCondLst>
+                                        </p:cTn>
+                                        <p:tgtEl>
+                                          <p:spTgt spid="5"/>
+                                        </p:tgtEl>
+                                        <p:attrNameLst>
+                                          <p:attrName>style.visibility</p:attrName>
+                                        </p:attrNameLst>
+                                      </p:cBhvr>
+                                      <p:to>
+                                        <p:strVal val="visible"/>
+                                      </p:to>
+                                    </p:set>
+                                    <p:animEffect transition="in" filter="fade">
+                                      <p:cBhvr>
+                                        <p:cTn id="13" dur="500"/>
+                                        <p:tgtEl>
+                                          <p:spTgt spid="5"/>
+                                        </p:tgtEl>
+                                      </p:cBhvr>
+                                    </p:animEffect>
+                                  </p:childTnLst>
+                                </p:cTn>
+                              </p:par>
+                              <p:par>
+                                <p:cTn id="14" presetID="10" presetClass="entr" presetSubtype="0" fill="hold" grpId="0" nodeType="withEffect">
+                                  <p:stCondLst>
+                                    <p:cond delay="600"/>
+                                  </p:stCondLst>
+                                  <p:childTnLst>
+                                    <p:set>
+                                      <p:cBhvr>
+                                        <p:cTn id="15" dur="1" fill="hold">
+                                          <p:stCondLst>
+                                            <p:cond delay="0"/>
+                                          </p:stCondLst>
+                                        </p:cTn>
+                                        <p:tgtEl>
+                                          <p:spTgt spid="6"/>
+                                        </p:tgtEl>
+                                        <p:attrNameLst>
+                                          <p:attrName>style.visibility</p:attrName>
+                                        </p:attrNameLst>
+                                      </p:cBhvr>
+                                      <p:to>
+                                        <p:strVal val="visible"/>
+                                      </p:to>
+                                    </p:set>
+                                    <p:animEffect transition="in" filter="fade">
+                                      <p:cBhvr>
+                                        <p:cTn id="16" dur="500"/>
+                                        <p:tgtEl>
+                                          <p:spTgt spid="6"/>
+                                        </p:tgtEl>
+                                      </p:cBhvr>
+                                    </p:animEffect>
+                                  </p:childTnLst>
+                                </p:cTn>
+                              </p:par>
+                              <p:par>
+                                <p:cTn id="17" presetID="10" presetClass="entr" presetSubtype="0" fill="hold" grpId="0" nodeType="withEffect">
+                                  <p:stCondLst>
+                                    <p:cond delay="900"/>
+                                  </p:stCondLst>
+                                  <p:childTnLst>
+                                    <p:set>
+                                      <p:cBhvr>
+                                        <p:cTn id="18" dur="1" fill="hold">
+                                          <p:stCondLst>
+                                            <p:cond delay="0"/>
+                                          </p:stCondLst>
+                                        </p:cTn>
+                                        <p:tgtEl>
+                                          <p:spTgt spid="7"/>
+                                        </p:tgtEl>
+                                        <p:attrNameLst>
+                                          <p:attrName>style.visibility</p:attrName>
+                                        </p:attrNameLst>
+                                      </p:cBhvr>
+                                      <p:to>
+                                        <p:strVal val="visible"/>
+                                      </p:to>
+                                    </p:set>
+                                    <p:animEffect transition="in" filter="fade">
+                                      <p:cBhvr>
+                                        <p:cTn id="19" dur="500"/>
+                                        <p:tgtEl>
+                                          <p:spTgt spid="7"/>
+                                        </p:tgtEl>
+                                      </p:cBhvr>
+                                    </p:animEffect>
+                                  </p:childTnLst>
+                                </p:cTn>
+                              </p:par>
+                              <p:par>
+                                <p:cTn id="20" presetID="10" presetClass="entr" presetSubtype="0" fill="hold" grpId="0" nodeType="withEffect">
+                                  <p:stCondLst>
+                                    <p:cond delay="1200"/>
+                                  </p:stCondLst>
+                                  <p:childTnLst>
+                                    <p:set>
+                                      <p:cBhvr>
+                                        <p:cTn id="21" dur="1" fill="hold">
+                                          <p:stCondLst>
+                                            <p:cond delay="0"/>
+                                          </p:stCondLst>
+                                        </p:cTn>
+                                        <p:tgtEl>
+                                          <p:spTgt spid="8"/>
+                                        </p:tgtEl>
+                                        <p:attrNameLst>
+                                          <p:attrName>style.visibility</p:attrName>
+                                        </p:attrNameLst>
+                                      </p:cBhvr>
+                                      <p:to>
+                                        <p:strVal val="visible"/>
+                                      </p:to>
+                                    </p:set>
+                                    <p:animEffect transition="in" filter="fade">
+                                      <p:cBhvr>
+                                        <p:cTn id="22" dur="500"/>
+                                        <p:tgtEl>
+                                          <p:spTgt spid="8"/>
+                                        </p:tgtEl>
+                                      </p:cBhvr>
+                                    </p:animEffect>
+                                  </p:childTnLst>
+                                </p:cTn>
+                              </p:par>
+                              <p:par>
+                                <p:cTn id="23" presetID="10" presetClass="entr" presetSubtype="0" fill="hold" grpId="0" nodeType="withEffect">
+                                  <p:stCondLst>
+                                    <p:cond delay="1200"/>
+                                  </p:stCondLst>
+                                  <p:childTnLst>
+                                    <p:set>
+                                      <p:cBhvr>
+                                        <p:cTn id="24" dur="1" fill="hold">
+                                          <p:stCondLst>
+                                            <p:cond delay="0"/>
+                                          </p:stCondLst>
+                                        </p:cTn>
+                                        <p:tgtEl>
+                                          <p:spTgt spid="9"/>
+                                        </p:tgtEl>
+                                        <p:attrNameLst>
+                                          <p:attrName>style.visibility</p:attrName>
+                                        </p:attrNameLst>
+                                      </p:cBhvr>
+                                      <p:to>
+                                        <p:strVal val="visible"/>
+                                      </p:to>
+                                    </p:set>
+                                    <p:animEffect transition="in" filter="fade">
+                                      <p:cBhvr>
+                                        <p:cTn id="25" dur="500"/>
+                                        <p:tgtEl>
+                                          <p:spTgt spid="9"/>
+                                        </p:tgtEl>
+                                      </p:cBhvr>
+                                    </p:animEffect>
+                                  </p:childTnLst>
+                                </p:cTn>
+                              </p:par>
+                              <p:par>
+                                <p:cTn id="26" presetID="10" presetClass="entr" presetSubtype="0" fill="hold" grpId="0" nodeType="withEffect">
+                                  <p:stCondLst>
+                                    <p:cond delay="1500"/>
+                                  </p:stCondLst>
+                                  <p:childTnLst>
+                                    <p:set>
+                                      <p:cBhvr>
+                                        <p:cTn id="27" dur="1" fill="hold">
+                                          <p:stCondLst>
+                                            <p:cond delay="0"/>
+                                          </p:stCondLst>
+                                        </p:cTn>
+                                        <p:tgtEl>
+                                          <p:spTgt spid="10"/>
+                                        </p:tgtEl>
+                                        <p:attrNameLst>
+                                          <p:attrName>style.visibility</p:attrName>
+                                        </p:attrNameLst>
+                                      </p:cBhvr>
+                                      <p:to>
+                                        <p:strVal val="visible"/>
+                                      </p:to>
+                                    </p:set>
+                                    <p:animEffect transition="in" filter="fade">
+                                      <p:cBhvr>
+                                        <p:cTn id="28" dur="500"/>
+                                        <p:tgtEl>
+                                          <p:spTgt spid="10"/>
+                                        </p:tgtEl>
+                                      </p:cBhvr>
+                                    </p:animEffect>
+                                  </p:childTnLst>
+                                </p:cTn>
+                              </p:par>
+                              <p:par>
+                                <p:cTn id="29" presetID="10" presetClass="entr" presetSubtype="0" fill="hold" grpId="0" nodeType="withEffect">
+                                  <p:stCondLst>
+                                    <p:cond delay="1500"/>
+                                  </p:stCondLst>
+                                  <p:childTnLst>
+                                    <p:set>
+                                      <p:cBhvr>
+                                        <p:cTn id="30" dur="1" fill="hold">
+                                          <p:stCondLst>
+                                            <p:cond delay="0"/>
+                                          </p:stCondLst>
+                                        </p:cTn>
+                                        <p:tgtEl>
+                                          <p:spTgt spid="11"/>
+                                        </p:tgtEl>
+                                        <p:attrNameLst>
+                                          <p:attrName>style.visibility</p:attrName>
+                                        </p:attrNameLst>
+                                      </p:cBhvr>
+                                      <p:to>
+                                        <p:strVal val="visible"/>
+                                      </p:to>
+                                    </p:set>
+                                    <p:animEffect transition="in" filter="fade">
+                                      <p:cBhvr>
+                                        <p:cTn id="31" dur="500"/>
+                                        <p:tgtEl>
+                                          <p:spTgt spid="11"/>
+                                        </p:tgtEl>
+                                      </p:cBhvr>
+                                    </p:animEffect>
+                                  </p:childTnLst>
+                                </p:cTn>
+                              </p:par>
+                            </p:childTnLst>
+                          </p:cTn>
+                        </p:par>
+                      </p:childTnLst>
+                    </p:cTn>
+                  </p:par>
+                </p:childTnLst>
+              </p:cTn>
+              <p:prevCondLst>
+                <p:cond evt="onPrev" delay="0">
+                  <p:tgtEl>
+                    <p:sldTgt/>
+                  </p:tgtEl>
+                </p:cond>
+              </p:prevCondLst>
+              <p:nextCondLst>
+                <p:cond evt="onNext" delay="0">
+                  <p:tgtEl>
+                    <p:sldTgt/>
+                  </p:tgtEl>
+                </p:cond>
+              </p:nextCondLst>
+            </p:seq>
+          </p:childTnLst>
+        </p:cTn>
+      </p:par>
+    </p:tnLst>
+    <p:bldLst>
+      <p:bldP spid="2" grpId="0" animBg="1"/>
+      <p:bldP spid="5" grpId="0" animBg="1"/>
+      <p:bldP spid="6" grpId="0" animBg="1"/>
+      <p:bldP spid="7" grpId="0" animBg="1"/>
+      <p:bldP spid="8" grpId="0" animBg="1"/>
+      <p:bldP spid="10" grpId="0" animBg="1"/>
+    </p:bldLst>
+  </p:timing>
 </p:sld>
 </file>
 
@@ -2602,160 +2980,6 @@
                 <a:ea typeface="Barlow Condensed" pitchFamily="34" charset="-122"/>
                 <a:cs typeface="Barlow Condensed" pitchFamily="34" charset="-120"/>
               </a:rPr>
-              <a:t>Groupes WhatsApp</a:t>
-            </a:r>
-            <a:endParaRPr lang="en-US" sz="1900" dirty="0"/>
-          </a:p>
-        </p:txBody>
-      </p:sp>
-      <p:sp>
-        <p:nvSpPr>
-          <p:cNvPr id="17" name="outil-3-usage"/>
-          <p:cNvSpPr txBox="1"/>
-          <p:nvPr/>
-        </p:nvSpPr>
-        <p:spPr>
-          <a:xfrm>
-            <a:off x="5715000" y="2697480"/>
-            <a:ext cx="1828800" cy="640080"/>
-          </a:xfrm>
-          <a:prstGeom prst="rect">
-            <a:avLst/>
-          </a:prstGeom>
-          <a:noFill/>
-          <a:ln/>
-        </p:spPr>
-        <p:txBody>
-          <a:bodyPr wrap="square" lIns="0" tIns="0" rIns="0" bIns="0" rtlCol="0" anchor="t"/>
-          <a:lstStyle/>
-          <a:p>
-            <a:pPr indent="0" marL="0">
-              <a:buNone/>
-            </a:pPr>
-            <a:r>
-              <a:rPr lang="en-US" sz="1300" dirty="0">
-                <a:solidFill>
-                  <a:schemeClr val="accent4"/>
-                </a:solidFill>
-                <a:latin typeface="Barlow" pitchFamily="34" charset="0"/>
-                <a:ea typeface="Barlow" pitchFamily="34" charset="-122"/>
-                <a:cs typeface="Barlow" pitchFamily="34" charset="-120"/>
-              </a:rPr>
-              <a:t>Reports et changements de salle de dernière minute</a:t>
-            </a:r>
-            <a:endParaRPr lang="en-US" sz="1300" dirty="0"/>
-          </a:p>
-        </p:txBody>
-      </p:sp>
-      <p:sp>
-        <p:nvSpPr>
-          <p:cNvPr id="18" name="outil-4-carte"/>
-          <p:cNvSpPr/>
-          <p:nvPr/>
-        </p:nvSpPr>
-        <p:spPr>
-          <a:xfrm>
-            <a:off x="548640" y="3657600"/>
-            <a:ext cx="2240280" cy="1965960"/>
-          </a:xfrm>
-          <a:prstGeom prst="roundRect">
-            <a:avLst>
-              <a:gd name="adj" fmla="val 5581"/>
-            </a:avLst>
-          </a:prstGeom>
-          <a:solidFill>
-            <a:schemeClr val="bg2"/>
-          </a:solidFill>
-          <a:ln w="12700">
-            <a:solidFill>
-              <a:schemeClr val="bg2"/>
-            </a:solidFill>
-            <a:prstDash val="solid"/>
-          </a:ln>
-        </p:spPr>
-      </p:sp>
-      <p:sp>
-        <p:nvSpPr>
-          <p:cNvPr id="19" name="outil-4-rond"/>
-          <p:cNvSpPr/>
-          <p:nvPr/>
-        </p:nvSpPr>
-        <p:spPr>
-          <a:xfrm>
-            <a:off x="777240" y="3886200"/>
-            <a:ext cx="548640" cy="548640"/>
-          </a:xfrm>
-          <a:prstGeom prst="ellipse">
-            <a:avLst/>
-          </a:prstGeom>
-          <a:solidFill>
-            <a:schemeClr val="tx2"/>
-          </a:solidFill>
-          <a:ln w="12700">
-            <a:solidFill>
-              <a:schemeClr val="tx2"/>
-            </a:solidFill>
-            <a:prstDash val="solid"/>
-          </a:ln>
-        </p:spPr>
-      </p:sp>
-      <p:pic>
-        <p:nvPicPr>
-          <p:cNvPr id="20" name="outil-4-icone" descr="preencoded.png">    </p:cNvPr>
-          <p:cNvPicPr>
-            <a:picLocks noChangeAspect="1"/>
-          </p:cNvPicPr>
-          <p:nvPr/>
-        </p:nvPicPr>
-        <p:blipFill>
-          <a:blip r:embed="rId4"/>
-          <a:stretch>
-            <a:fillRect/>
-          </a:stretch>
-        </p:blipFill>
-        <p:spPr>
-          <a:xfrm>
-            <a:off x="908914" y="4017874"/>
-            <a:ext cx="285293" cy="285293"/>
-          </a:xfrm>
-          <a:prstGeom prst="rect">
-            <a:avLst/>
-          </a:prstGeom>
-        </p:spPr>
-      </p:pic>
-      <p:sp>
-        <p:nvSpPr>
-          <p:cNvPr id="21" name="outil-4-nom"/>
-          <p:cNvSpPr txBox="1"/>
-          <p:nvPr/>
-        </p:nvSpPr>
-        <p:spPr>
-          <a:xfrm>
-            <a:off x="777240" y="4526280"/>
-            <a:ext cx="1828800" cy="365760"/>
-          </a:xfrm>
-          <a:prstGeom prst="rect">
-            <a:avLst/>
-          </a:prstGeom>
-          <a:noFill/>
-          <a:ln/>
-        </p:spPr>
-        <p:txBody>
-          <a:bodyPr wrap="square" lIns="0" tIns="0" rIns="0" bIns="0" rtlCol="0" anchor="ctr"/>
-          <a:lstStyle/>
-          <a:p>
-            <a:pPr indent="0" marL="0">
-              <a:buNone/>
-            </a:pPr>
-            <a:r>
-              <a:rPr lang="en-US" sz="1900" b="1" dirty="0">
-                <a:solidFill>
-                  <a:schemeClr val="tx2"/>
-                </a:solidFill>
-                <a:latin typeface="Barlow Condensed" pitchFamily="34" charset="0"/>
-                <a:ea typeface="Barlow Condensed" pitchFamily="34" charset="-122"/>
-                <a:cs typeface="Barlow Condensed" pitchFamily="34" charset="-120"/>
-              </a:rPr>
               <a:t>Google Classroom</a:t>
             </a:r>
             <a:endParaRPr lang="en-US" sz="1900" dirty="0"/>
@@ -2764,13 +2988,13 @@
       </p:sp>
       <p:sp>
         <p:nvSpPr>
-          <p:cNvPr id="22" name="outil-4-usage"/>
+          <p:cNvPr id="17" name="outil-3-usage"/>
           <p:cNvSpPr txBox="1"/>
           <p:nvPr/>
         </p:nvSpPr>
         <p:spPr>
           <a:xfrm>
-            <a:off x="777240" y="4892040"/>
+            <a:off x="5715000" y="2697480"/>
             <a:ext cx="1828800" cy="640080"/>
           </a:xfrm>
           <a:prstGeom prst="rect">
@@ -2803,13 +3027,13 @@
       </p:sp>
       <p:sp>
         <p:nvSpPr>
-          <p:cNvPr id="23" name="outil-5-carte"/>
+          <p:cNvPr id="18" name="outil-4-carte"/>
           <p:cNvSpPr/>
           <p:nvPr/>
         </p:nvSpPr>
         <p:spPr>
           <a:xfrm>
-            <a:off x="3017520" y="3657600"/>
+            <a:off x="1783080" y="3657600"/>
             <a:ext cx="2240280" cy="1965960"/>
           </a:xfrm>
           <a:prstGeom prst="roundRect">
@@ -2830,13 +3054,13 @@
       </p:sp>
       <p:sp>
         <p:nvSpPr>
-          <p:cNvPr id="24" name="outil-5-rond"/>
+          <p:cNvPr id="19" name="outil-4-rond"/>
           <p:cNvSpPr/>
           <p:nvPr/>
         </p:nvSpPr>
         <p:spPr>
           <a:xfrm>
-            <a:off x="3246120" y="3886200"/>
+            <a:off x="2011680" y="3886200"/>
             <a:ext cx="548640" cy="548640"/>
           </a:xfrm>
           <a:prstGeom prst="ellipse">
@@ -2855,21 +3079,21 @@
       </p:sp>
       <p:pic>
         <p:nvPicPr>
-          <p:cNvPr id="25" name="outil-5-icone" descr="preencoded.png">    </p:cNvPr>
+          <p:cNvPr id="20" name="outil-4-icone" descr="preencoded.png">    </p:cNvPr>
           <p:cNvPicPr>
             <a:picLocks noChangeAspect="1"/>
           </p:cNvPicPr>
           <p:nvPr/>
         </p:nvPicPr>
         <p:blipFill>
-          <a:blip r:embed="rId5"/>
+          <a:blip r:embed="rId4"/>
           <a:stretch>
             <a:fillRect/>
           </a:stretch>
         </p:blipFill>
         <p:spPr>
           <a:xfrm>
-            <a:off x="3377794" y="4017874"/>
+            <a:off x="2143354" y="4017874"/>
             <a:ext cx="285293" cy="285293"/>
           </a:xfrm>
           <a:prstGeom prst="rect">
@@ -2879,13 +3103,13 @@
       </p:pic>
       <p:sp>
         <p:nvSpPr>
-          <p:cNvPr id="26" name="outil-5-nom"/>
+          <p:cNvPr id="21" name="outil-4-nom"/>
           <p:cNvSpPr txBox="1"/>
           <p:nvPr/>
         </p:nvSpPr>
         <p:spPr>
           <a:xfrm>
-            <a:off x="3246120" y="4526280"/>
+            <a:off x="2011680" y="4526280"/>
             <a:ext cx="1828800" cy="365760"/>
           </a:xfrm>
           <a:prstGeom prst="rect">
@@ -2918,13 +3142,13 @@
       </p:sp>
       <p:sp>
         <p:nvSpPr>
-          <p:cNvPr id="27" name="outil-5-usage"/>
+          <p:cNvPr id="22" name="outil-4-usage"/>
           <p:cNvSpPr txBox="1"/>
           <p:nvPr/>
         </p:nvSpPr>
         <p:spPr>
           <a:xfrm>
-            <a:off x="3246120" y="4892040"/>
+            <a:off x="2011680" y="4892040"/>
             <a:ext cx="1828800" cy="640080"/>
           </a:xfrm>
           <a:prstGeom prst="rect">
@@ -2957,13 +3181,13 @@
       </p:sp>
       <p:sp>
         <p:nvSpPr>
-          <p:cNvPr id="28" name="outil-6-carte"/>
+          <p:cNvPr id="23" name="outil-5-carte"/>
           <p:cNvSpPr/>
           <p:nvPr/>
         </p:nvSpPr>
         <p:spPr>
           <a:xfrm>
-            <a:off x="5486400" y="3657600"/>
+            <a:off x="4251960" y="3657600"/>
             <a:ext cx="2240280" cy="1965960"/>
           </a:xfrm>
           <a:prstGeom prst="roundRect">
@@ -2984,13 +3208,13 @@
       </p:sp>
       <p:sp>
         <p:nvSpPr>
-          <p:cNvPr id="29" name="outil-6-rond"/>
+          <p:cNvPr id="24" name="outil-5-rond"/>
           <p:cNvSpPr/>
           <p:nvPr/>
         </p:nvSpPr>
         <p:spPr>
           <a:xfrm>
-            <a:off x="5715000" y="3886200"/>
+            <a:off x="4480560" y="3886200"/>
             <a:ext cx="548640" cy="548640"/>
           </a:xfrm>
           <a:prstGeom prst="ellipse">
@@ -3009,21 +3233,21 @@
       </p:sp>
       <p:pic>
         <p:nvPicPr>
-          <p:cNvPr id="30" name="outil-6-icone" descr="preencoded.png">    </p:cNvPr>
+          <p:cNvPr id="25" name="outil-5-icone" descr="preencoded.png">    </p:cNvPr>
           <p:cNvPicPr>
             <a:picLocks noChangeAspect="1"/>
           </p:cNvPicPr>
           <p:nvPr/>
         </p:nvPicPr>
         <p:blipFill>
-          <a:blip r:embed="rId6"/>
+          <a:blip r:embed="rId5"/>
           <a:stretch>
             <a:fillRect/>
           </a:stretch>
         </p:blipFill>
         <p:spPr>
           <a:xfrm>
-            <a:off x="5846674" y="4017874"/>
+            <a:off x="4612234" y="4017874"/>
             <a:ext cx="285293" cy="285293"/>
           </a:xfrm>
           <a:prstGeom prst="rect">
@@ -3033,13 +3257,13 @@
       </p:pic>
       <p:sp>
         <p:nvSpPr>
-          <p:cNvPr id="31" name="outil-6-nom"/>
+          <p:cNvPr id="26" name="outil-5-nom"/>
           <p:cNvSpPr txBox="1"/>
           <p:nvPr/>
         </p:nvSpPr>
         <p:spPr>
           <a:xfrm>
-            <a:off x="5715000" y="4526280"/>
+            <a:off x="4480560" y="4526280"/>
             <a:ext cx="1828800" cy="365760"/>
           </a:xfrm>
           <a:prstGeom prst="rect">
@@ -3072,13 +3296,13 @@
       </p:sp>
       <p:sp>
         <p:nvSpPr>
-          <p:cNvPr id="32" name="outil-6-usage"/>
+          <p:cNvPr id="27" name="outil-5-usage"/>
           <p:cNvSpPr txBox="1"/>
           <p:nvPr/>
         </p:nvSpPr>
         <p:spPr>
           <a:xfrm>
-            <a:off x="5715000" y="4892040"/>
+            <a:off x="4480560" y="4892040"/>
             <a:ext cx="1828800" cy="640080"/>
           </a:xfrm>
           <a:prstGeom prst="rect">
@@ -3111,7 +3335,7 @@
       </p:sp>
       <p:sp>
         <p:nvSpPr>
-          <p:cNvPr id="33" name="consequences-panneau"/>
+          <p:cNvPr id="28" name="consequences-panneau"/>
           <p:cNvSpPr/>
           <p:nvPr/>
         </p:nvSpPr>
@@ -3138,7 +3362,7 @@
       </p:sp>
       <p:sp>
         <p:nvSpPr>
-          <p:cNvPr id="34" name="consequences-titre"/>
+          <p:cNvPr id="29" name="consequences-titre"/>
           <p:cNvSpPr txBox="1"/>
           <p:nvPr/>
         </p:nvSpPr>
@@ -3169,7 +3393,7 @@
                 <a:ea typeface="Barlow Condensed" pitchFamily="34" charset="-122"/>
                 <a:cs typeface="Barlow Condensed" pitchFamily="34" charset="-120"/>
               </a:rPr>
-              <a:t>6 outils qui ne se parlent pas</a:t>
+              <a:t>5 outils qui ne se parlent pas</a:t>
             </a:r>
             <a:endParaRPr lang="en-US" sz="2200" dirty="0"/>
           </a:p>
@@ -3177,14 +3401,14 @@
       </p:sp>
       <p:pic>
         <p:nvPicPr>
-          <p:cNvPr id="35" name="consequence-1-icone" descr="preencoded.png">    </p:cNvPr>
+          <p:cNvPr id="30" name="consequence-1-icone" descr="preencoded.png">    </p:cNvPr>
           <p:cNvPicPr>
             <a:picLocks noChangeAspect="1"/>
           </p:cNvPicPr>
           <p:nvPr/>
         </p:nvPicPr>
         <p:blipFill>
-          <a:blip r:embed="rId7"/>
+          <a:blip r:embed="rId6"/>
           <a:stretch>
             <a:fillRect/>
           </a:stretch>
@@ -3201,7 +3425,7 @@
       </p:pic>
       <p:sp>
         <p:nvSpPr>
-          <p:cNvPr id="36" name="consequence-1"/>
+          <p:cNvPr id="31" name="consequence-1"/>
           <p:cNvSpPr txBox="1"/>
           <p:nvPr/>
         </p:nvSpPr>
@@ -3240,14 +3464,14 @@
       </p:sp>
       <p:pic>
         <p:nvPicPr>
-          <p:cNvPr id="37" name="consequence-2-icone" descr="preencoded.png">    </p:cNvPr>
+          <p:cNvPr id="32" name="consequence-2-icone" descr="preencoded.png">    </p:cNvPr>
           <p:cNvPicPr>
             <a:picLocks noChangeAspect="1"/>
           </p:cNvPicPr>
           <p:nvPr/>
         </p:nvPicPr>
         <p:blipFill>
-          <a:blip r:embed="rId8"/>
+          <a:blip r:embed="rId7"/>
           <a:stretch>
             <a:fillRect/>
           </a:stretch>
@@ -3264,7 +3488,7 @@
       </p:pic>
       <p:sp>
         <p:nvSpPr>
-          <p:cNvPr id="38" name="consequence-2"/>
+          <p:cNvPr id="33" name="consequence-2"/>
           <p:cNvSpPr txBox="1"/>
           <p:nvPr/>
         </p:nvSpPr>
@@ -3303,14 +3527,14 @@
       </p:sp>
       <p:pic>
         <p:nvPicPr>
-          <p:cNvPr id="39" name="consequence-3-icone" descr="preencoded.png">    </p:cNvPr>
+          <p:cNvPr id="34" name="consequence-3-icone" descr="preencoded.png">    </p:cNvPr>
           <p:cNvPicPr>
             <a:picLocks noChangeAspect="1"/>
           </p:cNvPicPr>
           <p:nvPr/>
         </p:nvPicPr>
         <p:blipFill>
-          <a:blip r:embed="rId9"/>
+          <a:blip r:embed="rId8"/>
           <a:stretch>
             <a:fillRect/>
           </a:stretch>
@@ -3327,7 +3551,7 @@
       </p:pic>
       <p:sp>
         <p:nvSpPr>
-          <p:cNvPr id="40" name="consequence-3"/>
+          <p:cNvPr id="35" name="consequence-3"/>
           <p:cNvSpPr txBox="1"/>
           <p:nvPr/>
         </p:nvSpPr>
@@ -3417,6 +3641,1242 @@
   <p:clrMapOvr>
     <a:masterClrMapping/>
   </p:clrMapOvr>
+  <p:transition spd="med">
+    <p:fade/>
+  </p:transition>
+  <p:timing>
+    <p:tnLst>
+      <p:par>
+        <p:cTn id="1" dur="indefinite" restart="never" nodeType="tmRoot">
+          <p:childTnLst>
+            <p:seq concurrent="1" nextAc="seek">
+              <p:cTn id="2" dur="indefinite" nodeType="mainSeq">
+                <p:childTnLst>
+                  <p:par>
+                    <p:cTn id="3" fill="hold">
+                      <p:stCondLst>
+                        <p:cond delay="indefinite"/>
+                        <p:cond evt="onBegin" delay="0">
+                          <p:tn val="2"/>
+                        </p:cond>
+                      </p:stCondLst>
+                      <p:childTnLst>
+                        <p:par>
+                          <p:cTn id="4" fill="hold">
+                            <p:stCondLst>
+                              <p:cond delay="0"/>
+                            </p:stCondLst>
+                            <p:childTnLst>
+                              <p:par>
+                                <p:cTn id="5" presetID="10" presetClass="entr" presetSubtype="0" fill="hold" grpId="0" nodeType="afterEffect">
+                                  <p:stCondLst>
+                                    <p:cond delay="0"/>
+                                  </p:stCondLst>
+                                  <p:childTnLst>
+                                    <p:set>
+                                      <p:cBhvr>
+                                        <p:cTn id="6" dur="1" fill="hold">
+                                          <p:stCondLst>
+                                            <p:cond delay="0"/>
+                                          </p:stCondLst>
+                                        </p:cTn>
+                                        <p:tgtEl>
+                                          <p:spTgt spid="3"/>
+                                        </p:tgtEl>
+                                        <p:attrNameLst>
+                                          <p:attrName>style.visibility</p:attrName>
+                                        </p:attrNameLst>
+                                      </p:cBhvr>
+                                      <p:to>
+                                        <p:strVal val="visible"/>
+                                      </p:to>
+                                    </p:set>
+                                    <p:animEffect transition="in" filter="fade">
+                                      <p:cBhvr>
+                                        <p:cTn id="7" dur="500"/>
+                                        <p:tgtEl>
+                                          <p:spTgt spid="3"/>
+                                        </p:tgtEl>
+                                      </p:cBhvr>
+                                    </p:animEffect>
+                                  </p:childTnLst>
+                                </p:cTn>
+                              </p:par>
+                              <p:par>
+                                <p:cTn id="8" presetID="10" presetClass="entr" presetSubtype="0" fill="hold" grpId="0" nodeType="withEffect">
+                                  <p:stCondLst>
+                                    <p:cond delay="0"/>
+                                  </p:stCondLst>
+                                  <p:childTnLst>
+                                    <p:set>
+                                      <p:cBhvr>
+                                        <p:cTn id="9" dur="1" fill="hold">
+                                          <p:stCondLst>
+                                            <p:cond delay="0"/>
+                                          </p:stCondLst>
+                                        </p:cTn>
+                                        <p:tgtEl>
+                                          <p:spTgt spid="4"/>
+                                        </p:tgtEl>
+                                        <p:attrNameLst>
+                                          <p:attrName>style.visibility</p:attrName>
+                                        </p:attrNameLst>
+                                      </p:cBhvr>
+                                      <p:to>
+                                        <p:strVal val="visible"/>
+                                      </p:to>
+                                    </p:set>
+                                    <p:animEffect transition="in" filter="fade">
+                                      <p:cBhvr>
+                                        <p:cTn id="10" dur="500"/>
+                                        <p:tgtEl>
+                                          <p:spTgt spid="4"/>
+                                        </p:tgtEl>
+                                      </p:cBhvr>
+                                    </p:animEffect>
+                                  </p:childTnLst>
+                                </p:cTn>
+                              </p:par>
+                              <p:par>
+                                <p:cTn id="11" presetID="10" presetClass="entr" presetSubtype="0" fill="hold" grpId="0" nodeType="withEffect">
+                                  <p:stCondLst>
+                                    <p:cond delay="0"/>
+                                  </p:stCondLst>
+                                  <p:childTnLst>
+                                    <p:set>
+                                      <p:cBhvr>
+                                        <p:cTn id="12" dur="1" fill="hold">
+                                          <p:stCondLst>
+                                            <p:cond delay="0"/>
+                                          </p:stCondLst>
+                                        </p:cTn>
+                                        <p:tgtEl>
+                                          <p:spTgt spid="5"/>
+                                        </p:tgtEl>
+                                        <p:attrNameLst>
+                                          <p:attrName>style.visibility</p:attrName>
+                                        </p:attrNameLst>
+                                      </p:cBhvr>
+                                      <p:to>
+                                        <p:strVal val="visible"/>
+                                      </p:to>
+                                    </p:set>
+                                    <p:animEffect transition="in" filter="fade">
+                                      <p:cBhvr>
+                                        <p:cTn id="13" dur="500"/>
+                                        <p:tgtEl>
+                                          <p:spTgt spid="5"/>
+                                        </p:tgtEl>
+                                      </p:cBhvr>
+                                    </p:animEffect>
+                                  </p:childTnLst>
+                                </p:cTn>
+                              </p:par>
+                              <p:par>
+                                <p:cTn id="14" presetID="10" presetClass="entr" presetSubtype="0" fill="hold" grpId="0" nodeType="withEffect">
+                                  <p:stCondLst>
+                                    <p:cond delay="0"/>
+                                  </p:stCondLst>
+                                  <p:childTnLst>
+                                    <p:set>
+                                      <p:cBhvr>
+                                        <p:cTn id="15" dur="1" fill="hold">
+                                          <p:stCondLst>
+                                            <p:cond delay="0"/>
+                                          </p:stCondLst>
+                                        </p:cTn>
+                                        <p:tgtEl>
+                                          <p:spTgt spid="6"/>
+                                        </p:tgtEl>
+                                        <p:attrNameLst>
+                                          <p:attrName>style.visibility</p:attrName>
+                                        </p:attrNameLst>
+                                      </p:cBhvr>
+                                      <p:to>
+                                        <p:strVal val="visible"/>
+                                      </p:to>
+                                    </p:set>
+                                    <p:animEffect transition="in" filter="fade">
+                                      <p:cBhvr>
+                                        <p:cTn id="16" dur="500"/>
+                                        <p:tgtEl>
+                                          <p:spTgt spid="6"/>
+                                        </p:tgtEl>
+                                      </p:cBhvr>
+                                    </p:animEffect>
+                                  </p:childTnLst>
+                                </p:cTn>
+                              </p:par>
+                              <p:par>
+                                <p:cTn id="17" presetID="10" presetClass="entr" presetSubtype="0" fill="hold" grpId="0" nodeType="withEffect">
+                                  <p:stCondLst>
+                                    <p:cond delay="0"/>
+                                  </p:stCondLst>
+                                  <p:childTnLst>
+                                    <p:set>
+                                      <p:cBhvr>
+                                        <p:cTn id="18" dur="1" fill="hold">
+                                          <p:stCondLst>
+                                            <p:cond delay="0"/>
+                                          </p:stCondLst>
+                                        </p:cTn>
+                                        <p:tgtEl>
+                                          <p:spTgt spid="7"/>
+                                        </p:tgtEl>
+                                        <p:attrNameLst>
+                                          <p:attrName>style.visibility</p:attrName>
+                                        </p:attrNameLst>
+                                      </p:cBhvr>
+                                      <p:to>
+                                        <p:strVal val="visible"/>
+                                      </p:to>
+                                    </p:set>
+                                    <p:animEffect transition="in" filter="fade">
+                                      <p:cBhvr>
+                                        <p:cTn id="19" dur="500"/>
+                                        <p:tgtEl>
+                                          <p:spTgt spid="7"/>
+                                        </p:tgtEl>
+                                      </p:cBhvr>
+                                    </p:animEffect>
+                                  </p:childTnLst>
+                                </p:cTn>
+                              </p:par>
+                              <p:par>
+                                <p:cTn id="20" presetID="10" presetClass="entr" presetSubtype="0" fill="hold" grpId="0" nodeType="withEffect">
+                                  <p:stCondLst>
+                                    <p:cond delay="300"/>
+                                  </p:stCondLst>
+                                  <p:childTnLst>
+                                    <p:set>
+                                      <p:cBhvr>
+                                        <p:cTn id="21" dur="1" fill="hold">
+                                          <p:stCondLst>
+                                            <p:cond delay="0"/>
+                                          </p:stCondLst>
+                                        </p:cTn>
+                                        <p:tgtEl>
+                                          <p:spTgt spid="8"/>
+                                        </p:tgtEl>
+                                        <p:attrNameLst>
+                                          <p:attrName>style.visibility</p:attrName>
+                                        </p:attrNameLst>
+                                      </p:cBhvr>
+                                      <p:to>
+                                        <p:strVal val="visible"/>
+                                      </p:to>
+                                    </p:set>
+                                    <p:animEffect transition="in" filter="fade">
+                                      <p:cBhvr>
+                                        <p:cTn id="22" dur="500"/>
+                                        <p:tgtEl>
+                                          <p:spTgt spid="8"/>
+                                        </p:tgtEl>
+                                      </p:cBhvr>
+                                    </p:animEffect>
+                                  </p:childTnLst>
+                                </p:cTn>
+                              </p:par>
+                              <p:par>
+                                <p:cTn id="23" presetID="10" presetClass="entr" presetSubtype="0" fill="hold" grpId="0" nodeType="withEffect">
+                                  <p:stCondLst>
+                                    <p:cond delay="300"/>
+                                  </p:stCondLst>
+                                  <p:childTnLst>
+                                    <p:set>
+                                      <p:cBhvr>
+                                        <p:cTn id="24" dur="1" fill="hold">
+                                          <p:stCondLst>
+                                            <p:cond delay="0"/>
+                                          </p:stCondLst>
+                                        </p:cTn>
+                                        <p:tgtEl>
+                                          <p:spTgt spid="9"/>
+                                        </p:tgtEl>
+                                        <p:attrNameLst>
+                                          <p:attrName>style.visibility</p:attrName>
+                                        </p:attrNameLst>
+                                      </p:cBhvr>
+                                      <p:to>
+                                        <p:strVal val="visible"/>
+                                      </p:to>
+                                    </p:set>
+                                    <p:animEffect transition="in" filter="fade">
+                                      <p:cBhvr>
+                                        <p:cTn id="25" dur="500"/>
+                                        <p:tgtEl>
+                                          <p:spTgt spid="9"/>
+                                        </p:tgtEl>
+                                      </p:cBhvr>
+                                    </p:animEffect>
+                                  </p:childTnLst>
+                                </p:cTn>
+                              </p:par>
+                              <p:par>
+                                <p:cTn id="26" presetID="10" presetClass="entr" presetSubtype="0" fill="hold" grpId="0" nodeType="withEffect">
+                                  <p:stCondLst>
+                                    <p:cond delay="300"/>
+                                  </p:stCondLst>
+                                  <p:childTnLst>
+                                    <p:set>
+                                      <p:cBhvr>
+                                        <p:cTn id="27" dur="1" fill="hold">
+                                          <p:stCondLst>
+                                            <p:cond delay="0"/>
+                                          </p:stCondLst>
+                                        </p:cTn>
+                                        <p:tgtEl>
+                                          <p:spTgt spid="10"/>
+                                        </p:tgtEl>
+                                        <p:attrNameLst>
+                                          <p:attrName>style.visibility</p:attrName>
+                                        </p:attrNameLst>
+                                      </p:cBhvr>
+                                      <p:to>
+                                        <p:strVal val="visible"/>
+                                      </p:to>
+                                    </p:set>
+                                    <p:animEffect transition="in" filter="fade">
+                                      <p:cBhvr>
+                                        <p:cTn id="28" dur="500"/>
+                                        <p:tgtEl>
+                                          <p:spTgt spid="10"/>
+                                        </p:tgtEl>
+                                      </p:cBhvr>
+                                    </p:animEffect>
+                                  </p:childTnLst>
+                                </p:cTn>
+                              </p:par>
+                              <p:par>
+                                <p:cTn id="29" presetID="10" presetClass="entr" presetSubtype="0" fill="hold" grpId="0" nodeType="withEffect">
+                                  <p:stCondLst>
+                                    <p:cond delay="300"/>
+                                  </p:stCondLst>
+                                  <p:childTnLst>
+                                    <p:set>
+                                      <p:cBhvr>
+                                        <p:cTn id="30" dur="1" fill="hold">
+                                          <p:stCondLst>
+                                            <p:cond delay="0"/>
+                                          </p:stCondLst>
+                                        </p:cTn>
+                                        <p:tgtEl>
+                                          <p:spTgt spid="11"/>
+                                        </p:tgtEl>
+                                        <p:attrNameLst>
+                                          <p:attrName>style.visibility</p:attrName>
+                                        </p:attrNameLst>
+                                      </p:cBhvr>
+                                      <p:to>
+                                        <p:strVal val="visible"/>
+                                      </p:to>
+                                    </p:set>
+                                    <p:animEffect transition="in" filter="fade">
+                                      <p:cBhvr>
+                                        <p:cTn id="31" dur="500"/>
+                                        <p:tgtEl>
+                                          <p:spTgt spid="11"/>
+                                        </p:tgtEl>
+                                      </p:cBhvr>
+                                    </p:animEffect>
+                                  </p:childTnLst>
+                                </p:cTn>
+                              </p:par>
+                              <p:par>
+                                <p:cTn id="32" presetID="10" presetClass="entr" presetSubtype="0" fill="hold" grpId="0" nodeType="withEffect">
+                                  <p:stCondLst>
+                                    <p:cond delay="300"/>
+                                  </p:stCondLst>
+                                  <p:childTnLst>
+                                    <p:set>
+                                      <p:cBhvr>
+                                        <p:cTn id="33" dur="1" fill="hold">
+                                          <p:stCondLst>
+                                            <p:cond delay="0"/>
+                                          </p:stCondLst>
+                                        </p:cTn>
+                                        <p:tgtEl>
+                                          <p:spTgt spid="12"/>
+                                        </p:tgtEl>
+                                        <p:attrNameLst>
+                                          <p:attrName>style.visibility</p:attrName>
+                                        </p:attrNameLst>
+                                      </p:cBhvr>
+                                      <p:to>
+                                        <p:strVal val="visible"/>
+                                      </p:to>
+                                    </p:set>
+                                    <p:animEffect transition="in" filter="fade">
+                                      <p:cBhvr>
+                                        <p:cTn id="34" dur="500"/>
+                                        <p:tgtEl>
+                                          <p:spTgt spid="12"/>
+                                        </p:tgtEl>
+                                      </p:cBhvr>
+                                    </p:animEffect>
+                                  </p:childTnLst>
+                                </p:cTn>
+                              </p:par>
+                              <p:par>
+                                <p:cTn id="35" presetID="10" presetClass="entr" presetSubtype="0" fill="hold" grpId="0" nodeType="withEffect">
+                                  <p:stCondLst>
+                                    <p:cond delay="600"/>
+                                  </p:stCondLst>
+                                  <p:childTnLst>
+                                    <p:set>
+                                      <p:cBhvr>
+                                        <p:cTn id="36" dur="1" fill="hold">
+                                          <p:stCondLst>
+                                            <p:cond delay="0"/>
+                                          </p:stCondLst>
+                                        </p:cTn>
+                                        <p:tgtEl>
+                                          <p:spTgt spid="13"/>
+                                        </p:tgtEl>
+                                        <p:attrNameLst>
+                                          <p:attrName>style.visibility</p:attrName>
+                                        </p:attrNameLst>
+                                      </p:cBhvr>
+                                      <p:to>
+                                        <p:strVal val="visible"/>
+                                      </p:to>
+                                    </p:set>
+                                    <p:animEffect transition="in" filter="fade">
+                                      <p:cBhvr>
+                                        <p:cTn id="37" dur="500"/>
+                                        <p:tgtEl>
+                                          <p:spTgt spid="13"/>
+                                        </p:tgtEl>
+                                      </p:cBhvr>
+                                    </p:animEffect>
+                                  </p:childTnLst>
+                                </p:cTn>
+                              </p:par>
+                              <p:par>
+                                <p:cTn id="38" presetID="10" presetClass="entr" presetSubtype="0" fill="hold" grpId="0" nodeType="withEffect">
+                                  <p:stCondLst>
+                                    <p:cond delay="600"/>
+                                  </p:stCondLst>
+                                  <p:childTnLst>
+                                    <p:set>
+                                      <p:cBhvr>
+                                        <p:cTn id="39" dur="1" fill="hold">
+                                          <p:stCondLst>
+                                            <p:cond delay="0"/>
+                                          </p:stCondLst>
+                                        </p:cTn>
+                                        <p:tgtEl>
+                                          <p:spTgt spid="14"/>
+                                        </p:tgtEl>
+                                        <p:attrNameLst>
+                                          <p:attrName>style.visibility</p:attrName>
+                                        </p:attrNameLst>
+                                      </p:cBhvr>
+                                      <p:to>
+                                        <p:strVal val="visible"/>
+                                      </p:to>
+                                    </p:set>
+                                    <p:animEffect transition="in" filter="fade">
+                                      <p:cBhvr>
+                                        <p:cTn id="40" dur="500"/>
+                                        <p:tgtEl>
+                                          <p:spTgt spid="14"/>
+                                        </p:tgtEl>
+                                      </p:cBhvr>
+                                    </p:animEffect>
+                                  </p:childTnLst>
+                                </p:cTn>
+                              </p:par>
+                              <p:par>
+                                <p:cTn id="41" presetID="10" presetClass="entr" presetSubtype="0" fill="hold" grpId="0" nodeType="withEffect">
+                                  <p:stCondLst>
+                                    <p:cond delay="600"/>
+                                  </p:stCondLst>
+                                  <p:childTnLst>
+                                    <p:set>
+                                      <p:cBhvr>
+                                        <p:cTn id="42" dur="1" fill="hold">
+                                          <p:stCondLst>
+                                            <p:cond delay="0"/>
+                                          </p:stCondLst>
+                                        </p:cTn>
+                                        <p:tgtEl>
+                                          <p:spTgt spid="15"/>
+                                        </p:tgtEl>
+                                        <p:attrNameLst>
+                                          <p:attrName>style.visibility</p:attrName>
+                                        </p:attrNameLst>
+                                      </p:cBhvr>
+                                      <p:to>
+                                        <p:strVal val="visible"/>
+                                      </p:to>
+                                    </p:set>
+                                    <p:animEffect transition="in" filter="fade">
+                                      <p:cBhvr>
+                                        <p:cTn id="43" dur="500"/>
+                                        <p:tgtEl>
+                                          <p:spTgt spid="15"/>
+                                        </p:tgtEl>
+                                      </p:cBhvr>
+                                    </p:animEffect>
+                                  </p:childTnLst>
+                                </p:cTn>
+                              </p:par>
+                              <p:par>
+                                <p:cTn id="44" presetID="10" presetClass="entr" presetSubtype="0" fill="hold" grpId="0" nodeType="withEffect">
+                                  <p:stCondLst>
+                                    <p:cond delay="600"/>
+                                  </p:stCondLst>
+                                  <p:childTnLst>
+                                    <p:set>
+                                      <p:cBhvr>
+                                        <p:cTn id="45" dur="1" fill="hold">
+                                          <p:stCondLst>
+                                            <p:cond delay="0"/>
+                                          </p:stCondLst>
+                                        </p:cTn>
+                                        <p:tgtEl>
+                                          <p:spTgt spid="16"/>
+                                        </p:tgtEl>
+                                        <p:attrNameLst>
+                                          <p:attrName>style.visibility</p:attrName>
+                                        </p:attrNameLst>
+                                      </p:cBhvr>
+                                      <p:to>
+                                        <p:strVal val="visible"/>
+                                      </p:to>
+                                    </p:set>
+                                    <p:animEffect transition="in" filter="fade">
+                                      <p:cBhvr>
+                                        <p:cTn id="46" dur="500"/>
+                                        <p:tgtEl>
+                                          <p:spTgt spid="16"/>
+                                        </p:tgtEl>
+                                      </p:cBhvr>
+                                    </p:animEffect>
+                                  </p:childTnLst>
+                                </p:cTn>
+                              </p:par>
+                              <p:par>
+                                <p:cTn id="47" presetID="10" presetClass="entr" presetSubtype="0" fill="hold" grpId="0" nodeType="withEffect">
+                                  <p:stCondLst>
+                                    <p:cond delay="600"/>
+                                  </p:stCondLst>
+                                  <p:childTnLst>
+                                    <p:set>
+                                      <p:cBhvr>
+                                        <p:cTn id="48" dur="1" fill="hold">
+                                          <p:stCondLst>
+                                            <p:cond delay="0"/>
+                                          </p:stCondLst>
+                                        </p:cTn>
+                                        <p:tgtEl>
+                                          <p:spTgt spid="17"/>
+                                        </p:tgtEl>
+                                        <p:attrNameLst>
+                                          <p:attrName>style.visibility</p:attrName>
+                                        </p:attrNameLst>
+                                      </p:cBhvr>
+                                      <p:to>
+                                        <p:strVal val="visible"/>
+                                      </p:to>
+                                    </p:set>
+                                    <p:animEffect transition="in" filter="fade">
+                                      <p:cBhvr>
+                                        <p:cTn id="49" dur="500"/>
+                                        <p:tgtEl>
+                                          <p:spTgt spid="17"/>
+                                        </p:tgtEl>
+                                      </p:cBhvr>
+                                    </p:animEffect>
+                                  </p:childTnLst>
+                                </p:cTn>
+                              </p:par>
+                              <p:par>
+                                <p:cTn id="50" presetID="10" presetClass="entr" presetSubtype="0" fill="hold" grpId="0" nodeType="withEffect">
+                                  <p:stCondLst>
+                                    <p:cond delay="900"/>
+                                  </p:stCondLst>
+                                  <p:childTnLst>
+                                    <p:set>
+                                      <p:cBhvr>
+                                        <p:cTn id="51" dur="1" fill="hold">
+                                          <p:stCondLst>
+                                            <p:cond delay="0"/>
+                                          </p:stCondLst>
+                                        </p:cTn>
+                                        <p:tgtEl>
+                                          <p:spTgt spid="18"/>
+                                        </p:tgtEl>
+                                        <p:attrNameLst>
+                                          <p:attrName>style.visibility</p:attrName>
+                                        </p:attrNameLst>
+                                      </p:cBhvr>
+                                      <p:to>
+                                        <p:strVal val="visible"/>
+                                      </p:to>
+                                    </p:set>
+                                    <p:animEffect transition="in" filter="fade">
+                                      <p:cBhvr>
+                                        <p:cTn id="52" dur="500"/>
+                                        <p:tgtEl>
+                                          <p:spTgt spid="18"/>
+                                        </p:tgtEl>
+                                      </p:cBhvr>
+                                    </p:animEffect>
+                                  </p:childTnLst>
+                                </p:cTn>
+                              </p:par>
+                              <p:par>
+                                <p:cTn id="53" presetID="10" presetClass="entr" presetSubtype="0" fill="hold" grpId="0" nodeType="withEffect">
+                                  <p:stCondLst>
+                                    <p:cond delay="900"/>
+                                  </p:stCondLst>
+                                  <p:childTnLst>
+                                    <p:set>
+                                      <p:cBhvr>
+                                        <p:cTn id="54" dur="1" fill="hold">
+                                          <p:stCondLst>
+                                            <p:cond delay="0"/>
+                                          </p:stCondLst>
+                                        </p:cTn>
+                                        <p:tgtEl>
+                                          <p:spTgt spid="19"/>
+                                        </p:tgtEl>
+                                        <p:attrNameLst>
+                                          <p:attrName>style.visibility</p:attrName>
+                                        </p:attrNameLst>
+                                      </p:cBhvr>
+                                      <p:to>
+                                        <p:strVal val="visible"/>
+                                      </p:to>
+                                    </p:set>
+                                    <p:animEffect transition="in" filter="fade">
+                                      <p:cBhvr>
+                                        <p:cTn id="55" dur="500"/>
+                                        <p:tgtEl>
+                                          <p:spTgt spid="19"/>
+                                        </p:tgtEl>
+                                      </p:cBhvr>
+                                    </p:animEffect>
+                                  </p:childTnLst>
+                                </p:cTn>
+                              </p:par>
+                              <p:par>
+                                <p:cTn id="56" presetID="10" presetClass="entr" presetSubtype="0" fill="hold" grpId="0" nodeType="withEffect">
+                                  <p:stCondLst>
+                                    <p:cond delay="900"/>
+                                  </p:stCondLst>
+                                  <p:childTnLst>
+                                    <p:set>
+                                      <p:cBhvr>
+                                        <p:cTn id="57" dur="1" fill="hold">
+                                          <p:stCondLst>
+                                            <p:cond delay="0"/>
+                                          </p:stCondLst>
+                                        </p:cTn>
+                                        <p:tgtEl>
+                                          <p:spTgt spid="20"/>
+                                        </p:tgtEl>
+                                        <p:attrNameLst>
+                                          <p:attrName>style.visibility</p:attrName>
+                                        </p:attrNameLst>
+                                      </p:cBhvr>
+                                      <p:to>
+                                        <p:strVal val="visible"/>
+                                      </p:to>
+                                    </p:set>
+                                    <p:animEffect transition="in" filter="fade">
+                                      <p:cBhvr>
+                                        <p:cTn id="58" dur="500"/>
+                                        <p:tgtEl>
+                                          <p:spTgt spid="20"/>
+                                        </p:tgtEl>
+                                      </p:cBhvr>
+                                    </p:animEffect>
+                                  </p:childTnLst>
+                                </p:cTn>
+                              </p:par>
+                              <p:par>
+                                <p:cTn id="59" presetID="10" presetClass="entr" presetSubtype="0" fill="hold" grpId="0" nodeType="withEffect">
+                                  <p:stCondLst>
+                                    <p:cond delay="900"/>
+                                  </p:stCondLst>
+                                  <p:childTnLst>
+                                    <p:set>
+                                      <p:cBhvr>
+                                        <p:cTn id="60" dur="1" fill="hold">
+                                          <p:stCondLst>
+                                            <p:cond delay="0"/>
+                                          </p:stCondLst>
+                                        </p:cTn>
+                                        <p:tgtEl>
+                                          <p:spTgt spid="21"/>
+                                        </p:tgtEl>
+                                        <p:attrNameLst>
+                                          <p:attrName>style.visibility</p:attrName>
+                                        </p:attrNameLst>
+                                      </p:cBhvr>
+                                      <p:to>
+                                        <p:strVal val="visible"/>
+                                      </p:to>
+                                    </p:set>
+                                    <p:animEffect transition="in" filter="fade">
+                                      <p:cBhvr>
+                                        <p:cTn id="61" dur="500"/>
+                                        <p:tgtEl>
+                                          <p:spTgt spid="21"/>
+                                        </p:tgtEl>
+                                      </p:cBhvr>
+                                    </p:animEffect>
+                                  </p:childTnLst>
+                                </p:cTn>
+                              </p:par>
+                              <p:par>
+                                <p:cTn id="62" presetID="10" presetClass="entr" presetSubtype="0" fill="hold" grpId="0" nodeType="withEffect">
+                                  <p:stCondLst>
+                                    <p:cond delay="900"/>
+                                  </p:stCondLst>
+                                  <p:childTnLst>
+                                    <p:set>
+                                      <p:cBhvr>
+                                        <p:cTn id="63" dur="1" fill="hold">
+                                          <p:stCondLst>
+                                            <p:cond delay="0"/>
+                                          </p:stCondLst>
+                                        </p:cTn>
+                                        <p:tgtEl>
+                                          <p:spTgt spid="22"/>
+                                        </p:tgtEl>
+                                        <p:attrNameLst>
+                                          <p:attrName>style.visibility</p:attrName>
+                                        </p:attrNameLst>
+                                      </p:cBhvr>
+                                      <p:to>
+                                        <p:strVal val="visible"/>
+                                      </p:to>
+                                    </p:set>
+                                    <p:animEffect transition="in" filter="fade">
+                                      <p:cBhvr>
+                                        <p:cTn id="64" dur="500"/>
+                                        <p:tgtEl>
+                                          <p:spTgt spid="22"/>
+                                        </p:tgtEl>
+                                      </p:cBhvr>
+                                    </p:animEffect>
+                                  </p:childTnLst>
+                                </p:cTn>
+                              </p:par>
+                              <p:par>
+                                <p:cTn id="65" presetID="10" presetClass="entr" presetSubtype="0" fill="hold" grpId="0" nodeType="withEffect">
+                                  <p:stCondLst>
+                                    <p:cond delay="1200"/>
+                                  </p:stCondLst>
+                                  <p:childTnLst>
+                                    <p:set>
+                                      <p:cBhvr>
+                                        <p:cTn id="66" dur="1" fill="hold">
+                                          <p:stCondLst>
+                                            <p:cond delay="0"/>
+                                          </p:stCondLst>
+                                        </p:cTn>
+                                        <p:tgtEl>
+                                          <p:spTgt spid="23"/>
+                                        </p:tgtEl>
+                                        <p:attrNameLst>
+                                          <p:attrName>style.visibility</p:attrName>
+                                        </p:attrNameLst>
+                                      </p:cBhvr>
+                                      <p:to>
+                                        <p:strVal val="visible"/>
+                                      </p:to>
+                                    </p:set>
+                                    <p:animEffect transition="in" filter="fade">
+                                      <p:cBhvr>
+                                        <p:cTn id="67" dur="500"/>
+                                        <p:tgtEl>
+                                          <p:spTgt spid="23"/>
+                                        </p:tgtEl>
+                                      </p:cBhvr>
+                                    </p:animEffect>
+                                  </p:childTnLst>
+                                </p:cTn>
+                              </p:par>
+                              <p:par>
+                                <p:cTn id="68" presetID="10" presetClass="entr" presetSubtype="0" fill="hold" grpId="0" nodeType="withEffect">
+                                  <p:stCondLst>
+                                    <p:cond delay="1200"/>
+                                  </p:stCondLst>
+                                  <p:childTnLst>
+                                    <p:set>
+                                      <p:cBhvr>
+                                        <p:cTn id="69" dur="1" fill="hold">
+                                          <p:stCondLst>
+                                            <p:cond delay="0"/>
+                                          </p:stCondLst>
+                                        </p:cTn>
+                                        <p:tgtEl>
+                                          <p:spTgt spid="24"/>
+                                        </p:tgtEl>
+                                        <p:attrNameLst>
+                                          <p:attrName>style.visibility</p:attrName>
+                                        </p:attrNameLst>
+                                      </p:cBhvr>
+                                      <p:to>
+                                        <p:strVal val="visible"/>
+                                      </p:to>
+                                    </p:set>
+                                    <p:animEffect transition="in" filter="fade">
+                                      <p:cBhvr>
+                                        <p:cTn id="70" dur="500"/>
+                                        <p:tgtEl>
+                                          <p:spTgt spid="24"/>
+                                        </p:tgtEl>
+                                      </p:cBhvr>
+                                    </p:animEffect>
+                                  </p:childTnLst>
+                                </p:cTn>
+                              </p:par>
+                              <p:par>
+                                <p:cTn id="71" presetID="10" presetClass="entr" presetSubtype="0" fill="hold" grpId="0" nodeType="withEffect">
+                                  <p:stCondLst>
+                                    <p:cond delay="1200"/>
+                                  </p:stCondLst>
+                                  <p:childTnLst>
+                                    <p:set>
+                                      <p:cBhvr>
+                                        <p:cTn id="72" dur="1" fill="hold">
+                                          <p:stCondLst>
+                                            <p:cond delay="0"/>
+                                          </p:stCondLst>
+                                        </p:cTn>
+                                        <p:tgtEl>
+                                          <p:spTgt spid="25"/>
+                                        </p:tgtEl>
+                                        <p:attrNameLst>
+                                          <p:attrName>style.visibility</p:attrName>
+                                        </p:attrNameLst>
+                                      </p:cBhvr>
+                                      <p:to>
+                                        <p:strVal val="visible"/>
+                                      </p:to>
+                                    </p:set>
+                                    <p:animEffect transition="in" filter="fade">
+                                      <p:cBhvr>
+                                        <p:cTn id="73" dur="500"/>
+                                        <p:tgtEl>
+                                          <p:spTgt spid="25"/>
+                                        </p:tgtEl>
+                                      </p:cBhvr>
+                                    </p:animEffect>
+                                  </p:childTnLst>
+                                </p:cTn>
+                              </p:par>
+                              <p:par>
+                                <p:cTn id="74" presetID="10" presetClass="entr" presetSubtype="0" fill="hold" grpId="0" nodeType="withEffect">
+                                  <p:stCondLst>
+                                    <p:cond delay="1200"/>
+                                  </p:stCondLst>
+                                  <p:childTnLst>
+                                    <p:set>
+                                      <p:cBhvr>
+                                        <p:cTn id="75" dur="1" fill="hold">
+                                          <p:stCondLst>
+                                            <p:cond delay="0"/>
+                                          </p:stCondLst>
+                                        </p:cTn>
+                                        <p:tgtEl>
+                                          <p:spTgt spid="26"/>
+                                        </p:tgtEl>
+                                        <p:attrNameLst>
+                                          <p:attrName>style.visibility</p:attrName>
+                                        </p:attrNameLst>
+                                      </p:cBhvr>
+                                      <p:to>
+                                        <p:strVal val="visible"/>
+                                      </p:to>
+                                    </p:set>
+                                    <p:animEffect transition="in" filter="fade">
+                                      <p:cBhvr>
+                                        <p:cTn id="76" dur="500"/>
+                                        <p:tgtEl>
+                                          <p:spTgt spid="26"/>
+                                        </p:tgtEl>
+                                      </p:cBhvr>
+                                    </p:animEffect>
+                                  </p:childTnLst>
+                                </p:cTn>
+                              </p:par>
+                              <p:par>
+                                <p:cTn id="77" presetID="10" presetClass="entr" presetSubtype="0" fill="hold" grpId="0" nodeType="withEffect">
+                                  <p:stCondLst>
+                                    <p:cond delay="1200"/>
+                                  </p:stCondLst>
+                                  <p:childTnLst>
+                                    <p:set>
+                                      <p:cBhvr>
+                                        <p:cTn id="78" dur="1" fill="hold">
+                                          <p:stCondLst>
+                                            <p:cond delay="0"/>
+                                          </p:stCondLst>
+                                        </p:cTn>
+                                        <p:tgtEl>
+                                          <p:spTgt spid="27"/>
+                                        </p:tgtEl>
+                                        <p:attrNameLst>
+                                          <p:attrName>style.visibility</p:attrName>
+                                        </p:attrNameLst>
+                                      </p:cBhvr>
+                                      <p:to>
+                                        <p:strVal val="visible"/>
+                                      </p:to>
+                                    </p:set>
+                                    <p:animEffect transition="in" filter="fade">
+                                      <p:cBhvr>
+                                        <p:cTn id="79" dur="500"/>
+                                        <p:tgtEl>
+                                          <p:spTgt spid="27"/>
+                                        </p:tgtEl>
+                                      </p:cBhvr>
+                                    </p:animEffect>
+                                  </p:childTnLst>
+                                </p:cTn>
+                              </p:par>
+                              <p:par>
+                                <p:cTn id="80" presetID="10" presetClass="entr" presetSubtype="0" fill="hold" grpId="0" nodeType="withEffect">
+                                  <p:stCondLst>
+                                    <p:cond delay="1500"/>
+                                  </p:stCondLst>
+                                  <p:childTnLst>
+                                    <p:set>
+                                      <p:cBhvr>
+                                        <p:cTn id="81" dur="1" fill="hold">
+                                          <p:stCondLst>
+                                            <p:cond delay="0"/>
+                                          </p:stCondLst>
+                                        </p:cTn>
+                                        <p:tgtEl>
+                                          <p:spTgt spid="28"/>
+                                        </p:tgtEl>
+                                        <p:attrNameLst>
+                                          <p:attrName>style.visibility</p:attrName>
+                                        </p:attrNameLst>
+                                      </p:cBhvr>
+                                      <p:to>
+                                        <p:strVal val="visible"/>
+                                      </p:to>
+                                    </p:set>
+                                    <p:animEffect transition="in" filter="fade">
+                                      <p:cBhvr>
+                                        <p:cTn id="82" dur="500"/>
+                                        <p:tgtEl>
+                                          <p:spTgt spid="28"/>
+                                        </p:tgtEl>
+                                      </p:cBhvr>
+                                    </p:animEffect>
+                                  </p:childTnLst>
+                                </p:cTn>
+                              </p:par>
+                              <p:par>
+                                <p:cTn id="83" presetID="10" presetClass="entr" presetSubtype="0" fill="hold" grpId="0" nodeType="withEffect">
+                                  <p:stCondLst>
+                                    <p:cond delay="1500"/>
+                                  </p:stCondLst>
+                                  <p:childTnLst>
+                                    <p:set>
+                                      <p:cBhvr>
+                                        <p:cTn id="84" dur="1" fill="hold">
+                                          <p:stCondLst>
+                                            <p:cond delay="0"/>
+                                          </p:stCondLst>
+                                        </p:cTn>
+                                        <p:tgtEl>
+                                          <p:spTgt spid="29"/>
+                                        </p:tgtEl>
+                                        <p:attrNameLst>
+                                          <p:attrName>style.visibility</p:attrName>
+                                        </p:attrNameLst>
+                                      </p:cBhvr>
+                                      <p:to>
+                                        <p:strVal val="visible"/>
+                                      </p:to>
+                                    </p:set>
+                                    <p:animEffect transition="in" filter="fade">
+                                      <p:cBhvr>
+                                        <p:cTn id="85" dur="500"/>
+                                        <p:tgtEl>
+                                          <p:spTgt spid="29"/>
+                                        </p:tgtEl>
+                                      </p:cBhvr>
+                                    </p:animEffect>
+                                  </p:childTnLst>
+                                </p:cTn>
+                              </p:par>
+                              <p:par>
+                                <p:cTn id="86" presetID="10" presetClass="entr" presetSubtype="0" fill="hold" grpId="0" nodeType="withEffect">
+                                  <p:stCondLst>
+                                    <p:cond delay="1800"/>
+                                  </p:stCondLst>
+                                  <p:childTnLst>
+                                    <p:set>
+                                      <p:cBhvr>
+                                        <p:cTn id="87" dur="1" fill="hold">
+                                          <p:stCondLst>
+                                            <p:cond delay="0"/>
+                                          </p:stCondLst>
+                                        </p:cTn>
+                                        <p:tgtEl>
+                                          <p:spTgt spid="30"/>
+                                        </p:tgtEl>
+                                        <p:attrNameLst>
+                                          <p:attrName>style.visibility</p:attrName>
+                                        </p:attrNameLst>
+                                      </p:cBhvr>
+                                      <p:to>
+                                        <p:strVal val="visible"/>
+                                      </p:to>
+                                    </p:set>
+                                    <p:animEffect transition="in" filter="fade">
+                                      <p:cBhvr>
+                                        <p:cTn id="88" dur="500"/>
+                                        <p:tgtEl>
+                                          <p:spTgt spid="30"/>
+                                        </p:tgtEl>
+                                      </p:cBhvr>
+                                    </p:animEffect>
+                                  </p:childTnLst>
+                                </p:cTn>
+                              </p:par>
+                              <p:par>
+                                <p:cTn id="89" presetID="10" presetClass="entr" presetSubtype="0" fill="hold" grpId="0" nodeType="withEffect">
+                                  <p:stCondLst>
+                                    <p:cond delay="1800"/>
+                                  </p:stCondLst>
+                                  <p:childTnLst>
+                                    <p:set>
+                                      <p:cBhvr>
+                                        <p:cTn id="90" dur="1" fill="hold">
+                                          <p:stCondLst>
+                                            <p:cond delay="0"/>
+                                          </p:stCondLst>
+                                        </p:cTn>
+                                        <p:tgtEl>
+                                          <p:spTgt spid="31"/>
+                                        </p:tgtEl>
+                                        <p:attrNameLst>
+                                          <p:attrName>style.visibility</p:attrName>
+                                        </p:attrNameLst>
+                                      </p:cBhvr>
+                                      <p:to>
+                                        <p:strVal val="visible"/>
+                                      </p:to>
+                                    </p:set>
+                                    <p:animEffect transition="in" filter="fade">
+                                      <p:cBhvr>
+                                        <p:cTn id="91" dur="500"/>
+                                        <p:tgtEl>
+                                          <p:spTgt spid="31"/>
+                                        </p:tgtEl>
+                                      </p:cBhvr>
+                                    </p:animEffect>
+                                  </p:childTnLst>
+                                </p:cTn>
+                              </p:par>
+                              <p:par>
+                                <p:cTn id="92" presetID="10" presetClass="entr" presetSubtype="0" fill="hold" grpId="0" nodeType="withEffect">
+                                  <p:stCondLst>
+                                    <p:cond delay="2100"/>
+                                  </p:stCondLst>
+                                  <p:childTnLst>
+                                    <p:set>
+                                      <p:cBhvr>
+                                        <p:cTn id="93" dur="1" fill="hold">
+                                          <p:stCondLst>
+                                            <p:cond delay="0"/>
+                                          </p:stCondLst>
+                                        </p:cTn>
+                                        <p:tgtEl>
+                                          <p:spTgt spid="32"/>
+                                        </p:tgtEl>
+                                        <p:attrNameLst>
+                                          <p:attrName>style.visibility</p:attrName>
+                                        </p:attrNameLst>
+                                      </p:cBhvr>
+                                      <p:to>
+                                        <p:strVal val="visible"/>
+                                      </p:to>
+                                    </p:set>
+                                    <p:animEffect transition="in" filter="fade">
+                                      <p:cBhvr>
+                                        <p:cTn id="94" dur="500"/>
+                                        <p:tgtEl>
+                                          <p:spTgt spid="32"/>
+                                        </p:tgtEl>
+                                      </p:cBhvr>
+                                    </p:animEffect>
+                                  </p:childTnLst>
+                                </p:cTn>
+                              </p:par>
+                              <p:par>
+                                <p:cTn id="95" presetID="10" presetClass="entr" presetSubtype="0" fill="hold" grpId="0" nodeType="withEffect">
+                                  <p:stCondLst>
+                                    <p:cond delay="2100"/>
+                                  </p:stCondLst>
+                                  <p:childTnLst>
+                                    <p:set>
+                                      <p:cBhvr>
+                                        <p:cTn id="96" dur="1" fill="hold">
+                                          <p:stCondLst>
+                                            <p:cond delay="0"/>
+                                          </p:stCondLst>
+                                        </p:cTn>
+                                        <p:tgtEl>
+                                          <p:spTgt spid="33"/>
+                                        </p:tgtEl>
+                                        <p:attrNameLst>
+                                          <p:attrName>style.visibility</p:attrName>
+                                        </p:attrNameLst>
+                                      </p:cBhvr>
+                                      <p:to>
+                                        <p:strVal val="visible"/>
+                                      </p:to>
+                                    </p:set>
+                                    <p:animEffect transition="in" filter="fade">
+                                      <p:cBhvr>
+                                        <p:cTn id="97" dur="500"/>
+                                        <p:tgtEl>
+                                          <p:spTgt spid="33"/>
+                                        </p:tgtEl>
+                                      </p:cBhvr>
+                                    </p:animEffect>
+                                  </p:childTnLst>
+                                </p:cTn>
+                              </p:par>
+                              <p:par>
+                                <p:cTn id="98" presetID="10" presetClass="entr" presetSubtype="0" fill="hold" grpId="0" nodeType="withEffect">
+                                  <p:stCondLst>
+                                    <p:cond delay="2400"/>
+                                  </p:stCondLst>
+                                  <p:childTnLst>
+                                    <p:set>
+                                      <p:cBhvr>
+                                        <p:cTn id="99" dur="1" fill="hold">
+                                          <p:stCondLst>
+                                            <p:cond delay="0"/>
+                                          </p:stCondLst>
+                                        </p:cTn>
+                                        <p:tgtEl>
+                                          <p:spTgt spid="34"/>
+                                        </p:tgtEl>
+                                        <p:attrNameLst>
+                                          <p:attrName>style.visibility</p:attrName>
+                                        </p:attrNameLst>
+                                      </p:cBhvr>
+                                      <p:to>
+                                        <p:strVal val="visible"/>
+                                      </p:to>
+                                    </p:set>
+                                    <p:animEffect transition="in" filter="fade">
+                                      <p:cBhvr>
+                                        <p:cTn id="100" dur="500"/>
+                                        <p:tgtEl>
+                                          <p:spTgt spid="34"/>
+                                        </p:tgtEl>
+                                      </p:cBhvr>
+                                    </p:animEffect>
+                                  </p:childTnLst>
+                                </p:cTn>
+                              </p:par>
+                              <p:par>
+                                <p:cTn id="101" presetID="10" presetClass="entr" presetSubtype="0" fill="hold" grpId="0" nodeType="withEffect">
+                                  <p:stCondLst>
+                                    <p:cond delay="2400"/>
+                                  </p:stCondLst>
+                                  <p:childTnLst>
+                                    <p:set>
+                                      <p:cBhvr>
+                                        <p:cTn id="102" dur="1" fill="hold">
+                                          <p:stCondLst>
+                                            <p:cond delay="0"/>
+                                          </p:stCondLst>
+                                        </p:cTn>
+                                        <p:tgtEl>
+                                          <p:spTgt spid="35"/>
+                                        </p:tgtEl>
+                                        <p:attrNameLst>
+                                          <p:attrName>style.visibility</p:attrName>
+                                        </p:attrNameLst>
+                                      </p:cBhvr>
+                                      <p:to>
+                                        <p:strVal val="visible"/>
+                                      </p:to>
+                                    </p:set>
+                                    <p:animEffect transition="in" filter="fade">
+                                      <p:cBhvr>
+                                        <p:cTn id="103" dur="500"/>
+                                        <p:tgtEl>
+                                          <p:spTgt spid="35"/>
+                                        </p:tgtEl>
+                                      </p:cBhvr>
+                                    </p:animEffect>
+                                  </p:childTnLst>
+                                </p:cTn>
+                              </p:par>
+                            </p:childTnLst>
+                          </p:cTn>
+                        </p:par>
+                      </p:childTnLst>
+                    </p:cTn>
+                  </p:par>
+                </p:childTnLst>
+              </p:cTn>
+              <p:prevCondLst>
+                <p:cond evt="onPrev" delay="0">
+                  <p:tgtEl>
+                    <p:sldTgt/>
+                  </p:tgtEl>
+                </p:cond>
+              </p:prevCondLst>
+              <p:nextCondLst>
+                <p:cond evt="onNext" delay="0">
+                  <p:tgtEl>
+                    <p:sldTgt/>
+                  </p:tgtEl>
+                </p:cond>
+              </p:nextCondLst>
+            </p:seq>
+          </p:childTnLst>
+        </p:cTn>
+      </p:par>
+    </p:tnLst>
+    <p:bldLst>
+      <p:bldP spid="3" grpId="0" animBg="1"/>
+      <p:bldP spid="4" grpId="0" animBg="1"/>
+      <p:bldP spid="6" grpId="0" animBg="1"/>
+      <p:bldP spid="7" grpId="0" animBg="1"/>
+      <p:bldP spid="8" grpId="0" animBg="1"/>
+      <p:bldP spid="9" grpId="0" animBg="1"/>
+      <p:bldP spid="11" grpId="0" animBg="1"/>
+      <p:bldP spid="12" grpId="0" animBg="1"/>
+      <p:bldP spid="13" grpId="0" animBg="1"/>
+      <p:bldP spid="14" grpId="0" animBg="1"/>
+      <p:bldP spid="16" grpId="0" animBg="1"/>
+      <p:bldP spid="17" grpId="0" animBg="1"/>
+      <p:bldP spid="18" grpId="0" animBg="1"/>
+      <p:bldP spid="19" grpId="0" animBg="1"/>
+      <p:bldP spid="21" grpId="0" animBg="1"/>
+      <p:bldP spid="22" grpId="0" animBg="1"/>
+      <p:bldP spid="23" grpId="0" animBg="1"/>
+      <p:bldP spid="24" grpId="0" animBg="1"/>
+      <p:bldP spid="26" grpId="0" animBg="1"/>
+      <p:bldP spid="27" grpId="0" animBg="1"/>
+      <p:bldP spid="28" grpId="0" animBg="1"/>
+      <p:bldP spid="29" grpId="0" animBg="1"/>
+      <p:bldP spid="31" grpId="0" animBg="1"/>
+      <p:bldP spid="33" grpId="0" animBg="1"/>
+      <p:bldP spid="35" grpId="0" animBg="1"/>
+    </p:bldLst>
+  </p:timing>
 </p:sld>
 </file>
 
@@ -3553,7 +5013,7 @@
       </p:sp>
       <p:pic>
         <p:nvPicPr>
-          <p:cNvPr id="5" name="service-1-capture" descr="Emploi du temps vivant : Semaine, mois et détail de chaque cours : toujours à jour, sans PDF à rechercher.">    </p:cNvPr>
+          <p:cNvPr id="5" name="service-1-capture" descr="Emploi du temps vivant : Toujours à jour, et dans l'agenda du téléphone ou Google Agenda.">    </p:cNvPr>
           <p:cNvPicPr>
             <a:picLocks noChangeAspect="1"/>
           </p:cNvPicPr>
@@ -3647,7 +5107,7 @@
                 <a:ea typeface="Barlow" pitchFamily="34" charset="-122"/>
                 <a:cs typeface="Barlow" pitchFamily="34" charset="-120"/>
               </a:rPr>
-              <a:t>Semaine, mois et détail de chaque cours : toujours à jour, sans PDF à rechercher.</a:t>
+              <a:t>Toujours à jour, et dans l'agenda du téléphone ou Google Agenda.</a:t>
             </a:r>
             <a:endParaRPr lang="en-US" sz="1300" dirty="0"/>
           </a:p>
@@ -3689,7 +5149,7 @@
       </p:sp>
       <p:pic>
         <p:nvPicPr>
-          <p:cNvPr id="9" name="service-2-capture" descr="Alertes instantanées : Un cours reporté, une salle qui change : l'étudiant est prévenu sur son téléphone.">    </p:cNvPr>
+          <p:cNvPr id="9" name="service-2-capture" descr="Annonces et alertes : Un report, une salle qui change, une annonce : seuls les concernés sont prévenus.">    </p:cNvPr>
           <p:cNvPicPr>
             <a:picLocks noChangeAspect="1"/>
           </p:cNvPicPr>
@@ -3744,7 +5204,7 @@
                 <a:ea typeface="Barlow Condensed" pitchFamily="34" charset="-122"/>
                 <a:cs typeface="Barlow Condensed" pitchFamily="34" charset="-120"/>
               </a:rPr>
-              <a:t>Alertes instantanées</a:t>
+              <a:t>Annonces et alertes</a:t>
             </a:r>
             <a:endParaRPr lang="en-US" sz="2000" dirty="0"/>
           </a:p>
@@ -3783,7 +5243,7 @@
                 <a:ea typeface="Barlow" pitchFamily="34" charset="-122"/>
                 <a:cs typeface="Barlow" pitchFamily="34" charset="-120"/>
               </a:rPr>
-              <a:t>Un cours reporté, une salle qui change : l'étudiant est prévenu sur son téléphone.</a:t>
+              <a:t>Un report, une salle qui change, une annonce : seuls les concernés sont prévenus.</a:t>
             </a:r>
             <a:endParaRPr lang="en-US" sz="1300" dirty="0"/>
           </a:p>
@@ -3825,7 +5285,7 @@
       </p:sp>
       <p:pic>
         <p:nvPicPr>
-          <p:cNvPr id="13" name="service-3-capture" descr="Bibliothèque de cours : Les supports de chaque cours, rangés par module, à portée de main.">    </p:cNvPr>
+          <p:cNvPr id="13" name="service-3-capture" descr="Bibliothèque : Supports par module, lisibles même hors ligne, retours de stage et idées de projets.">    </p:cNvPr>
           <p:cNvPicPr>
             <a:picLocks noChangeAspect="1"/>
           </p:cNvPicPr>
@@ -3880,7 +5340,7 @@
                 <a:ea typeface="Barlow Condensed" pitchFamily="34" charset="-122"/>
                 <a:cs typeface="Barlow Condensed" pitchFamily="34" charset="-120"/>
               </a:rPr>
-              <a:t>Bibliothèque de cours</a:t>
+              <a:t>Bibliothèque</a:t>
             </a:r>
             <a:endParaRPr lang="en-US" sz="2000" dirty="0"/>
           </a:p>
@@ -3919,7 +5379,7 @@
                 <a:ea typeface="Barlow" pitchFamily="34" charset="-122"/>
                 <a:cs typeface="Barlow" pitchFamily="34" charset="-120"/>
               </a:rPr>
-              <a:t>Les supports de chaque cours, rangés par module, à portée de main.</a:t>
+              <a:t>Supports par module, lisibles même hors ligne, retours de stage et idées de projets.</a:t>
             </a:r>
             <a:endParaRPr lang="en-US" sz="1300" dirty="0"/>
           </a:p>
@@ -3961,7 +5421,7 @@
       </p:sp>
       <p:pic>
         <p:nvPicPr>
-          <p:cNvPr id="17" name="service-4-capture" descr="Jeux et quiz : Quiz en classe, devoirs notés automatiquement, défis : les résultats restent à l'école.">    </p:cNvPr>
+          <p:cNvPr id="17" name="service-4-capture" descr="Activités : Quiz, devoirs et jeux choisis par l'enseignant pour vérifier ou s'entraîner.">    </p:cNvPr>
           <p:cNvPicPr>
             <a:picLocks noChangeAspect="1"/>
           </p:cNvPicPr>
@@ -4016,7 +5476,7 @@
                 <a:ea typeface="Barlow Condensed" pitchFamily="34" charset="-122"/>
                 <a:cs typeface="Barlow Condensed" pitchFamily="34" charset="-120"/>
               </a:rPr>
-              <a:t>Jeux et quiz</a:t>
+              <a:t>Activités</a:t>
             </a:r>
             <a:endParaRPr lang="en-US" sz="2000" dirty="0"/>
           </a:p>
@@ -4055,7 +5515,7 @@
                 <a:ea typeface="Barlow" pitchFamily="34" charset="-122"/>
                 <a:cs typeface="Barlow" pitchFamily="34" charset="-120"/>
               </a:rPr>
-              <a:t>Quiz en classe, devoirs notés automatiquement, défis : les résultats restent à l'école.</a:t>
+              <a:t>Quiz, devoirs et jeux choisis par l'enseignant pour vérifier ou s'entraîner.</a:t>
             </a:r>
             <a:endParaRPr lang="en-US" sz="1300" dirty="0"/>
           </a:p>
@@ -4114,6 +5574,670 @@
   <p:clrMapOvr>
     <a:masterClrMapping/>
   </p:clrMapOvr>
+  <p:transition spd="med">
+    <p:fade/>
+  </p:transition>
+  <p:timing>
+    <p:tnLst>
+      <p:par>
+        <p:cTn id="1" dur="indefinite" restart="never" nodeType="tmRoot">
+          <p:childTnLst>
+            <p:seq concurrent="1" nextAc="seek">
+              <p:cTn id="2" dur="indefinite" nodeType="mainSeq">
+                <p:childTnLst>
+                  <p:par>
+                    <p:cTn id="3" fill="hold">
+                      <p:stCondLst>
+                        <p:cond delay="indefinite"/>
+                        <p:cond evt="onBegin" delay="0">
+                          <p:tn val="2"/>
+                        </p:cond>
+                      </p:stCondLst>
+                      <p:childTnLst>
+                        <p:par>
+                          <p:cTn id="4" fill="hold">
+                            <p:stCondLst>
+                              <p:cond delay="0"/>
+                            </p:stCondLst>
+                            <p:childTnLst>
+                              <p:par>
+                                <p:cTn id="5" presetID="10" presetClass="entr" presetSubtype="0" fill="hold" grpId="0" nodeType="afterEffect">
+                                  <p:stCondLst>
+                                    <p:cond delay="0"/>
+                                  </p:stCondLst>
+                                  <p:childTnLst>
+                                    <p:set>
+                                      <p:cBhvr>
+                                        <p:cTn id="6" dur="1" fill="hold">
+                                          <p:stCondLst>
+                                            <p:cond delay="0"/>
+                                          </p:stCondLst>
+                                        </p:cTn>
+                                        <p:tgtEl>
+                                          <p:spTgt spid="3"/>
+                                        </p:tgtEl>
+                                        <p:attrNameLst>
+                                          <p:attrName>style.visibility</p:attrName>
+                                        </p:attrNameLst>
+                                      </p:cBhvr>
+                                      <p:to>
+                                        <p:strVal val="visible"/>
+                                      </p:to>
+                                    </p:set>
+                                    <p:animEffect transition="in" filter="fade">
+                                      <p:cBhvr>
+                                        <p:cTn id="7" dur="500"/>
+                                        <p:tgtEl>
+                                          <p:spTgt spid="3"/>
+                                        </p:tgtEl>
+                                      </p:cBhvr>
+                                    </p:animEffect>
+                                  </p:childTnLst>
+                                </p:cTn>
+                              </p:par>
+                              <p:par>
+                                <p:cTn id="8" presetID="10" presetClass="entr" presetSubtype="0" fill="hold" grpId="0" nodeType="withEffect">
+                                  <p:stCondLst>
+                                    <p:cond delay="300"/>
+                                  </p:stCondLst>
+                                  <p:childTnLst>
+                                    <p:set>
+                                      <p:cBhvr>
+                                        <p:cTn id="9" dur="1" fill="hold">
+                                          <p:stCondLst>
+                                            <p:cond delay="0"/>
+                                          </p:stCondLst>
+                                        </p:cTn>
+                                        <p:tgtEl>
+                                          <p:spTgt spid="4"/>
+                                        </p:tgtEl>
+                                        <p:attrNameLst>
+                                          <p:attrName>style.visibility</p:attrName>
+                                        </p:attrNameLst>
+                                      </p:cBhvr>
+                                      <p:to>
+                                        <p:strVal val="visible"/>
+                                      </p:to>
+                                    </p:set>
+                                    <p:animEffect transition="in" filter="fade">
+                                      <p:cBhvr>
+                                        <p:cTn id="10" dur="500"/>
+                                        <p:tgtEl>
+                                          <p:spTgt spid="4"/>
+                                        </p:tgtEl>
+                                      </p:cBhvr>
+                                    </p:animEffect>
+                                  </p:childTnLst>
+                                </p:cTn>
+                              </p:par>
+                              <p:par>
+                                <p:cTn id="11" presetID="10" presetClass="entr" presetSubtype="0" fill="hold" grpId="0" nodeType="withEffect">
+                                  <p:stCondLst>
+                                    <p:cond delay="300"/>
+                                  </p:stCondLst>
+                                  <p:childTnLst>
+                                    <p:set>
+                                      <p:cBhvr>
+                                        <p:cTn id="12" dur="1" fill="hold">
+                                          <p:stCondLst>
+                                            <p:cond delay="0"/>
+                                          </p:stCondLst>
+                                        </p:cTn>
+                                        <p:tgtEl>
+                                          <p:spTgt spid="5"/>
+                                        </p:tgtEl>
+                                        <p:attrNameLst>
+                                          <p:attrName>style.visibility</p:attrName>
+                                        </p:attrNameLst>
+                                      </p:cBhvr>
+                                      <p:to>
+                                        <p:strVal val="visible"/>
+                                      </p:to>
+                                    </p:set>
+                                    <p:animEffect transition="in" filter="fade">
+                                      <p:cBhvr>
+                                        <p:cTn id="13" dur="500"/>
+                                        <p:tgtEl>
+                                          <p:spTgt spid="5"/>
+                                        </p:tgtEl>
+                                      </p:cBhvr>
+                                    </p:animEffect>
+                                  </p:childTnLst>
+                                </p:cTn>
+                              </p:par>
+                              <p:par>
+                                <p:cTn id="14" presetID="10" presetClass="entr" presetSubtype="0" fill="hold" grpId="0" nodeType="withEffect">
+                                  <p:stCondLst>
+                                    <p:cond delay="300"/>
+                                  </p:stCondLst>
+                                  <p:childTnLst>
+                                    <p:set>
+                                      <p:cBhvr>
+                                        <p:cTn id="15" dur="1" fill="hold">
+                                          <p:stCondLst>
+                                            <p:cond delay="0"/>
+                                          </p:stCondLst>
+                                        </p:cTn>
+                                        <p:tgtEl>
+                                          <p:spTgt spid="6"/>
+                                        </p:tgtEl>
+                                        <p:attrNameLst>
+                                          <p:attrName>style.visibility</p:attrName>
+                                        </p:attrNameLst>
+                                      </p:cBhvr>
+                                      <p:to>
+                                        <p:strVal val="visible"/>
+                                      </p:to>
+                                    </p:set>
+                                    <p:animEffect transition="in" filter="fade">
+                                      <p:cBhvr>
+                                        <p:cTn id="16" dur="500"/>
+                                        <p:tgtEl>
+                                          <p:spTgt spid="6"/>
+                                        </p:tgtEl>
+                                      </p:cBhvr>
+                                    </p:animEffect>
+                                  </p:childTnLst>
+                                </p:cTn>
+                              </p:par>
+                              <p:par>
+                                <p:cTn id="17" presetID="10" presetClass="entr" presetSubtype="0" fill="hold" grpId="0" nodeType="withEffect">
+                                  <p:stCondLst>
+                                    <p:cond delay="300"/>
+                                  </p:stCondLst>
+                                  <p:childTnLst>
+                                    <p:set>
+                                      <p:cBhvr>
+                                        <p:cTn id="18" dur="1" fill="hold">
+                                          <p:stCondLst>
+                                            <p:cond delay="0"/>
+                                          </p:stCondLst>
+                                        </p:cTn>
+                                        <p:tgtEl>
+                                          <p:spTgt spid="7"/>
+                                        </p:tgtEl>
+                                        <p:attrNameLst>
+                                          <p:attrName>style.visibility</p:attrName>
+                                        </p:attrNameLst>
+                                      </p:cBhvr>
+                                      <p:to>
+                                        <p:strVal val="visible"/>
+                                      </p:to>
+                                    </p:set>
+                                    <p:animEffect transition="in" filter="fade">
+                                      <p:cBhvr>
+                                        <p:cTn id="19" dur="500"/>
+                                        <p:tgtEl>
+                                          <p:spTgt spid="7"/>
+                                        </p:tgtEl>
+                                      </p:cBhvr>
+                                    </p:animEffect>
+                                  </p:childTnLst>
+                                </p:cTn>
+                              </p:par>
+                              <p:par>
+                                <p:cTn id="20" presetID="10" presetClass="entr" presetSubtype="0" fill="hold" grpId="0" nodeType="withEffect">
+                                  <p:stCondLst>
+                                    <p:cond delay="600"/>
+                                  </p:stCondLst>
+                                  <p:childTnLst>
+                                    <p:set>
+                                      <p:cBhvr>
+                                        <p:cTn id="21" dur="1" fill="hold">
+                                          <p:stCondLst>
+                                            <p:cond delay="0"/>
+                                          </p:stCondLst>
+                                        </p:cTn>
+                                        <p:tgtEl>
+                                          <p:spTgt spid="8"/>
+                                        </p:tgtEl>
+                                        <p:attrNameLst>
+                                          <p:attrName>style.visibility</p:attrName>
+                                        </p:attrNameLst>
+                                      </p:cBhvr>
+                                      <p:to>
+                                        <p:strVal val="visible"/>
+                                      </p:to>
+                                    </p:set>
+                                    <p:animEffect transition="in" filter="fade">
+                                      <p:cBhvr>
+                                        <p:cTn id="22" dur="500"/>
+                                        <p:tgtEl>
+                                          <p:spTgt spid="8"/>
+                                        </p:tgtEl>
+                                      </p:cBhvr>
+                                    </p:animEffect>
+                                  </p:childTnLst>
+                                </p:cTn>
+                              </p:par>
+                              <p:par>
+                                <p:cTn id="23" presetID="10" presetClass="entr" presetSubtype="0" fill="hold" grpId="0" nodeType="withEffect">
+                                  <p:stCondLst>
+                                    <p:cond delay="600"/>
+                                  </p:stCondLst>
+                                  <p:childTnLst>
+                                    <p:set>
+                                      <p:cBhvr>
+                                        <p:cTn id="24" dur="1" fill="hold">
+                                          <p:stCondLst>
+                                            <p:cond delay="0"/>
+                                          </p:stCondLst>
+                                        </p:cTn>
+                                        <p:tgtEl>
+                                          <p:spTgt spid="9"/>
+                                        </p:tgtEl>
+                                        <p:attrNameLst>
+                                          <p:attrName>style.visibility</p:attrName>
+                                        </p:attrNameLst>
+                                      </p:cBhvr>
+                                      <p:to>
+                                        <p:strVal val="visible"/>
+                                      </p:to>
+                                    </p:set>
+                                    <p:animEffect transition="in" filter="fade">
+                                      <p:cBhvr>
+                                        <p:cTn id="25" dur="500"/>
+                                        <p:tgtEl>
+                                          <p:spTgt spid="9"/>
+                                        </p:tgtEl>
+                                      </p:cBhvr>
+                                    </p:animEffect>
+                                  </p:childTnLst>
+                                </p:cTn>
+                              </p:par>
+                              <p:par>
+                                <p:cTn id="26" presetID="10" presetClass="entr" presetSubtype="0" fill="hold" grpId="0" nodeType="withEffect">
+                                  <p:stCondLst>
+                                    <p:cond delay="600"/>
+                                  </p:stCondLst>
+                                  <p:childTnLst>
+                                    <p:set>
+                                      <p:cBhvr>
+                                        <p:cTn id="27" dur="1" fill="hold">
+                                          <p:stCondLst>
+                                            <p:cond delay="0"/>
+                                          </p:stCondLst>
+                                        </p:cTn>
+                                        <p:tgtEl>
+                                          <p:spTgt spid="10"/>
+                                        </p:tgtEl>
+                                        <p:attrNameLst>
+                                          <p:attrName>style.visibility</p:attrName>
+                                        </p:attrNameLst>
+                                      </p:cBhvr>
+                                      <p:to>
+                                        <p:strVal val="visible"/>
+                                      </p:to>
+                                    </p:set>
+                                    <p:animEffect transition="in" filter="fade">
+                                      <p:cBhvr>
+                                        <p:cTn id="28" dur="500"/>
+                                        <p:tgtEl>
+                                          <p:spTgt spid="10"/>
+                                        </p:tgtEl>
+                                      </p:cBhvr>
+                                    </p:animEffect>
+                                  </p:childTnLst>
+                                </p:cTn>
+                              </p:par>
+                              <p:par>
+                                <p:cTn id="29" presetID="10" presetClass="entr" presetSubtype="0" fill="hold" grpId="0" nodeType="withEffect">
+                                  <p:stCondLst>
+                                    <p:cond delay="600"/>
+                                  </p:stCondLst>
+                                  <p:childTnLst>
+                                    <p:set>
+                                      <p:cBhvr>
+                                        <p:cTn id="30" dur="1" fill="hold">
+                                          <p:stCondLst>
+                                            <p:cond delay="0"/>
+                                          </p:stCondLst>
+                                        </p:cTn>
+                                        <p:tgtEl>
+                                          <p:spTgt spid="11"/>
+                                        </p:tgtEl>
+                                        <p:attrNameLst>
+                                          <p:attrName>style.visibility</p:attrName>
+                                        </p:attrNameLst>
+                                      </p:cBhvr>
+                                      <p:to>
+                                        <p:strVal val="visible"/>
+                                      </p:to>
+                                    </p:set>
+                                    <p:animEffect transition="in" filter="fade">
+                                      <p:cBhvr>
+                                        <p:cTn id="31" dur="500"/>
+                                        <p:tgtEl>
+                                          <p:spTgt spid="11"/>
+                                        </p:tgtEl>
+                                      </p:cBhvr>
+                                    </p:animEffect>
+                                  </p:childTnLst>
+                                </p:cTn>
+                              </p:par>
+                              <p:par>
+                                <p:cTn id="32" presetID="10" presetClass="entr" presetSubtype="0" fill="hold" grpId="0" nodeType="withEffect">
+                                  <p:stCondLst>
+                                    <p:cond delay="900"/>
+                                  </p:stCondLst>
+                                  <p:childTnLst>
+                                    <p:set>
+                                      <p:cBhvr>
+                                        <p:cTn id="33" dur="1" fill="hold">
+                                          <p:stCondLst>
+                                            <p:cond delay="0"/>
+                                          </p:stCondLst>
+                                        </p:cTn>
+                                        <p:tgtEl>
+                                          <p:spTgt spid="12"/>
+                                        </p:tgtEl>
+                                        <p:attrNameLst>
+                                          <p:attrName>style.visibility</p:attrName>
+                                        </p:attrNameLst>
+                                      </p:cBhvr>
+                                      <p:to>
+                                        <p:strVal val="visible"/>
+                                      </p:to>
+                                    </p:set>
+                                    <p:animEffect transition="in" filter="fade">
+                                      <p:cBhvr>
+                                        <p:cTn id="34" dur="500"/>
+                                        <p:tgtEl>
+                                          <p:spTgt spid="12"/>
+                                        </p:tgtEl>
+                                      </p:cBhvr>
+                                    </p:animEffect>
+                                  </p:childTnLst>
+                                </p:cTn>
+                              </p:par>
+                              <p:par>
+                                <p:cTn id="35" presetID="10" presetClass="entr" presetSubtype="0" fill="hold" grpId="0" nodeType="withEffect">
+                                  <p:stCondLst>
+                                    <p:cond delay="900"/>
+                                  </p:stCondLst>
+                                  <p:childTnLst>
+                                    <p:set>
+                                      <p:cBhvr>
+                                        <p:cTn id="36" dur="1" fill="hold">
+                                          <p:stCondLst>
+                                            <p:cond delay="0"/>
+                                          </p:stCondLst>
+                                        </p:cTn>
+                                        <p:tgtEl>
+                                          <p:spTgt spid="13"/>
+                                        </p:tgtEl>
+                                        <p:attrNameLst>
+                                          <p:attrName>style.visibility</p:attrName>
+                                        </p:attrNameLst>
+                                      </p:cBhvr>
+                                      <p:to>
+                                        <p:strVal val="visible"/>
+                                      </p:to>
+                                    </p:set>
+                                    <p:animEffect transition="in" filter="fade">
+                                      <p:cBhvr>
+                                        <p:cTn id="37" dur="500"/>
+                                        <p:tgtEl>
+                                          <p:spTgt spid="13"/>
+                                        </p:tgtEl>
+                                      </p:cBhvr>
+                                    </p:animEffect>
+                                  </p:childTnLst>
+                                </p:cTn>
+                              </p:par>
+                              <p:par>
+                                <p:cTn id="38" presetID="10" presetClass="entr" presetSubtype="0" fill="hold" grpId="0" nodeType="withEffect">
+                                  <p:stCondLst>
+                                    <p:cond delay="900"/>
+                                  </p:stCondLst>
+                                  <p:childTnLst>
+                                    <p:set>
+                                      <p:cBhvr>
+                                        <p:cTn id="39" dur="1" fill="hold">
+                                          <p:stCondLst>
+                                            <p:cond delay="0"/>
+                                          </p:stCondLst>
+                                        </p:cTn>
+                                        <p:tgtEl>
+                                          <p:spTgt spid="14"/>
+                                        </p:tgtEl>
+                                        <p:attrNameLst>
+                                          <p:attrName>style.visibility</p:attrName>
+                                        </p:attrNameLst>
+                                      </p:cBhvr>
+                                      <p:to>
+                                        <p:strVal val="visible"/>
+                                      </p:to>
+                                    </p:set>
+                                    <p:animEffect transition="in" filter="fade">
+                                      <p:cBhvr>
+                                        <p:cTn id="40" dur="500"/>
+                                        <p:tgtEl>
+                                          <p:spTgt spid="14"/>
+                                        </p:tgtEl>
+                                      </p:cBhvr>
+                                    </p:animEffect>
+                                  </p:childTnLst>
+                                </p:cTn>
+                              </p:par>
+                              <p:par>
+                                <p:cTn id="41" presetID="10" presetClass="entr" presetSubtype="0" fill="hold" grpId="0" nodeType="withEffect">
+                                  <p:stCondLst>
+                                    <p:cond delay="900"/>
+                                  </p:stCondLst>
+                                  <p:childTnLst>
+                                    <p:set>
+                                      <p:cBhvr>
+                                        <p:cTn id="42" dur="1" fill="hold">
+                                          <p:stCondLst>
+                                            <p:cond delay="0"/>
+                                          </p:stCondLst>
+                                        </p:cTn>
+                                        <p:tgtEl>
+                                          <p:spTgt spid="15"/>
+                                        </p:tgtEl>
+                                        <p:attrNameLst>
+                                          <p:attrName>style.visibility</p:attrName>
+                                        </p:attrNameLst>
+                                      </p:cBhvr>
+                                      <p:to>
+                                        <p:strVal val="visible"/>
+                                      </p:to>
+                                    </p:set>
+                                    <p:animEffect transition="in" filter="fade">
+                                      <p:cBhvr>
+                                        <p:cTn id="43" dur="500"/>
+                                        <p:tgtEl>
+                                          <p:spTgt spid="15"/>
+                                        </p:tgtEl>
+                                      </p:cBhvr>
+                                    </p:animEffect>
+                                  </p:childTnLst>
+                                </p:cTn>
+                              </p:par>
+                              <p:par>
+                                <p:cTn id="44" presetID="10" presetClass="entr" presetSubtype="0" fill="hold" grpId="0" nodeType="withEffect">
+                                  <p:stCondLst>
+                                    <p:cond delay="1200"/>
+                                  </p:stCondLst>
+                                  <p:childTnLst>
+                                    <p:set>
+                                      <p:cBhvr>
+                                        <p:cTn id="45" dur="1" fill="hold">
+                                          <p:stCondLst>
+                                            <p:cond delay="0"/>
+                                          </p:stCondLst>
+                                        </p:cTn>
+                                        <p:tgtEl>
+                                          <p:spTgt spid="16"/>
+                                        </p:tgtEl>
+                                        <p:attrNameLst>
+                                          <p:attrName>style.visibility</p:attrName>
+                                        </p:attrNameLst>
+                                      </p:cBhvr>
+                                      <p:to>
+                                        <p:strVal val="visible"/>
+                                      </p:to>
+                                    </p:set>
+                                    <p:animEffect transition="in" filter="fade">
+                                      <p:cBhvr>
+                                        <p:cTn id="46" dur="500"/>
+                                        <p:tgtEl>
+                                          <p:spTgt spid="16"/>
+                                        </p:tgtEl>
+                                      </p:cBhvr>
+                                    </p:animEffect>
+                                  </p:childTnLst>
+                                </p:cTn>
+                              </p:par>
+                              <p:par>
+                                <p:cTn id="47" presetID="10" presetClass="entr" presetSubtype="0" fill="hold" grpId="0" nodeType="withEffect">
+                                  <p:stCondLst>
+                                    <p:cond delay="1200"/>
+                                  </p:stCondLst>
+                                  <p:childTnLst>
+                                    <p:set>
+                                      <p:cBhvr>
+                                        <p:cTn id="48" dur="1" fill="hold">
+                                          <p:stCondLst>
+                                            <p:cond delay="0"/>
+                                          </p:stCondLst>
+                                        </p:cTn>
+                                        <p:tgtEl>
+                                          <p:spTgt spid="17"/>
+                                        </p:tgtEl>
+                                        <p:attrNameLst>
+                                          <p:attrName>style.visibility</p:attrName>
+                                        </p:attrNameLst>
+                                      </p:cBhvr>
+                                      <p:to>
+                                        <p:strVal val="visible"/>
+                                      </p:to>
+                                    </p:set>
+                                    <p:animEffect transition="in" filter="fade">
+                                      <p:cBhvr>
+                                        <p:cTn id="49" dur="500"/>
+                                        <p:tgtEl>
+                                          <p:spTgt spid="17"/>
+                                        </p:tgtEl>
+                                      </p:cBhvr>
+                                    </p:animEffect>
+                                  </p:childTnLst>
+                                </p:cTn>
+                              </p:par>
+                              <p:par>
+                                <p:cTn id="50" presetID="10" presetClass="entr" presetSubtype="0" fill="hold" grpId="0" nodeType="withEffect">
+                                  <p:stCondLst>
+                                    <p:cond delay="1200"/>
+                                  </p:stCondLst>
+                                  <p:childTnLst>
+                                    <p:set>
+                                      <p:cBhvr>
+                                        <p:cTn id="51" dur="1" fill="hold">
+                                          <p:stCondLst>
+                                            <p:cond delay="0"/>
+                                          </p:stCondLst>
+                                        </p:cTn>
+                                        <p:tgtEl>
+                                          <p:spTgt spid="18"/>
+                                        </p:tgtEl>
+                                        <p:attrNameLst>
+                                          <p:attrName>style.visibility</p:attrName>
+                                        </p:attrNameLst>
+                                      </p:cBhvr>
+                                      <p:to>
+                                        <p:strVal val="visible"/>
+                                      </p:to>
+                                    </p:set>
+                                    <p:animEffect transition="in" filter="fade">
+                                      <p:cBhvr>
+                                        <p:cTn id="52" dur="500"/>
+                                        <p:tgtEl>
+                                          <p:spTgt spid="18"/>
+                                        </p:tgtEl>
+                                      </p:cBhvr>
+                                    </p:animEffect>
+                                  </p:childTnLst>
+                                </p:cTn>
+                              </p:par>
+                              <p:par>
+                                <p:cTn id="53" presetID="10" presetClass="entr" presetSubtype="0" fill="hold" grpId="0" nodeType="withEffect">
+                                  <p:stCondLst>
+                                    <p:cond delay="1200"/>
+                                  </p:stCondLst>
+                                  <p:childTnLst>
+                                    <p:set>
+                                      <p:cBhvr>
+                                        <p:cTn id="54" dur="1" fill="hold">
+                                          <p:stCondLst>
+                                            <p:cond delay="0"/>
+                                          </p:stCondLst>
+                                        </p:cTn>
+                                        <p:tgtEl>
+                                          <p:spTgt spid="19"/>
+                                        </p:tgtEl>
+                                        <p:attrNameLst>
+                                          <p:attrName>style.visibility</p:attrName>
+                                        </p:attrNameLst>
+                                      </p:cBhvr>
+                                      <p:to>
+                                        <p:strVal val="visible"/>
+                                      </p:to>
+                                    </p:set>
+                                    <p:animEffect transition="in" filter="fade">
+                                      <p:cBhvr>
+                                        <p:cTn id="55" dur="500"/>
+                                        <p:tgtEl>
+                                          <p:spTgt spid="19"/>
+                                        </p:tgtEl>
+                                      </p:cBhvr>
+                                    </p:animEffect>
+                                  </p:childTnLst>
+                                </p:cTn>
+                              </p:par>
+                            </p:childTnLst>
+                          </p:cTn>
+                        </p:par>
+                      </p:childTnLst>
+                    </p:cTn>
+                  </p:par>
+                </p:childTnLst>
+              </p:cTn>
+              <p:prevCondLst>
+                <p:cond evt="onPrev" delay="0">
+                  <p:tgtEl>
+                    <p:sldTgt/>
+                  </p:tgtEl>
+                </p:cond>
+              </p:prevCondLst>
+              <p:nextCondLst>
+                <p:cond evt="onNext" delay="0">
+                  <p:tgtEl>
+                    <p:sldTgt/>
+                  </p:tgtEl>
+                </p:cond>
+              </p:nextCondLst>
+            </p:seq>
+          </p:childTnLst>
+        </p:cTn>
+      </p:par>
+    </p:tnLst>
+    <p:bldLst>
+      <p:bldP spid="3" grpId="0" animBg="1"/>
+      <p:bldP spid="4" grpId="0" animBg="1"/>
+      <p:bldP spid="6" grpId="0" animBg="1"/>
+      <p:bldP spid="7" grpId="0" animBg="1"/>
+      <p:bldP spid="8" grpId="0" animBg="1"/>
+      <p:bldP spid="10" grpId="0" animBg="1"/>
+      <p:bldP spid="11" grpId="0" animBg="1"/>
+      <p:bldP spid="12" grpId="0" animBg="1"/>
+      <p:bldP spid="14" grpId="0" animBg="1"/>
+      <p:bldP spid="15" grpId="0" animBg="1"/>
+      <p:bldP spid="16" grpId="0" animBg="1"/>
+      <p:bldP spid="18" grpId="0" animBg="1"/>
+      <p:bldP spid="19" grpId="0" animBg="1"/>
+    </p:bldLst>
+  </p:timing>
 </p:sld>
 </file>
 
@@ -4442,7 +6566,7 @@
                 <a:ea typeface="Barlow" pitchFamily="34" charset="-122"/>
                 <a:cs typeface="Barlow" pitchFamily="34" charset="-120"/>
               </a:rPr>
-              <a:t>Les informations de cours arrivent aux seuls concernés</a:t>
+              <a:t>Des annonces ciblées</a:t>
             </a:r>
             <a:pPr indent="0" marL="0">
               <a:buNone/>
@@ -4456,7 +6580,7 @@
                 <a:ea typeface="Barlow" pitchFamily="34" charset="-122"/>
                 <a:cs typeface="Barlow" pitchFamily="34" charset="-120"/>
               </a:rPr>
-              <a:t> : report, salle, devoir, quiz, directement sur leur téléphone.</a:t>
+              <a:t> (filière, groupe, classe) et une alerte automatique à chaque report, sur le téléphone des seuls concernés.</a:t>
             </a:r>
             <a:endParaRPr lang="en-US" sz="1500" dirty="0"/>
           </a:p>
@@ -4651,7 +6775,7 @@
                 <a:ea typeface="Barlow" pitchFamily="34" charset="-122"/>
                 <a:cs typeface="Barlow" pitchFamily="34" charset="-120"/>
               </a:rPr>
-              <a:t>Un emploi du temps vivant, à jour en temps réel</a:t>
+              <a:t>Un emploi du temps vivant</a:t>
             </a:r>
             <a:pPr indent="0" marL="0">
               <a:buNone/>
@@ -4665,7 +6789,7 @@
                 <a:ea typeface="Barlow" pitchFamily="34" charset="-122"/>
                 <a:cs typeface="Barlow" pitchFamily="34" charset="-120"/>
               </a:rPr>
-              <a:t> ; le PDF officiel du mois reste disponible en un clic.</a:t>
+              <a:t>, ajouté à l'agenda du téléphone ; le PDF officiel du mois reste disponible.</a:t>
             </a:r>
             <a:endParaRPr lang="en-US" sz="1500" dirty="0"/>
           </a:p>
@@ -4731,7 +6855,7 @@
                 <a:ea typeface="Barlow Condensed" pitchFamily="34" charset="-122"/>
                 <a:cs typeface="Barlow Condensed" pitchFamily="34" charset="-120"/>
               </a:rPr>
-              <a:t>WhatsApp</a:t>
+              <a:t>Classroom</a:t>
             </a:r>
             <a:endParaRPr lang="en-US" sz="1800" dirty="0"/>
           </a:p>
@@ -4748,7 +6872,7 @@
                 <a:ea typeface="Barlow" pitchFamily="34" charset="-122"/>
                 <a:cs typeface="Barlow" pitchFamily="34" charset="-120"/>
               </a:rPr>
-              <a:t>pour les reports</a:t>
+              <a:t>pour les devoirs</a:t>
             </a:r>
             <a:endParaRPr lang="en-US" sz="1800" dirty="0"/>
           </a:p>
@@ -4860,7 +6984,7 @@
                 <a:ea typeface="Barlow" pitchFamily="34" charset="-122"/>
                 <a:cs typeface="Barlow" pitchFamily="34" charset="-120"/>
               </a:rPr>
-              <a:t>Une alerte automatique</a:t>
+              <a:t>Des devoirs en quiz corrigés tout seuls</a:t>
             </a:r>
             <a:pPr indent="0" marL="0">
               <a:buNone/>
@@ -4874,7 +6998,7 @@
                 <a:ea typeface="Barlow" pitchFamily="34" charset="-122"/>
                 <a:cs typeface="Barlow" pitchFamily="34" charset="-120"/>
               </a:rPr>
-              <a:t> avec la nouvelle date, l'heure et la salle.</a:t>
+              <a:t> ou en fichier à rendre, notés et commentés par l'enseignant.</a:t>
             </a:r>
             <a:endParaRPr lang="en-US" sz="1500" dirty="0"/>
           </a:p>
@@ -4940,7 +7064,7 @@
                 <a:ea typeface="Barlow Condensed" pitchFamily="34" charset="-122"/>
                 <a:cs typeface="Barlow Condensed" pitchFamily="34" charset="-120"/>
               </a:rPr>
-              <a:t>Classroom et Moodle</a:t>
+              <a:t>Moodle</a:t>
             </a:r>
             <a:endParaRPr lang="en-US" sz="1800" dirty="0"/>
           </a:p>
@@ -4957,7 +7081,7 @@
                 <a:ea typeface="Barlow" pitchFamily="34" charset="-122"/>
                 <a:cs typeface="Barlow" pitchFamily="34" charset="-120"/>
               </a:rPr>
-              <a:t>pour les cours et devoirs</a:t>
+              <a:t>pour les cours</a:t>
             </a:r>
             <a:endParaRPr lang="en-US" sz="1800" dirty="0"/>
           </a:p>
@@ -5069,7 +7193,7 @@
                 <a:ea typeface="Barlow" pitchFamily="34" charset="-122"/>
                 <a:cs typeface="Barlow" pitchFamily="34" charset="-120"/>
               </a:rPr>
-              <a:t>Les supports rangés par cours</a:t>
+              <a:t>Une bibliothèque rangée par module</a:t>
             </a:r>
             <a:pPr indent="0" marL="0">
               <a:buNone/>
@@ -5083,7 +7207,7 @@
                 <a:ea typeface="Barlow" pitchFamily="34" charset="-122"/>
                 <a:cs typeface="Barlow" pitchFamily="34" charset="-120"/>
               </a:rPr>
-              <a:t> et des devoirs en quiz, corrigés et notés automatiquement.</a:t>
+              <a:t> : recherche, lecture sur téléphone, même hors ligne.</a:t>
             </a:r>
             <a:endParaRPr lang="en-US" sz="1500" dirty="0"/>
           </a:p>
@@ -5278,7 +7402,7 @@
                 <a:ea typeface="Barlow" pitchFamily="34" charset="-122"/>
                 <a:cs typeface="Barlow" pitchFamily="34" charset="-120"/>
               </a:rPr>
-              <a:t>Quiz, défis et jeux intégrés</a:t>
+              <a:t>Des activités choisies par l'enseignant</a:t>
             </a:r>
             <a:pPr indent="0" marL="0">
               <a:buNone/>
@@ -5351,6 +7475,1204 @@
   <p:clrMapOvr>
     <a:masterClrMapping/>
   </p:clrMapOvr>
+  <p:transition spd="med">
+    <p:fade/>
+  </p:transition>
+  <p:timing>
+    <p:tnLst>
+      <p:par>
+        <p:cTn id="1" dur="indefinite" restart="never" nodeType="tmRoot">
+          <p:childTnLst>
+            <p:seq concurrent="1" nextAc="seek">
+              <p:cTn id="2" dur="indefinite" nodeType="mainSeq">
+                <p:childTnLst>
+                  <p:par>
+                    <p:cTn id="3" fill="hold">
+                      <p:stCondLst>
+                        <p:cond delay="indefinite"/>
+                        <p:cond evt="onBegin" delay="0">
+                          <p:tn val="2"/>
+                        </p:cond>
+                      </p:stCondLst>
+                      <p:childTnLst>
+                        <p:par>
+                          <p:cTn id="4" fill="hold">
+                            <p:stCondLst>
+                              <p:cond delay="0"/>
+                            </p:stCondLst>
+                            <p:childTnLst>
+                              <p:par>
+                                <p:cTn id="5" presetID="10" presetClass="entr" presetSubtype="0" fill="hold" grpId="0" nodeType="afterEffect">
+                                  <p:stCondLst>
+                                    <p:cond delay="0"/>
+                                  </p:stCondLst>
+                                  <p:childTnLst>
+                                    <p:set>
+                                      <p:cBhvr>
+                                        <p:cTn id="6" dur="1" fill="hold">
+                                          <p:stCondLst>
+                                            <p:cond delay="0"/>
+                                          </p:stCondLst>
+                                        </p:cTn>
+                                        <p:tgtEl>
+                                          <p:spTgt spid="3"/>
+                                        </p:tgtEl>
+                                        <p:attrNameLst>
+                                          <p:attrName>style.visibility</p:attrName>
+                                        </p:attrNameLst>
+                                      </p:cBhvr>
+                                      <p:to>
+                                        <p:strVal val="visible"/>
+                                      </p:to>
+                                    </p:set>
+                                    <p:animEffect transition="in" filter="fade">
+                                      <p:cBhvr>
+                                        <p:cTn id="7" dur="500"/>
+                                        <p:tgtEl>
+                                          <p:spTgt spid="3"/>
+                                        </p:tgtEl>
+                                      </p:cBhvr>
+                                    </p:animEffect>
+                                  </p:childTnLst>
+                                </p:cTn>
+                              </p:par>
+                              <p:par>
+                                <p:cTn id="8" presetID="10" presetClass="entr" presetSubtype="0" fill="hold" grpId="0" nodeType="withEffect">
+                                  <p:stCondLst>
+                                    <p:cond delay="300"/>
+                                  </p:stCondLst>
+                                  <p:childTnLst>
+                                    <p:set>
+                                      <p:cBhvr>
+                                        <p:cTn id="9" dur="1" fill="hold">
+                                          <p:stCondLst>
+                                            <p:cond delay="0"/>
+                                          </p:stCondLst>
+                                        </p:cTn>
+                                        <p:tgtEl>
+                                          <p:spTgt spid="4"/>
+                                        </p:tgtEl>
+                                        <p:attrNameLst>
+                                          <p:attrName>style.visibility</p:attrName>
+                                        </p:attrNameLst>
+                                      </p:cBhvr>
+                                      <p:to>
+                                        <p:strVal val="visible"/>
+                                      </p:to>
+                                    </p:set>
+                                    <p:animEffect transition="in" filter="fade">
+                                      <p:cBhvr>
+                                        <p:cTn id="10" dur="500"/>
+                                        <p:tgtEl>
+                                          <p:spTgt spid="4"/>
+                                        </p:tgtEl>
+                                      </p:cBhvr>
+                                    </p:animEffect>
+                                  </p:childTnLst>
+                                </p:cTn>
+                              </p:par>
+                              <p:par>
+                                <p:cTn id="11" presetID="10" presetClass="entr" presetSubtype="0" fill="hold" grpId="0" nodeType="withEffect">
+                                  <p:stCondLst>
+                                    <p:cond delay="600"/>
+                                  </p:stCondLst>
+                                  <p:childTnLst>
+                                    <p:set>
+                                      <p:cBhvr>
+                                        <p:cTn id="12" dur="1" fill="hold">
+                                          <p:stCondLst>
+                                            <p:cond delay="0"/>
+                                          </p:stCondLst>
+                                        </p:cTn>
+                                        <p:tgtEl>
+                                          <p:spTgt spid="5"/>
+                                        </p:tgtEl>
+                                        <p:attrNameLst>
+                                          <p:attrName>style.visibility</p:attrName>
+                                        </p:attrNameLst>
+                                      </p:cBhvr>
+                                      <p:to>
+                                        <p:strVal val="visible"/>
+                                      </p:to>
+                                    </p:set>
+                                    <p:animEffect transition="in" filter="fade">
+                                      <p:cBhvr>
+                                        <p:cTn id="13" dur="500"/>
+                                        <p:tgtEl>
+                                          <p:spTgt spid="5"/>
+                                        </p:tgtEl>
+                                      </p:cBhvr>
+                                    </p:animEffect>
+                                  </p:childTnLst>
+                                </p:cTn>
+                              </p:par>
+                              <p:par>
+                                <p:cTn id="14" presetID="10" presetClass="entr" presetSubtype="0" fill="hold" grpId="0" nodeType="withEffect">
+                                  <p:stCondLst>
+                                    <p:cond delay="600"/>
+                                  </p:stCondLst>
+                                  <p:childTnLst>
+                                    <p:set>
+                                      <p:cBhvr>
+                                        <p:cTn id="15" dur="1" fill="hold">
+                                          <p:stCondLst>
+                                            <p:cond delay="0"/>
+                                          </p:stCondLst>
+                                        </p:cTn>
+                                        <p:tgtEl>
+                                          <p:spTgt spid="6"/>
+                                        </p:tgtEl>
+                                        <p:attrNameLst>
+                                          <p:attrName>style.visibility</p:attrName>
+                                        </p:attrNameLst>
+                                      </p:cBhvr>
+                                      <p:to>
+                                        <p:strVal val="visible"/>
+                                      </p:to>
+                                    </p:set>
+                                    <p:animEffect transition="in" filter="fade">
+                                      <p:cBhvr>
+                                        <p:cTn id="16" dur="500"/>
+                                        <p:tgtEl>
+                                          <p:spTgt spid="6"/>
+                                        </p:tgtEl>
+                                      </p:cBhvr>
+                                    </p:animEffect>
+                                  </p:childTnLst>
+                                </p:cTn>
+                              </p:par>
+                              <p:par>
+                                <p:cTn id="17" presetID="10" presetClass="entr" presetSubtype="0" fill="hold" grpId="0" nodeType="withEffect">
+                                  <p:stCondLst>
+                                    <p:cond delay="600"/>
+                                  </p:stCondLst>
+                                  <p:childTnLst>
+                                    <p:set>
+                                      <p:cBhvr>
+                                        <p:cTn id="18" dur="1" fill="hold">
+                                          <p:stCondLst>
+                                            <p:cond delay="0"/>
+                                          </p:stCondLst>
+                                        </p:cTn>
+                                        <p:tgtEl>
+                                          <p:spTgt spid="7"/>
+                                        </p:tgtEl>
+                                        <p:attrNameLst>
+                                          <p:attrName>style.visibility</p:attrName>
+                                        </p:attrNameLst>
+                                      </p:cBhvr>
+                                      <p:to>
+                                        <p:strVal val="visible"/>
+                                      </p:to>
+                                    </p:set>
+                                    <p:animEffect transition="in" filter="fade">
+                                      <p:cBhvr>
+                                        <p:cTn id="19" dur="500"/>
+                                        <p:tgtEl>
+                                          <p:spTgt spid="7"/>
+                                        </p:tgtEl>
+                                      </p:cBhvr>
+                                    </p:animEffect>
+                                  </p:childTnLst>
+                                </p:cTn>
+                              </p:par>
+                              <p:par>
+                                <p:cTn id="20" presetID="10" presetClass="entr" presetSubtype="0" fill="hold" grpId="0" nodeType="withEffect">
+                                  <p:stCondLst>
+                                    <p:cond delay="600"/>
+                                  </p:stCondLst>
+                                  <p:childTnLst>
+                                    <p:set>
+                                      <p:cBhvr>
+                                        <p:cTn id="21" dur="1" fill="hold">
+                                          <p:stCondLst>
+                                            <p:cond delay="0"/>
+                                          </p:stCondLst>
+                                        </p:cTn>
+                                        <p:tgtEl>
+                                          <p:spTgt spid="8"/>
+                                        </p:tgtEl>
+                                        <p:attrNameLst>
+                                          <p:attrName>style.visibility</p:attrName>
+                                        </p:attrNameLst>
+                                      </p:cBhvr>
+                                      <p:to>
+                                        <p:strVal val="visible"/>
+                                      </p:to>
+                                    </p:set>
+                                    <p:animEffect transition="in" filter="fade">
+                                      <p:cBhvr>
+                                        <p:cTn id="22" dur="500"/>
+                                        <p:tgtEl>
+                                          <p:spTgt spid="8"/>
+                                        </p:tgtEl>
+                                      </p:cBhvr>
+                                    </p:animEffect>
+                                  </p:childTnLst>
+                                </p:cTn>
+                              </p:par>
+                              <p:par>
+                                <p:cTn id="23" presetID="10" presetClass="entr" presetSubtype="0" fill="hold" grpId="0" nodeType="withEffect">
+                                  <p:stCondLst>
+                                    <p:cond delay="600"/>
+                                  </p:stCondLst>
+                                  <p:childTnLst>
+                                    <p:set>
+                                      <p:cBhvr>
+                                        <p:cTn id="24" dur="1" fill="hold">
+                                          <p:stCondLst>
+                                            <p:cond delay="0"/>
+                                          </p:stCondLst>
+                                        </p:cTn>
+                                        <p:tgtEl>
+                                          <p:spTgt spid="9"/>
+                                        </p:tgtEl>
+                                        <p:attrNameLst>
+                                          <p:attrName>style.visibility</p:attrName>
+                                        </p:attrNameLst>
+                                      </p:cBhvr>
+                                      <p:to>
+                                        <p:strVal val="visible"/>
+                                      </p:to>
+                                    </p:set>
+                                    <p:animEffect transition="in" filter="fade">
+                                      <p:cBhvr>
+                                        <p:cTn id="25" dur="500"/>
+                                        <p:tgtEl>
+                                          <p:spTgt spid="9"/>
+                                        </p:tgtEl>
+                                      </p:cBhvr>
+                                    </p:animEffect>
+                                  </p:childTnLst>
+                                </p:cTn>
+                              </p:par>
+                              <p:par>
+                                <p:cTn id="26" presetID="10" presetClass="entr" presetSubtype="0" fill="hold" grpId="0" nodeType="withEffect">
+                                  <p:stCondLst>
+                                    <p:cond delay="600"/>
+                                  </p:stCondLst>
+                                  <p:childTnLst>
+                                    <p:set>
+                                      <p:cBhvr>
+                                        <p:cTn id="27" dur="1" fill="hold">
+                                          <p:stCondLst>
+                                            <p:cond delay="0"/>
+                                          </p:stCondLst>
+                                        </p:cTn>
+                                        <p:tgtEl>
+                                          <p:spTgt spid="10"/>
+                                        </p:tgtEl>
+                                        <p:attrNameLst>
+                                          <p:attrName>style.visibility</p:attrName>
+                                        </p:attrNameLst>
+                                      </p:cBhvr>
+                                      <p:to>
+                                        <p:strVal val="visible"/>
+                                      </p:to>
+                                    </p:set>
+                                    <p:animEffect transition="in" filter="fade">
+                                      <p:cBhvr>
+                                        <p:cTn id="28" dur="500"/>
+                                        <p:tgtEl>
+                                          <p:spTgt spid="10"/>
+                                        </p:tgtEl>
+                                      </p:cBhvr>
+                                    </p:animEffect>
+                                  </p:childTnLst>
+                                </p:cTn>
+                              </p:par>
+                              <p:par>
+                                <p:cTn id="29" presetID="10" presetClass="entr" presetSubtype="0" fill="hold" grpId="0" nodeType="withEffect">
+                                  <p:stCondLst>
+                                    <p:cond delay="900"/>
+                                  </p:stCondLst>
+                                  <p:childTnLst>
+                                    <p:set>
+                                      <p:cBhvr>
+                                        <p:cTn id="30" dur="1" fill="hold">
+                                          <p:stCondLst>
+                                            <p:cond delay="0"/>
+                                          </p:stCondLst>
+                                        </p:cTn>
+                                        <p:tgtEl>
+                                          <p:spTgt spid="11"/>
+                                        </p:tgtEl>
+                                        <p:attrNameLst>
+                                          <p:attrName>style.visibility</p:attrName>
+                                        </p:attrNameLst>
+                                      </p:cBhvr>
+                                      <p:to>
+                                        <p:strVal val="visible"/>
+                                      </p:to>
+                                    </p:set>
+                                    <p:animEffect transition="in" filter="fade">
+                                      <p:cBhvr>
+                                        <p:cTn id="31" dur="500"/>
+                                        <p:tgtEl>
+                                          <p:spTgt spid="11"/>
+                                        </p:tgtEl>
+                                      </p:cBhvr>
+                                    </p:animEffect>
+                                  </p:childTnLst>
+                                </p:cTn>
+                              </p:par>
+                              <p:par>
+                                <p:cTn id="32" presetID="10" presetClass="entr" presetSubtype="0" fill="hold" grpId="0" nodeType="withEffect">
+                                  <p:stCondLst>
+                                    <p:cond delay="900"/>
+                                  </p:stCondLst>
+                                  <p:childTnLst>
+                                    <p:set>
+                                      <p:cBhvr>
+                                        <p:cTn id="33" dur="1" fill="hold">
+                                          <p:stCondLst>
+                                            <p:cond delay="0"/>
+                                          </p:stCondLst>
+                                        </p:cTn>
+                                        <p:tgtEl>
+                                          <p:spTgt spid="12"/>
+                                        </p:tgtEl>
+                                        <p:attrNameLst>
+                                          <p:attrName>style.visibility</p:attrName>
+                                        </p:attrNameLst>
+                                      </p:cBhvr>
+                                      <p:to>
+                                        <p:strVal val="visible"/>
+                                      </p:to>
+                                    </p:set>
+                                    <p:animEffect transition="in" filter="fade">
+                                      <p:cBhvr>
+                                        <p:cTn id="34" dur="500"/>
+                                        <p:tgtEl>
+                                          <p:spTgt spid="12"/>
+                                        </p:tgtEl>
+                                      </p:cBhvr>
+                                    </p:animEffect>
+                                  </p:childTnLst>
+                                </p:cTn>
+                              </p:par>
+                              <p:par>
+                                <p:cTn id="35" presetID="10" presetClass="entr" presetSubtype="0" fill="hold" grpId="0" nodeType="withEffect">
+                                  <p:stCondLst>
+                                    <p:cond delay="900"/>
+                                  </p:stCondLst>
+                                  <p:childTnLst>
+                                    <p:set>
+                                      <p:cBhvr>
+                                        <p:cTn id="36" dur="1" fill="hold">
+                                          <p:stCondLst>
+                                            <p:cond delay="0"/>
+                                          </p:stCondLst>
+                                        </p:cTn>
+                                        <p:tgtEl>
+                                          <p:spTgt spid="13"/>
+                                        </p:tgtEl>
+                                        <p:attrNameLst>
+                                          <p:attrName>style.visibility</p:attrName>
+                                        </p:attrNameLst>
+                                      </p:cBhvr>
+                                      <p:to>
+                                        <p:strVal val="visible"/>
+                                      </p:to>
+                                    </p:set>
+                                    <p:animEffect transition="in" filter="fade">
+                                      <p:cBhvr>
+                                        <p:cTn id="37" dur="500"/>
+                                        <p:tgtEl>
+                                          <p:spTgt spid="13"/>
+                                        </p:tgtEl>
+                                      </p:cBhvr>
+                                    </p:animEffect>
+                                  </p:childTnLst>
+                                </p:cTn>
+                              </p:par>
+                              <p:par>
+                                <p:cTn id="38" presetID="10" presetClass="entr" presetSubtype="0" fill="hold" grpId="0" nodeType="withEffect">
+                                  <p:stCondLst>
+                                    <p:cond delay="900"/>
+                                  </p:stCondLst>
+                                  <p:childTnLst>
+                                    <p:set>
+                                      <p:cBhvr>
+                                        <p:cTn id="39" dur="1" fill="hold">
+                                          <p:stCondLst>
+                                            <p:cond delay="0"/>
+                                          </p:stCondLst>
+                                        </p:cTn>
+                                        <p:tgtEl>
+                                          <p:spTgt spid="14"/>
+                                        </p:tgtEl>
+                                        <p:attrNameLst>
+                                          <p:attrName>style.visibility</p:attrName>
+                                        </p:attrNameLst>
+                                      </p:cBhvr>
+                                      <p:to>
+                                        <p:strVal val="visible"/>
+                                      </p:to>
+                                    </p:set>
+                                    <p:animEffect transition="in" filter="fade">
+                                      <p:cBhvr>
+                                        <p:cTn id="40" dur="500"/>
+                                        <p:tgtEl>
+                                          <p:spTgt spid="14"/>
+                                        </p:tgtEl>
+                                      </p:cBhvr>
+                                    </p:animEffect>
+                                  </p:childTnLst>
+                                </p:cTn>
+                              </p:par>
+                              <p:par>
+                                <p:cTn id="41" presetID="10" presetClass="entr" presetSubtype="0" fill="hold" grpId="0" nodeType="withEffect">
+                                  <p:stCondLst>
+                                    <p:cond delay="900"/>
+                                  </p:stCondLst>
+                                  <p:childTnLst>
+                                    <p:set>
+                                      <p:cBhvr>
+                                        <p:cTn id="42" dur="1" fill="hold">
+                                          <p:stCondLst>
+                                            <p:cond delay="0"/>
+                                          </p:stCondLst>
+                                        </p:cTn>
+                                        <p:tgtEl>
+                                          <p:spTgt spid="15"/>
+                                        </p:tgtEl>
+                                        <p:attrNameLst>
+                                          <p:attrName>style.visibility</p:attrName>
+                                        </p:attrNameLst>
+                                      </p:cBhvr>
+                                      <p:to>
+                                        <p:strVal val="visible"/>
+                                      </p:to>
+                                    </p:set>
+                                    <p:animEffect transition="in" filter="fade">
+                                      <p:cBhvr>
+                                        <p:cTn id="43" dur="500"/>
+                                        <p:tgtEl>
+                                          <p:spTgt spid="15"/>
+                                        </p:tgtEl>
+                                      </p:cBhvr>
+                                    </p:animEffect>
+                                  </p:childTnLst>
+                                </p:cTn>
+                              </p:par>
+                              <p:par>
+                                <p:cTn id="44" presetID="10" presetClass="entr" presetSubtype="0" fill="hold" grpId="0" nodeType="withEffect">
+                                  <p:stCondLst>
+                                    <p:cond delay="900"/>
+                                  </p:stCondLst>
+                                  <p:childTnLst>
+                                    <p:set>
+                                      <p:cBhvr>
+                                        <p:cTn id="45" dur="1" fill="hold">
+                                          <p:stCondLst>
+                                            <p:cond delay="0"/>
+                                          </p:stCondLst>
+                                        </p:cTn>
+                                        <p:tgtEl>
+                                          <p:spTgt spid="16"/>
+                                        </p:tgtEl>
+                                        <p:attrNameLst>
+                                          <p:attrName>style.visibility</p:attrName>
+                                        </p:attrNameLst>
+                                      </p:cBhvr>
+                                      <p:to>
+                                        <p:strVal val="visible"/>
+                                      </p:to>
+                                    </p:set>
+                                    <p:animEffect transition="in" filter="fade">
+                                      <p:cBhvr>
+                                        <p:cTn id="46" dur="500"/>
+                                        <p:tgtEl>
+                                          <p:spTgt spid="16"/>
+                                        </p:tgtEl>
+                                      </p:cBhvr>
+                                    </p:animEffect>
+                                  </p:childTnLst>
+                                </p:cTn>
+                              </p:par>
+                              <p:par>
+                                <p:cTn id="47" presetID="10" presetClass="entr" presetSubtype="0" fill="hold" grpId="0" nodeType="withEffect">
+                                  <p:stCondLst>
+                                    <p:cond delay="1200"/>
+                                  </p:stCondLst>
+                                  <p:childTnLst>
+                                    <p:set>
+                                      <p:cBhvr>
+                                        <p:cTn id="48" dur="1" fill="hold">
+                                          <p:stCondLst>
+                                            <p:cond delay="0"/>
+                                          </p:stCondLst>
+                                        </p:cTn>
+                                        <p:tgtEl>
+                                          <p:spTgt spid="17"/>
+                                        </p:tgtEl>
+                                        <p:attrNameLst>
+                                          <p:attrName>style.visibility</p:attrName>
+                                        </p:attrNameLst>
+                                      </p:cBhvr>
+                                      <p:to>
+                                        <p:strVal val="visible"/>
+                                      </p:to>
+                                    </p:set>
+                                    <p:animEffect transition="in" filter="fade">
+                                      <p:cBhvr>
+                                        <p:cTn id="49" dur="500"/>
+                                        <p:tgtEl>
+                                          <p:spTgt spid="17"/>
+                                        </p:tgtEl>
+                                      </p:cBhvr>
+                                    </p:animEffect>
+                                  </p:childTnLst>
+                                </p:cTn>
+                              </p:par>
+                              <p:par>
+                                <p:cTn id="50" presetID="10" presetClass="entr" presetSubtype="0" fill="hold" grpId="0" nodeType="withEffect">
+                                  <p:stCondLst>
+                                    <p:cond delay="1200"/>
+                                  </p:stCondLst>
+                                  <p:childTnLst>
+                                    <p:set>
+                                      <p:cBhvr>
+                                        <p:cTn id="51" dur="1" fill="hold">
+                                          <p:stCondLst>
+                                            <p:cond delay="0"/>
+                                          </p:stCondLst>
+                                        </p:cTn>
+                                        <p:tgtEl>
+                                          <p:spTgt spid="18"/>
+                                        </p:tgtEl>
+                                        <p:attrNameLst>
+                                          <p:attrName>style.visibility</p:attrName>
+                                        </p:attrNameLst>
+                                      </p:cBhvr>
+                                      <p:to>
+                                        <p:strVal val="visible"/>
+                                      </p:to>
+                                    </p:set>
+                                    <p:animEffect transition="in" filter="fade">
+                                      <p:cBhvr>
+                                        <p:cTn id="52" dur="500"/>
+                                        <p:tgtEl>
+                                          <p:spTgt spid="18"/>
+                                        </p:tgtEl>
+                                      </p:cBhvr>
+                                    </p:animEffect>
+                                  </p:childTnLst>
+                                </p:cTn>
+                              </p:par>
+                              <p:par>
+                                <p:cTn id="53" presetID="10" presetClass="entr" presetSubtype="0" fill="hold" grpId="0" nodeType="withEffect">
+                                  <p:stCondLst>
+                                    <p:cond delay="1200"/>
+                                  </p:stCondLst>
+                                  <p:childTnLst>
+                                    <p:set>
+                                      <p:cBhvr>
+                                        <p:cTn id="54" dur="1" fill="hold">
+                                          <p:stCondLst>
+                                            <p:cond delay="0"/>
+                                          </p:stCondLst>
+                                        </p:cTn>
+                                        <p:tgtEl>
+                                          <p:spTgt spid="19"/>
+                                        </p:tgtEl>
+                                        <p:attrNameLst>
+                                          <p:attrName>style.visibility</p:attrName>
+                                        </p:attrNameLst>
+                                      </p:cBhvr>
+                                      <p:to>
+                                        <p:strVal val="visible"/>
+                                      </p:to>
+                                    </p:set>
+                                    <p:animEffect transition="in" filter="fade">
+                                      <p:cBhvr>
+                                        <p:cTn id="55" dur="500"/>
+                                        <p:tgtEl>
+                                          <p:spTgt spid="19"/>
+                                        </p:tgtEl>
+                                      </p:cBhvr>
+                                    </p:animEffect>
+                                  </p:childTnLst>
+                                </p:cTn>
+                              </p:par>
+                              <p:par>
+                                <p:cTn id="56" presetID="10" presetClass="entr" presetSubtype="0" fill="hold" grpId="0" nodeType="withEffect">
+                                  <p:stCondLst>
+                                    <p:cond delay="1200"/>
+                                  </p:stCondLst>
+                                  <p:childTnLst>
+                                    <p:set>
+                                      <p:cBhvr>
+                                        <p:cTn id="57" dur="1" fill="hold">
+                                          <p:stCondLst>
+                                            <p:cond delay="0"/>
+                                          </p:stCondLst>
+                                        </p:cTn>
+                                        <p:tgtEl>
+                                          <p:spTgt spid="20"/>
+                                        </p:tgtEl>
+                                        <p:attrNameLst>
+                                          <p:attrName>style.visibility</p:attrName>
+                                        </p:attrNameLst>
+                                      </p:cBhvr>
+                                      <p:to>
+                                        <p:strVal val="visible"/>
+                                      </p:to>
+                                    </p:set>
+                                    <p:animEffect transition="in" filter="fade">
+                                      <p:cBhvr>
+                                        <p:cTn id="58" dur="500"/>
+                                        <p:tgtEl>
+                                          <p:spTgt spid="20"/>
+                                        </p:tgtEl>
+                                      </p:cBhvr>
+                                    </p:animEffect>
+                                  </p:childTnLst>
+                                </p:cTn>
+                              </p:par>
+                              <p:par>
+                                <p:cTn id="59" presetID="10" presetClass="entr" presetSubtype="0" fill="hold" grpId="0" nodeType="withEffect">
+                                  <p:stCondLst>
+                                    <p:cond delay="1200"/>
+                                  </p:stCondLst>
+                                  <p:childTnLst>
+                                    <p:set>
+                                      <p:cBhvr>
+                                        <p:cTn id="60" dur="1" fill="hold">
+                                          <p:stCondLst>
+                                            <p:cond delay="0"/>
+                                          </p:stCondLst>
+                                        </p:cTn>
+                                        <p:tgtEl>
+                                          <p:spTgt spid="21"/>
+                                        </p:tgtEl>
+                                        <p:attrNameLst>
+                                          <p:attrName>style.visibility</p:attrName>
+                                        </p:attrNameLst>
+                                      </p:cBhvr>
+                                      <p:to>
+                                        <p:strVal val="visible"/>
+                                      </p:to>
+                                    </p:set>
+                                    <p:animEffect transition="in" filter="fade">
+                                      <p:cBhvr>
+                                        <p:cTn id="61" dur="500"/>
+                                        <p:tgtEl>
+                                          <p:spTgt spid="21"/>
+                                        </p:tgtEl>
+                                      </p:cBhvr>
+                                    </p:animEffect>
+                                  </p:childTnLst>
+                                </p:cTn>
+                              </p:par>
+                              <p:par>
+                                <p:cTn id="62" presetID="10" presetClass="entr" presetSubtype="0" fill="hold" grpId="0" nodeType="withEffect">
+                                  <p:stCondLst>
+                                    <p:cond delay="1200"/>
+                                  </p:stCondLst>
+                                  <p:childTnLst>
+                                    <p:set>
+                                      <p:cBhvr>
+                                        <p:cTn id="63" dur="1" fill="hold">
+                                          <p:stCondLst>
+                                            <p:cond delay="0"/>
+                                          </p:stCondLst>
+                                        </p:cTn>
+                                        <p:tgtEl>
+                                          <p:spTgt spid="22"/>
+                                        </p:tgtEl>
+                                        <p:attrNameLst>
+                                          <p:attrName>style.visibility</p:attrName>
+                                        </p:attrNameLst>
+                                      </p:cBhvr>
+                                      <p:to>
+                                        <p:strVal val="visible"/>
+                                      </p:to>
+                                    </p:set>
+                                    <p:animEffect transition="in" filter="fade">
+                                      <p:cBhvr>
+                                        <p:cTn id="64" dur="500"/>
+                                        <p:tgtEl>
+                                          <p:spTgt spid="22"/>
+                                        </p:tgtEl>
+                                      </p:cBhvr>
+                                    </p:animEffect>
+                                  </p:childTnLst>
+                                </p:cTn>
+                              </p:par>
+                              <p:par>
+                                <p:cTn id="65" presetID="10" presetClass="entr" presetSubtype="0" fill="hold" grpId="0" nodeType="withEffect">
+                                  <p:stCondLst>
+                                    <p:cond delay="1500"/>
+                                  </p:stCondLst>
+                                  <p:childTnLst>
+                                    <p:set>
+                                      <p:cBhvr>
+                                        <p:cTn id="66" dur="1" fill="hold">
+                                          <p:stCondLst>
+                                            <p:cond delay="0"/>
+                                          </p:stCondLst>
+                                        </p:cTn>
+                                        <p:tgtEl>
+                                          <p:spTgt spid="23"/>
+                                        </p:tgtEl>
+                                        <p:attrNameLst>
+                                          <p:attrName>style.visibility</p:attrName>
+                                        </p:attrNameLst>
+                                      </p:cBhvr>
+                                      <p:to>
+                                        <p:strVal val="visible"/>
+                                      </p:to>
+                                    </p:set>
+                                    <p:animEffect transition="in" filter="fade">
+                                      <p:cBhvr>
+                                        <p:cTn id="67" dur="500"/>
+                                        <p:tgtEl>
+                                          <p:spTgt spid="23"/>
+                                        </p:tgtEl>
+                                      </p:cBhvr>
+                                    </p:animEffect>
+                                  </p:childTnLst>
+                                </p:cTn>
+                              </p:par>
+                              <p:par>
+                                <p:cTn id="68" presetID="10" presetClass="entr" presetSubtype="0" fill="hold" grpId="0" nodeType="withEffect">
+                                  <p:stCondLst>
+                                    <p:cond delay="1500"/>
+                                  </p:stCondLst>
+                                  <p:childTnLst>
+                                    <p:set>
+                                      <p:cBhvr>
+                                        <p:cTn id="69" dur="1" fill="hold">
+                                          <p:stCondLst>
+                                            <p:cond delay="0"/>
+                                          </p:stCondLst>
+                                        </p:cTn>
+                                        <p:tgtEl>
+                                          <p:spTgt spid="24"/>
+                                        </p:tgtEl>
+                                        <p:attrNameLst>
+                                          <p:attrName>style.visibility</p:attrName>
+                                        </p:attrNameLst>
+                                      </p:cBhvr>
+                                      <p:to>
+                                        <p:strVal val="visible"/>
+                                      </p:to>
+                                    </p:set>
+                                    <p:animEffect transition="in" filter="fade">
+                                      <p:cBhvr>
+                                        <p:cTn id="70" dur="500"/>
+                                        <p:tgtEl>
+                                          <p:spTgt spid="24"/>
+                                        </p:tgtEl>
+                                      </p:cBhvr>
+                                    </p:animEffect>
+                                  </p:childTnLst>
+                                </p:cTn>
+                              </p:par>
+                              <p:par>
+                                <p:cTn id="71" presetID="10" presetClass="entr" presetSubtype="0" fill="hold" grpId="0" nodeType="withEffect">
+                                  <p:stCondLst>
+                                    <p:cond delay="1500"/>
+                                  </p:stCondLst>
+                                  <p:childTnLst>
+                                    <p:set>
+                                      <p:cBhvr>
+                                        <p:cTn id="72" dur="1" fill="hold">
+                                          <p:stCondLst>
+                                            <p:cond delay="0"/>
+                                          </p:stCondLst>
+                                        </p:cTn>
+                                        <p:tgtEl>
+                                          <p:spTgt spid="25"/>
+                                        </p:tgtEl>
+                                        <p:attrNameLst>
+                                          <p:attrName>style.visibility</p:attrName>
+                                        </p:attrNameLst>
+                                      </p:cBhvr>
+                                      <p:to>
+                                        <p:strVal val="visible"/>
+                                      </p:to>
+                                    </p:set>
+                                    <p:animEffect transition="in" filter="fade">
+                                      <p:cBhvr>
+                                        <p:cTn id="73" dur="500"/>
+                                        <p:tgtEl>
+                                          <p:spTgt spid="25"/>
+                                        </p:tgtEl>
+                                      </p:cBhvr>
+                                    </p:animEffect>
+                                  </p:childTnLst>
+                                </p:cTn>
+                              </p:par>
+                              <p:par>
+                                <p:cTn id="74" presetID="10" presetClass="entr" presetSubtype="0" fill="hold" grpId="0" nodeType="withEffect">
+                                  <p:stCondLst>
+                                    <p:cond delay="1500"/>
+                                  </p:stCondLst>
+                                  <p:childTnLst>
+                                    <p:set>
+                                      <p:cBhvr>
+                                        <p:cTn id="75" dur="1" fill="hold">
+                                          <p:stCondLst>
+                                            <p:cond delay="0"/>
+                                          </p:stCondLst>
+                                        </p:cTn>
+                                        <p:tgtEl>
+                                          <p:spTgt spid="26"/>
+                                        </p:tgtEl>
+                                        <p:attrNameLst>
+                                          <p:attrName>style.visibility</p:attrName>
+                                        </p:attrNameLst>
+                                      </p:cBhvr>
+                                      <p:to>
+                                        <p:strVal val="visible"/>
+                                      </p:to>
+                                    </p:set>
+                                    <p:animEffect transition="in" filter="fade">
+                                      <p:cBhvr>
+                                        <p:cTn id="76" dur="500"/>
+                                        <p:tgtEl>
+                                          <p:spTgt spid="26"/>
+                                        </p:tgtEl>
+                                      </p:cBhvr>
+                                    </p:animEffect>
+                                  </p:childTnLst>
+                                </p:cTn>
+                              </p:par>
+                              <p:par>
+                                <p:cTn id="77" presetID="10" presetClass="entr" presetSubtype="0" fill="hold" grpId="0" nodeType="withEffect">
+                                  <p:stCondLst>
+                                    <p:cond delay="1500"/>
+                                  </p:stCondLst>
+                                  <p:childTnLst>
+                                    <p:set>
+                                      <p:cBhvr>
+                                        <p:cTn id="78" dur="1" fill="hold">
+                                          <p:stCondLst>
+                                            <p:cond delay="0"/>
+                                          </p:stCondLst>
+                                        </p:cTn>
+                                        <p:tgtEl>
+                                          <p:spTgt spid="27"/>
+                                        </p:tgtEl>
+                                        <p:attrNameLst>
+                                          <p:attrName>style.visibility</p:attrName>
+                                        </p:attrNameLst>
+                                      </p:cBhvr>
+                                      <p:to>
+                                        <p:strVal val="visible"/>
+                                      </p:to>
+                                    </p:set>
+                                    <p:animEffect transition="in" filter="fade">
+                                      <p:cBhvr>
+                                        <p:cTn id="79" dur="500"/>
+                                        <p:tgtEl>
+                                          <p:spTgt spid="27"/>
+                                        </p:tgtEl>
+                                      </p:cBhvr>
+                                    </p:animEffect>
+                                  </p:childTnLst>
+                                </p:cTn>
+                              </p:par>
+                              <p:par>
+                                <p:cTn id="80" presetID="10" presetClass="entr" presetSubtype="0" fill="hold" grpId="0" nodeType="withEffect">
+                                  <p:stCondLst>
+                                    <p:cond delay="1500"/>
+                                  </p:stCondLst>
+                                  <p:childTnLst>
+                                    <p:set>
+                                      <p:cBhvr>
+                                        <p:cTn id="81" dur="1" fill="hold">
+                                          <p:stCondLst>
+                                            <p:cond delay="0"/>
+                                          </p:stCondLst>
+                                        </p:cTn>
+                                        <p:tgtEl>
+                                          <p:spTgt spid="28"/>
+                                        </p:tgtEl>
+                                        <p:attrNameLst>
+                                          <p:attrName>style.visibility</p:attrName>
+                                        </p:attrNameLst>
+                                      </p:cBhvr>
+                                      <p:to>
+                                        <p:strVal val="visible"/>
+                                      </p:to>
+                                    </p:set>
+                                    <p:animEffect transition="in" filter="fade">
+                                      <p:cBhvr>
+                                        <p:cTn id="82" dur="500"/>
+                                        <p:tgtEl>
+                                          <p:spTgt spid="28"/>
+                                        </p:tgtEl>
+                                      </p:cBhvr>
+                                    </p:animEffect>
+                                  </p:childTnLst>
+                                </p:cTn>
+                              </p:par>
+                              <p:par>
+                                <p:cTn id="83" presetID="10" presetClass="entr" presetSubtype="0" fill="hold" grpId="0" nodeType="withEffect">
+                                  <p:stCondLst>
+                                    <p:cond delay="1800"/>
+                                  </p:stCondLst>
+                                  <p:childTnLst>
+                                    <p:set>
+                                      <p:cBhvr>
+                                        <p:cTn id="84" dur="1" fill="hold">
+                                          <p:stCondLst>
+                                            <p:cond delay="0"/>
+                                          </p:stCondLst>
+                                        </p:cTn>
+                                        <p:tgtEl>
+                                          <p:spTgt spid="29"/>
+                                        </p:tgtEl>
+                                        <p:attrNameLst>
+                                          <p:attrName>style.visibility</p:attrName>
+                                        </p:attrNameLst>
+                                      </p:cBhvr>
+                                      <p:to>
+                                        <p:strVal val="visible"/>
+                                      </p:to>
+                                    </p:set>
+                                    <p:animEffect transition="in" filter="fade">
+                                      <p:cBhvr>
+                                        <p:cTn id="85" dur="500"/>
+                                        <p:tgtEl>
+                                          <p:spTgt spid="29"/>
+                                        </p:tgtEl>
+                                      </p:cBhvr>
+                                    </p:animEffect>
+                                  </p:childTnLst>
+                                </p:cTn>
+                              </p:par>
+                              <p:par>
+                                <p:cTn id="86" presetID="10" presetClass="entr" presetSubtype="0" fill="hold" grpId="0" nodeType="withEffect">
+                                  <p:stCondLst>
+                                    <p:cond delay="1800"/>
+                                  </p:stCondLst>
+                                  <p:childTnLst>
+                                    <p:set>
+                                      <p:cBhvr>
+                                        <p:cTn id="87" dur="1" fill="hold">
+                                          <p:stCondLst>
+                                            <p:cond delay="0"/>
+                                          </p:stCondLst>
+                                        </p:cTn>
+                                        <p:tgtEl>
+                                          <p:spTgt spid="30"/>
+                                        </p:tgtEl>
+                                        <p:attrNameLst>
+                                          <p:attrName>style.visibility</p:attrName>
+                                        </p:attrNameLst>
+                                      </p:cBhvr>
+                                      <p:to>
+                                        <p:strVal val="visible"/>
+                                      </p:to>
+                                    </p:set>
+                                    <p:animEffect transition="in" filter="fade">
+                                      <p:cBhvr>
+                                        <p:cTn id="88" dur="500"/>
+                                        <p:tgtEl>
+                                          <p:spTgt spid="30"/>
+                                        </p:tgtEl>
+                                      </p:cBhvr>
+                                    </p:animEffect>
+                                  </p:childTnLst>
+                                </p:cTn>
+                              </p:par>
+                              <p:par>
+                                <p:cTn id="89" presetID="10" presetClass="entr" presetSubtype="0" fill="hold" grpId="0" nodeType="withEffect">
+                                  <p:stCondLst>
+                                    <p:cond delay="1800"/>
+                                  </p:stCondLst>
+                                  <p:childTnLst>
+                                    <p:set>
+                                      <p:cBhvr>
+                                        <p:cTn id="90" dur="1" fill="hold">
+                                          <p:stCondLst>
+                                            <p:cond delay="0"/>
+                                          </p:stCondLst>
+                                        </p:cTn>
+                                        <p:tgtEl>
+                                          <p:spTgt spid="31"/>
+                                        </p:tgtEl>
+                                        <p:attrNameLst>
+                                          <p:attrName>style.visibility</p:attrName>
+                                        </p:attrNameLst>
+                                      </p:cBhvr>
+                                      <p:to>
+                                        <p:strVal val="visible"/>
+                                      </p:to>
+                                    </p:set>
+                                    <p:animEffect transition="in" filter="fade">
+                                      <p:cBhvr>
+                                        <p:cTn id="91" dur="500"/>
+                                        <p:tgtEl>
+                                          <p:spTgt spid="31"/>
+                                        </p:tgtEl>
+                                      </p:cBhvr>
+                                    </p:animEffect>
+                                  </p:childTnLst>
+                                </p:cTn>
+                              </p:par>
+                              <p:par>
+                                <p:cTn id="92" presetID="10" presetClass="entr" presetSubtype="0" fill="hold" grpId="0" nodeType="withEffect">
+                                  <p:stCondLst>
+                                    <p:cond delay="1800"/>
+                                  </p:stCondLst>
+                                  <p:childTnLst>
+                                    <p:set>
+                                      <p:cBhvr>
+                                        <p:cTn id="93" dur="1" fill="hold">
+                                          <p:stCondLst>
+                                            <p:cond delay="0"/>
+                                          </p:stCondLst>
+                                        </p:cTn>
+                                        <p:tgtEl>
+                                          <p:spTgt spid="32"/>
+                                        </p:tgtEl>
+                                        <p:attrNameLst>
+                                          <p:attrName>style.visibility</p:attrName>
+                                        </p:attrNameLst>
+                                      </p:cBhvr>
+                                      <p:to>
+                                        <p:strVal val="visible"/>
+                                      </p:to>
+                                    </p:set>
+                                    <p:animEffect transition="in" filter="fade">
+                                      <p:cBhvr>
+                                        <p:cTn id="94" dur="500"/>
+                                        <p:tgtEl>
+                                          <p:spTgt spid="32"/>
+                                        </p:tgtEl>
+                                      </p:cBhvr>
+                                    </p:animEffect>
+                                  </p:childTnLst>
+                                </p:cTn>
+                              </p:par>
+                              <p:par>
+                                <p:cTn id="95" presetID="10" presetClass="entr" presetSubtype="0" fill="hold" grpId="0" nodeType="withEffect">
+                                  <p:stCondLst>
+                                    <p:cond delay="1800"/>
+                                  </p:stCondLst>
+                                  <p:childTnLst>
+                                    <p:set>
+                                      <p:cBhvr>
+                                        <p:cTn id="96" dur="1" fill="hold">
+                                          <p:stCondLst>
+                                            <p:cond delay="0"/>
+                                          </p:stCondLst>
+                                        </p:cTn>
+                                        <p:tgtEl>
+                                          <p:spTgt spid="33"/>
+                                        </p:tgtEl>
+                                        <p:attrNameLst>
+                                          <p:attrName>style.visibility</p:attrName>
+                                        </p:attrNameLst>
+                                      </p:cBhvr>
+                                      <p:to>
+                                        <p:strVal val="visible"/>
+                                      </p:to>
+                                    </p:set>
+                                    <p:animEffect transition="in" filter="fade">
+                                      <p:cBhvr>
+                                        <p:cTn id="97" dur="500"/>
+                                        <p:tgtEl>
+                                          <p:spTgt spid="33"/>
+                                        </p:tgtEl>
+                                      </p:cBhvr>
+                                    </p:animEffect>
+                                  </p:childTnLst>
+                                </p:cTn>
+                              </p:par>
+                              <p:par>
+                                <p:cTn id="98" presetID="10" presetClass="entr" presetSubtype="0" fill="hold" grpId="0" nodeType="withEffect">
+                                  <p:stCondLst>
+                                    <p:cond delay="1800"/>
+                                  </p:stCondLst>
+                                  <p:childTnLst>
+                                    <p:set>
+                                      <p:cBhvr>
+                                        <p:cTn id="99" dur="1" fill="hold">
+                                          <p:stCondLst>
+                                            <p:cond delay="0"/>
+                                          </p:stCondLst>
+                                        </p:cTn>
+                                        <p:tgtEl>
+                                          <p:spTgt spid="34"/>
+                                        </p:tgtEl>
+                                        <p:attrNameLst>
+                                          <p:attrName>style.visibility</p:attrName>
+                                        </p:attrNameLst>
+                                      </p:cBhvr>
+                                      <p:to>
+                                        <p:strVal val="visible"/>
+                                      </p:to>
+                                    </p:set>
+                                    <p:animEffect transition="in" filter="fade">
+                                      <p:cBhvr>
+                                        <p:cTn id="100" dur="500"/>
+                                        <p:tgtEl>
+                                          <p:spTgt spid="34"/>
+                                        </p:tgtEl>
+                                      </p:cBhvr>
+                                    </p:animEffect>
+                                  </p:childTnLst>
+                                </p:cTn>
+                              </p:par>
+                            </p:childTnLst>
+                          </p:cTn>
+                        </p:par>
+                      </p:childTnLst>
+                    </p:cTn>
+                  </p:par>
+                </p:childTnLst>
+              </p:cTn>
+              <p:prevCondLst>
+                <p:cond evt="onPrev" delay="0">
+                  <p:tgtEl>
+                    <p:sldTgt/>
+                  </p:tgtEl>
+                </p:cond>
+              </p:prevCondLst>
+              <p:nextCondLst>
+                <p:cond evt="onNext" delay="0">
+                  <p:tgtEl>
+                    <p:sldTgt/>
+                  </p:tgtEl>
+                </p:cond>
+              </p:nextCondLst>
+            </p:seq>
+          </p:childTnLst>
+        </p:cTn>
+      </p:par>
+    </p:tnLst>
+    <p:bldLst>
+      <p:bldP spid="3" grpId="0" animBg="1"/>
+      <p:bldP spid="4" grpId="0" animBg="1"/>
+      <p:bldP spid="5" grpId="0" animBg="1"/>
+      <p:bldP spid="6" grpId="0" animBg="1"/>
+      <p:bldP spid="8" grpId="0" animBg="1"/>
+      <p:bldP spid="10" grpId="0" animBg="1"/>
+      <p:bldP spid="11" grpId="0" animBg="1"/>
+      <p:bldP spid="12" grpId="0" animBg="1"/>
+      <p:bldP spid="14" grpId="0" animBg="1"/>
+      <p:bldP spid="16" grpId="0" animBg="1"/>
+      <p:bldP spid="17" grpId="0" animBg="1"/>
+      <p:bldP spid="18" grpId="0" animBg="1"/>
+      <p:bldP spid="20" grpId="0" animBg="1"/>
+      <p:bldP spid="22" grpId="0" animBg="1"/>
+      <p:bldP spid="23" grpId="0" animBg="1"/>
+      <p:bldP spid="24" grpId="0" animBg="1"/>
+      <p:bldP spid="26" grpId="0" animBg="1"/>
+      <p:bldP spid="28" grpId="0" animBg="1"/>
+      <p:bldP spid="29" grpId="0" animBg="1"/>
+      <p:bldP spid="30" grpId="0" animBg="1"/>
+      <p:bldP spid="32" grpId="0" animBg="1"/>
+      <p:bldP spid="34" grpId="0" animBg="1"/>
+    </p:bldLst>
+  </p:timing>
 </p:sld>
 </file>
 
@@ -5562,7 +8884,7 @@
                 <a:ea typeface="Barlow" pitchFamily="34" charset="-122"/>
                 <a:cs typeface="Barlow" pitchFamily="34" charset="-120"/>
               </a:rPr>
-              <a:t>compte et une application, au lieu de six outils</a:t>
+              <a:t>compte et une application, au lieu de cinq outils</a:t>
             </a:r>
             <a:endParaRPr lang="en-US" sz="1400" dirty="0"/>
           </a:p>
@@ -5794,7 +9116,7 @@
                 <a:ea typeface="Barlow" pitchFamily="34" charset="-122"/>
                 <a:cs typeface="Barlow" pitchFamily="34" charset="-120"/>
               </a:rPr>
-              <a:t>Le planning du semestre proposé automatiquement, les conflits signalés, le suivi des heures en un coup d'œil.</a:t>
+              <a:t>Le planning du semestre proposé automatiquement, les conflits signalés, les heures et les présences suivies en un coup d'œil.</a:t>
             </a:r>
             <a:endParaRPr lang="en-US" sz="1400" dirty="0"/>
           </a:p>
@@ -5948,7 +9270,7 @@
                 <a:ea typeface="Barlow" pitchFamily="34" charset="-122"/>
                 <a:cs typeface="Barlow" pitchFamily="34" charset="-120"/>
               </a:rPr>
-              <a:t>Leurs cours, leurs supports, leurs quiz et leurs demandes de report au même endroit.</a:t>
+              <a:t>Leurs cours, l'appel en un QR code, leurs devoirs et leurs activités au même endroit.</a:t>
             </a:r>
             <a:endParaRPr lang="en-US" sz="1400" dirty="0"/>
           </a:p>
@@ -6315,6 +9637,994 @@
   <p:clrMapOvr>
     <a:masterClrMapping/>
   </p:clrMapOvr>
+  <p:transition spd="med">
+    <p:fade/>
+  </p:transition>
+  <p:timing>
+    <p:tnLst>
+      <p:par>
+        <p:cTn id="1" dur="indefinite" restart="never" nodeType="tmRoot">
+          <p:childTnLst>
+            <p:seq concurrent="1" nextAc="seek">
+              <p:cTn id="2" dur="indefinite" nodeType="mainSeq">
+                <p:childTnLst>
+                  <p:par>
+                    <p:cTn id="3" fill="hold">
+                      <p:stCondLst>
+                        <p:cond delay="indefinite"/>
+                        <p:cond evt="onBegin" delay="0">
+                          <p:tn val="2"/>
+                        </p:cond>
+                      </p:stCondLst>
+                      <p:childTnLst>
+                        <p:par>
+                          <p:cTn id="4" fill="hold">
+                            <p:stCondLst>
+                              <p:cond delay="0"/>
+                            </p:stCondLst>
+                            <p:childTnLst>
+                              <p:par>
+                                <p:cTn id="5" presetID="10" presetClass="entr" presetSubtype="0" fill="hold" grpId="0" nodeType="afterEffect">
+                                  <p:stCondLst>
+                                    <p:cond delay="0"/>
+                                  </p:stCondLst>
+                                  <p:childTnLst>
+                                    <p:set>
+                                      <p:cBhvr>
+                                        <p:cTn id="6" dur="1" fill="hold">
+                                          <p:stCondLst>
+                                            <p:cond delay="0"/>
+                                          </p:stCondLst>
+                                        </p:cTn>
+                                        <p:tgtEl>
+                                          <p:spTgt spid="3"/>
+                                        </p:tgtEl>
+                                        <p:attrNameLst>
+                                          <p:attrName>style.visibility</p:attrName>
+                                        </p:attrNameLst>
+                                      </p:cBhvr>
+                                      <p:to>
+                                        <p:strVal val="visible"/>
+                                      </p:to>
+                                    </p:set>
+                                    <p:animEffect transition="in" filter="fade">
+                                      <p:cBhvr>
+                                        <p:cTn id="7" dur="500"/>
+                                        <p:tgtEl>
+                                          <p:spTgt spid="3"/>
+                                        </p:tgtEl>
+                                      </p:cBhvr>
+                                    </p:animEffect>
+                                  </p:childTnLst>
+                                </p:cTn>
+                              </p:par>
+                              <p:par>
+                                <p:cTn id="8" presetID="10" presetClass="entr" presetSubtype="0" fill="hold" grpId="0" nodeType="withEffect">
+                                  <p:stCondLst>
+                                    <p:cond delay="0"/>
+                                  </p:stCondLst>
+                                  <p:childTnLst>
+                                    <p:set>
+                                      <p:cBhvr>
+                                        <p:cTn id="9" dur="1" fill="hold">
+                                          <p:stCondLst>
+                                            <p:cond delay="0"/>
+                                          </p:stCondLst>
+                                        </p:cTn>
+                                        <p:tgtEl>
+                                          <p:spTgt spid="4"/>
+                                        </p:tgtEl>
+                                        <p:attrNameLst>
+                                          <p:attrName>style.visibility</p:attrName>
+                                        </p:attrNameLst>
+                                      </p:cBhvr>
+                                      <p:to>
+                                        <p:strVal val="visible"/>
+                                      </p:to>
+                                    </p:set>
+                                    <p:animEffect transition="in" filter="fade">
+                                      <p:cBhvr>
+                                        <p:cTn id="10" dur="500"/>
+                                        <p:tgtEl>
+                                          <p:spTgt spid="4"/>
+                                        </p:tgtEl>
+                                      </p:cBhvr>
+                                    </p:animEffect>
+                                  </p:childTnLst>
+                                </p:cTn>
+                              </p:par>
+                              <p:par>
+                                <p:cTn id="11" presetID="10" presetClass="entr" presetSubtype="0" fill="hold" grpId="0" nodeType="withEffect">
+                                  <p:stCondLst>
+                                    <p:cond delay="300"/>
+                                  </p:stCondLst>
+                                  <p:childTnLst>
+                                    <p:set>
+                                      <p:cBhvr>
+                                        <p:cTn id="12" dur="1" fill="hold">
+                                          <p:stCondLst>
+                                            <p:cond delay="0"/>
+                                          </p:stCondLst>
+                                        </p:cTn>
+                                        <p:tgtEl>
+                                          <p:spTgt spid="5"/>
+                                        </p:tgtEl>
+                                        <p:attrNameLst>
+                                          <p:attrName>style.visibility</p:attrName>
+                                        </p:attrNameLst>
+                                      </p:cBhvr>
+                                      <p:to>
+                                        <p:strVal val="visible"/>
+                                      </p:to>
+                                    </p:set>
+                                    <p:animEffect transition="in" filter="fade">
+                                      <p:cBhvr>
+                                        <p:cTn id="13" dur="500"/>
+                                        <p:tgtEl>
+                                          <p:spTgt spid="5"/>
+                                        </p:tgtEl>
+                                      </p:cBhvr>
+                                    </p:animEffect>
+                                  </p:childTnLst>
+                                </p:cTn>
+                              </p:par>
+                              <p:par>
+                                <p:cTn id="14" presetID="10" presetClass="entr" presetSubtype="0" fill="hold" grpId="0" nodeType="withEffect">
+                                  <p:stCondLst>
+                                    <p:cond delay="300"/>
+                                  </p:stCondLst>
+                                  <p:childTnLst>
+                                    <p:set>
+                                      <p:cBhvr>
+                                        <p:cTn id="15" dur="1" fill="hold">
+                                          <p:stCondLst>
+                                            <p:cond delay="0"/>
+                                          </p:stCondLst>
+                                        </p:cTn>
+                                        <p:tgtEl>
+                                          <p:spTgt spid="6"/>
+                                        </p:tgtEl>
+                                        <p:attrNameLst>
+                                          <p:attrName>style.visibility</p:attrName>
+                                        </p:attrNameLst>
+                                      </p:cBhvr>
+                                      <p:to>
+                                        <p:strVal val="visible"/>
+                                      </p:to>
+                                    </p:set>
+                                    <p:animEffect transition="in" filter="fade">
+                                      <p:cBhvr>
+                                        <p:cTn id="16" dur="500"/>
+                                        <p:tgtEl>
+                                          <p:spTgt spid="6"/>
+                                        </p:tgtEl>
+                                      </p:cBhvr>
+                                    </p:animEffect>
+                                  </p:childTnLst>
+                                </p:cTn>
+                              </p:par>
+                              <p:par>
+                                <p:cTn id="17" presetID="10" presetClass="entr" presetSubtype="0" fill="hold" grpId="0" nodeType="withEffect">
+                                  <p:stCondLst>
+                                    <p:cond delay="600"/>
+                                  </p:stCondLst>
+                                  <p:childTnLst>
+                                    <p:set>
+                                      <p:cBhvr>
+                                        <p:cTn id="18" dur="1" fill="hold">
+                                          <p:stCondLst>
+                                            <p:cond delay="0"/>
+                                          </p:stCondLst>
+                                        </p:cTn>
+                                        <p:tgtEl>
+                                          <p:spTgt spid="7"/>
+                                        </p:tgtEl>
+                                        <p:attrNameLst>
+                                          <p:attrName>style.visibility</p:attrName>
+                                        </p:attrNameLst>
+                                      </p:cBhvr>
+                                      <p:to>
+                                        <p:strVal val="visible"/>
+                                      </p:to>
+                                    </p:set>
+                                    <p:animEffect transition="in" filter="fade">
+                                      <p:cBhvr>
+                                        <p:cTn id="19" dur="500"/>
+                                        <p:tgtEl>
+                                          <p:spTgt spid="7"/>
+                                        </p:tgtEl>
+                                      </p:cBhvr>
+                                    </p:animEffect>
+                                  </p:childTnLst>
+                                </p:cTn>
+                              </p:par>
+                              <p:par>
+                                <p:cTn id="20" presetID="10" presetClass="entr" presetSubtype="0" fill="hold" grpId="0" nodeType="withEffect">
+                                  <p:stCondLst>
+                                    <p:cond delay="600"/>
+                                  </p:stCondLst>
+                                  <p:childTnLst>
+                                    <p:set>
+                                      <p:cBhvr>
+                                        <p:cTn id="21" dur="1" fill="hold">
+                                          <p:stCondLst>
+                                            <p:cond delay="0"/>
+                                          </p:stCondLst>
+                                        </p:cTn>
+                                        <p:tgtEl>
+                                          <p:spTgt spid="8"/>
+                                        </p:tgtEl>
+                                        <p:attrNameLst>
+                                          <p:attrName>style.visibility</p:attrName>
+                                        </p:attrNameLst>
+                                      </p:cBhvr>
+                                      <p:to>
+                                        <p:strVal val="visible"/>
+                                      </p:to>
+                                    </p:set>
+                                    <p:animEffect transition="in" filter="fade">
+                                      <p:cBhvr>
+                                        <p:cTn id="22" dur="500"/>
+                                        <p:tgtEl>
+                                          <p:spTgt spid="8"/>
+                                        </p:tgtEl>
+                                      </p:cBhvr>
+                                    </p:animEffect>
+                                  </p:childTnLst>
+                                </p:cTn>
+                              </p:par>
+                              <p:par>
+                                <p:cTn id="23" presetID="10" presetClass="entr" presetSubtype="0" fill="hold" grpId="0" nodeType="withEffect">
+                                  <p:stCondLst>
+                                    <p:cond delay="900"/>
+                                  </p:stCondLst>
+                                  <p:childTnLst>
+                                    <p:set>
+                                      <p:cBhvr>
+                                        <p:cTn id="24" dur="1" fill="hold">
+                                          <p:stCondLst>
+                                            <p:cond delay="0"/>
+                                          </p:stCondLst>
+                                        </p:cTn>
+                                        <p:tgtEl>
+                                          <p:spTgt spid="9"/>
+                                        </p:tgtEl>
+                                        <p:attrNameLst>
+                                          <p:attrName>style.visibility</p:attrName>
+                                        </p:attrNameLst>
+                                      </p:cBhvr>
+                                      <p:to>
+                                        <p:strVal val="visible"/>
+                                      </p:to>
+                                    </p:set>
+                                    <p:animEffect transition="in" filter="fade">
+                                      <p:cBhvr>
+                                        <p:cTn id="25" dur="500"/>
+                                        <p:tgtEl>
+                                          <p:spTgt spid="9"/>
+                                        </p:tgtEl>
+                                      </p:cBhvr>
+                                    </p:animEffect>
+                                  </p:childTnLst>
+                                </p:cTn>
+                              </p:par>
+                              <p:par>
+                                <p:cTn id="26" presetID="10" presetClass="entr" presetSubtype="0" fill="hold" grpId="0" nodeType="withEffect">
+                                  <p:stCondLst>
+                                    <p:cond delay="900"/>
+                                  </p:stCondLst>
+                                  <p:childTnLst>
+                                    <p:set>
+                                      <p:cBhvr>
+                                        <p:cTn id="27" dur="1" fill="hold">
+                                          <p:stCondLst>
+                                            <p:cond delay="0"/>
+                                          </p:stCondLst>
+                                        </p:cTn>
+                                        <p:tgtEl>
+                                          <p:spTgt spid="10"/>
+                                        </p:tgtEl>
+                                        <p:attrNameLst>
+                                          <p:attrName>style.visibility</p:attrName>
+                                        </p:attrNameLst>
+                                      </p:cBhvr>
+                                      <p:to>
+                                        <p:strVal val="visible"/>
+                                      </p:to>
+                                    </p:set>
+                                    <p:animEffect transition="in" filter="fade">
+                                      <p:cBhvr>
+                                        <p:cTn id="28" dur="500"/>
+                                        <p:tgtEl>
+                                          <p:spTgt spid="10"/>
+                                        </p:tgtEl>
+                                      </p:cBhvr>
+                                    </p:animEffect>
+                                  </p:childTnLst>
+                                </p:cTn>
+                              </p:par>
+                              <p:par>
+                                <p:cTn id="29" presetID="10" presetClass="entr" presetSubtype="0" fill="hold" grpId="0" nodeType="withEffect">
+                                  <p:stCondLst>
+                                    <p:cond delay="900"/>
+                                  </p:stCondLst>
+                                  <p:childTnLst>
+                                    <p:set>
+                                      <p:cBhvr>
+                                        <p:cTn id="30" dur="1" fill="hold">
+                                          <p:stCondLst>
+                                            <p:cond delay="0"/>
+                                          </p:stCondLst>
+                                        </p:cTn>
+                                        <p:tgtEl>
+                                          <p:spTgt spid="11"/>
+                                        </p:tgtEl>
+                                        <p:attrNameLst>
+                                          <p:attrName>style.visibility</p:attrName>
+                                        </p:attrNameLst>
+                                      </p:cBhvr>
+                                      <p:to>
+                                        <p:strVal val="visible"/>
+                                      </p:to>
+                                    </p:set>
+                                    <p:animEffect transition="in" filter="fade">
+                                      <p:cBhvr>
+                                        <p:cTn id="31" dur="500"/>
+                                        <p:tgtEl>
+                                          <p:spTgt spid="11"/>
+                                        </p:tgtEl>
+                                      </p:cBhvr>
+                                    </p:animEffect>
+                                  </p:childTnLst>
+                                </p:cTn>
+                              </p:par>
+                              <p:par>
+                                <p:cTn id="32" presetID="10" presetClass="entr" presetSubtype="0" fill="hold" grpId="0" nodeType="withEffect">
+                                  <p:stCondLst>
+                                    <p:cond delay="900"/>
+                                  </p:stCondLst>
+                                  <p:childTnLst>
+                                    <p:set>
+                                      <p:cBhvr>
+                                        <p:cTn id="33" dur="1" fill="hold">
+                                          <p:stCondLst>
+                                            <p:cond delay="0"/>
+                                          </p:stCondLst>
+                                        </p:cTn>
+                                        <p:tgtEl>
+                                          <p:spTgt spid="12"/>
+                                        </p:tgtEl>
+                                        <p:attrNameLst>
+                                          <p:attrName>style.visibility</p:attrName>
+                                        </p:attrNameLst>
+                                      </p:cBhvr>
+                                      <p:to>
+                                        <p:strVal val="visible"/>
+                                      </p:to>
+                                    </p:set>
+                                    <p:animEffect transition="in" filter="fade">
+                                      <p:cBhvr>
+                                        <p:cTn id="34" dur="500"/>
+                                        <p:tgtEl>
+                                          <p:spTgt spid="12"/>
+                                        </p:tgtEl>
+                                      </p:cBhvr>
+                                    </p:animEffect>
+                                  </p:childTnLst>
+                                </p:cTn>
+                              </p:par>
+                              <p:par>
+                                <p:cTn id="35" presetID="10" presetClass="entr" presetSubtype="0" fill="hold" grpId="0" nodeType="withEffect">
+                                  <p:stCondLst>
+                                    <p:cond delay="900"/>
+                                  </p:stCondLst>
+                                  <p:childTnLst>
+                                    <p:set>
+                                      <p:cBhvr>
+                                        <p:cTn id="36" dur="1" fill="hold">
+                                          <p:stCondLst>
+                                            <p:cond delay="0"/>
+                                          </p:stCondLst>
+                                        </p:cTn>
+                                        <p:tgtEl>
+                                          <p:spTgt spid="13"/>
+                                        </p:tgtEl>
+                                        <p:attrNameLst>
+                                          <p:attrName>style.visibility</p:attrName>
+                                        </p:attrNameLst>
+                                      </p:cBhvr>
+                                      <p:to>
+                                        <p:strVal val="visible"/>
+                                      </p:to>
+                                    </p:set>
+                                    <p:animEffect transition="in" filter="fade">
+                                      <p:cBhvr>
+                                        <p:cTn id="37" dur="500"/>
+                                        <p:tgtEl>
+                                          <p:spTgt spid="13"/>
+                                        </p:tgtEl>
+                                      </p:cBhvr>
+                                    </p:animEffect>
+                                  </p:childTnLst>
+                                </p:cTn>
+                              </p:par>
+                              <p:par>
+                                <p:cTn id="38" presetID="10" presetClass="entr" presetSubtype="0" fill="hold" grpId="0" nodeType="withEffect">
+                                  <p:stCondLst>
+                                    <p:cond delay="1200"/>
+                                  </p:stCondLst>
+                                  <p:childTnLst>
+                                    <p:set>
+                                      <p:cBhvr>
+                                        <p:cTn id="39" dur="1" fill="hold">
+                                          <p:stCondLst>
+                                            <p:cond delay="0"/>
+                                          </p:stCondLst>
+                                        </p:cTn>
+                                        <p:tgtEl>
+                                          <p:spTgt spid="14"/>
+                                        </p:tgtEl>
+                                        <p:attrNameLst>
+                                          <p:attrName>style.visibility</p:attrName>
+                                        </p:attrNameLst>
+                                      </p:cBhvr>
+                                      <p:to>
+                                        <p:strVal val="visible"/>
+                                      </p:to>
+                                    </p:set>
+                                    <p:animEffect transition="in" filter="fade">
+                                      <p:cBhvr>
+                                        <p:cTn id="40" dur="500"/>
+                                        <p:tgtEl>
+                                          <p:spTgt spid="14"/>
+                                        </p:tgtEl>
+                                      </p:cBhvr>
+                                    </p:animEffect>
+                                  </p:childTnLst>
+                                </p:cTn>
+                              </p:par>
+                              <p:par>
+                                <p:cTn id="41" presetID="10" presetClass="entr" presetSubtype="0" fill="hold" grpId="0" nodeType="withEffect">
+                                  <p:stCondLst>
+                                    <p:cond delay="1200"/>
+                                  </p:stCondLst>
+                                  <p:childTnLst>
+                                    <p:set>
+                                      <p:cBhvr>
+                                        <p:cTn id="42" dur="1" fill="hold">
+                                          <p:stCondLst>
+                                            <p:cond delay="0"/>
+                                          </p:stCondLst>
+                                        </p:cTn>
+                                        <p:tgtEl>
+                                          <p:spTgt spid="15"/>
+                                        </p:tgtEl>
+                                        <p:attrNameLst>
+                                          <p:attrName>style.visibility</p:attrName>
+                                        </p:attrNameLst>
+                                      </p:cBhvr>
+                                      <p:to>
+                                        <p:strVal val="visible"/>
+                                      </p:to>
+                                    </p:set>
+                                    <p:animEffect transition="in" filter="fade">
+                                      <p:cBhvr>
+                                        <p:cTn id="43" dur="500"/>
+                                        <p:tgtEl>
+                                          <p:spTgt spid="15"/>
+                                        </p:tgtEl>
+                                      </p:cBhvr>
+                                    </p:animEffect>
+                                  </p:childTnLst>
+                                </p:cTn>
+                              </p:par>
+                              <p:par>
+                                <p:cTn id="44" presetID="10" presetClass="entr" presetSubtype="0" fill="hold" grpId="0" nodeType="withEffect">
+                                  <p:stCondLst>
+                                    <p:cond delay="1200"/>
+                                  </p:stCondLst>
+                                  <p:childTnLst>
+                                    <p:set>
+                                      <p:cBhvr>
+                                        <p:cTn id="45" dur="1" fill="hold">
+                                          <p:stCondLst>
+                                            <p:cond delay="0"/>
+                                          </p:stCondLst>
+                                        </p:cTn>
+                                        <p:tgtEl>
+                                          <p:spTgt spid="16"/>
+                                        </p:tgtEl>
+                                        <p:attrNameLst>
+                                          <p:attrName>style.visibility</p:attrName>
+                                        </p:attrNameLst>
+                                      </p:cBhvr>
+                                      <p:to>
+                                        <p:strVal val="visible"/>
+                                      </p:to>
+                                    </p:set>
+                                    <p:animEffect transition="in" filter="fade">
+                                      <p:cBhvr>
+                                        <p:cTn id="46" dur="500"/>
+                                        <p:tgtEl>
+                                          <p:spTgt spid="16"/>
+                                        </p:tgtEl>
+                                      </p:cBhvr>
+                                    </p:animEffect>
+                                  </p:childTnLst>
+                                </p:cTn>
+                              </p:par>
+                              <p:par>
+                                <p:cTn id="47" presetID="10" presetClass="entr" presetSubtype="0" fill="hold" grpId="0" nodeType="withEffect">
+                                  <p:stCondLst>
+                                    <p:cond delay="1200"/>
+                                  </p:stCondLst>
+                                  <p:childTnLst>
+                                    <p:set>
+                                      <p:cBhvr>
+                                        <p:cTn id="48" dur="1" fill="hold">
+                                          <p:stCondLst>
+                                            <p:cond delay="0"/>
+                                          </p:stCondLst>
+                                        </p:cTn>
+                                        <p:tgtEl>
+                                          <p:spTgt spid="17"/>
+                                        </p:tgtEl>
+                                        <p:attrNameLst>
+                                          <p:attrName>style.visibility</p:attrName>
+                                        </p:attrNameLst>
+                                      </p:cBhvr>
+                                      <p:to>
+                                        <p:strVal val="visible"/>
+                                      </p:to>
+                                    </p:set>
+                                    <p:animEffect transition="in" filter="fade">
+                                      <p:cBhvr>
+                                        <p:cTn id="49" dur="500"/>
+                                        <p:tgtEl>
+                                          <p:spTgt spid="17"/>
+                                        </p:tgtEl>
+                                      </p:cBhvr>
+                                    </p:animEffect>
+                                  </p:childTnLst>
+                                </p:cTn>
+                              </p:par>
+                              <p:par>
+                                <p:cTn id="50" presetID="10" presetClass="entr" presetSubtype="0" fill="hold" grpId="0" nodeType="withEffect">
+                                  <p:stCondLst>
+                                    <p:cond delay="1200"/>
+                                  </p:stCondLst>
+                                  <p:childTnLst>
+                                    <p:set>
+                                      <p:cBhvr>
+                                        <p:cTn id="51" dur="1" fill="hold">
+                                          <p:stCondLst>
+                                            <p:cond delay="0"/>
+                                          </p:stCondLst>
+                                        </p:cTn>
+                                        <p:tgtEl>
+                                          <p:spTgt spid="18"/>
+                                        </p:tgtEl>
+                                        <p:attrNameLst>
+                                          <p:attrName>style.visibility</p:attrName>
+                                        </p:attrNameLst>
+                                      </p:cBhvr>
+                                      <p:to>
+                                        <p:strVal val="visible"/>
+                                      </p:to>
+                                    </p:set>
+                                    <p:animEffect transition="in" filter="fade">
+                                      <p:cBhvr>
+                                        <p:cTn id="52" dur="500"/>
+                                        <p:tgtEl>
+                                          <p:spTgt spid="18"/>
+                                        </p:tgtEl>
+                                      </p:cBhvr>
+                                    </p:animEffect>
+                                  </p:childTnLst>
+                                </p:cTn>
+                              </p:par>
+                              <p:par>
+                                <p:cTn id="53" presetID="10" presetClass="entr" presetSubtype="0" fill="hold" grpId="0" nodeType="withEffect">
+                                  <p:stCondLst>
+                                    <p:cond delay="1500"/>
+                                  </p:stCondLst>
+                                  <p:childTnLst>
+                                    <p:set>
+                                      <p:cBhvr>
+                                        <p:cTn id="54" dur="1" fill="hold">
+                                          <p:stCondLst>
+                                            <p:cond delay="0"/>
+                                          </p:stCondLst>
+                                        </p:cTn>
+                                        <p:tgtEl>
+                                          <p:spTgt spid="19"/>
+                                        </p:tgtEl>
+                                        <p:attrNameLst>
+                                          <p:attrName>style.visibility</p:attrName>
+                                        </p:attrNameLst>
+                                      </p:cBhvr>
+                                      <p:to>
+                                        <p:strVal val="visible"/>
+                                      </p:to>
+                                    </p:set>
+                                    <p:animEffect transition="in" filter="fade">
+                                      <p:cBhvr>
+                                        <p:cTn id="55" dur="500"/>
+                                        <p:tgtEl>
+                                          <p:spTgt spid="19"/>
+                                        </p:tgtEl>
+                                      </p:cBhvr>
+                                    </p:animEffect>
+                                  </p:childTnLst>
+                                </p:cTn>
+                              </p:par>
+                              <p:par>
+                                <p:cTn id="56" presetID="10" presetClass="entr" presetSubtype="0" fill="hold" grpId="0" nodeType="withEffect">
+                                  <p:stCondLst>
+                                    <p:cond delay="1500"/>
+                                  </p:stCondLst>
+                                  <p:childTnLst>
+                                    <p:set>
+                                      <p:cBhvr>
+                                        <p:cTn id="57" dur="1" fill="hold">
+                                          <p:stCondLst>
+                                            <p:cond delay="0"/>
+                                          </p:stCondLst>
+                                        </p:cTn>
+                                        <p:tgtEl>
+                                          <p:spTgt spid="20"/>
+                                        </p:tgtEl>
+                                        <p:attrNameLst>
+                                          <p:attrName>style.visibility</p:attrName>
+                                        </p:attrNameLst>
+                                      </p:cBhvr>
+                                      <p:to>
+                                        <p:strVal val="visible"/>
+                                      </p:to>
+                                    </p:set>
+                                    <p:animEffect transition="in" filter="fade">
+                                      <p:cBhvr>
+                                        <p:cTn id="58" dur="500"/>
+                                        <p:tgtEl>
+                                          <p:spTgt spid="20"/>
+                                        </p:tgtEl>
+                                      </p:cBhvr>
+                                    </p:animEffect>
+                                  </p:childTnLst>
+                                </p:cTn>
+                              </p:par>
+                              <p:par>
+                                <p:cTn id="59" presetID="10" presetClass="entr" presetSubtype="0" fill="hold" grpId="0" nodeType="withEffect">
+                                  <p:stCondLst>
+                                    <p:cond delay="1500"/>
+                                  </p:stCondLst>
+                                  <p:childTnLst>
+                                    <p:set>
+                                      <p:cBhvr>
+                                        <p:cTn id="60" dur="1" fill="hold">
+                                          <p:stCondLst>
+                                            <p:cond delay="0"/>
+                                          </p:stCondLst>
+                                        </p:cTn>
+                                        <p:tgtEl>
+                                          <p:spTgt spid="21"/>
+                                        </p:tgtEl>
+                                        <p:attrNameLst>
+                                          <p:attrName>style.visibility</p:attrName>
+                                        </p:attrNameLst>
+                                      </p:cBhvr>
+                                      <p:to>
+                                        <p:strVal val="visible"/>
+                                      </p:to>
+                                    </p:set>
+                                    <p:animEffect transition="in" filter="fade">
+                                      <p:cBhvr>
+                                        <p:cTn id="61" dur="500"/>
+                                        <p:tgtEl>
+                                          <p:spTgt spid="21"/>
+                                        </p:tgtEl>
+                                      </p:cBhvr>
+                                    </p:animEffect>
+                                  </p:childTnLst>
+                                </p:cTn>
+                              </p:par>
+                              <p:par>
+                                <p:cTn id="62" presetID="10" presetClass="entr" presetSubtype="0" fill="hold" grpId="0" nodeType="withEffect">
+                                  <p:stCondLst>
+                                    <p:cond delay="1500"/>
+                                  </p:stCondLst>
+                                  <p:childTnLst>
+                                    <p:set>
+                                      <p:cBhvr>
+                                        <p:cTn id="63" dur="1" fill="hold">
+                                          <p:stCondLst>
+                                            <p:cond delay="0"/>
+                                          </p:stCondLst>
+                                        </p:cTn>
+                                        <p:tgtEl>
+                                          <p:spTgt spid="22"/>
+                                        </p:tgtEl>
+                                        <p:attrNameLst>
+                                          <p:attrName>style.visibility</p:attrName>
+                                        </p:attrNameLst>
+                                      </p:cBhvr>
+                                      <p:to>
+                                        <p:strVal val="visible"/>
+                                      </p:to>
+                                    </p:set>
+                                    <p:animEffect transition="in" filter="fade">
+                                      <p:cBhvr>
+                                        <p:cTn id="64" dur="500"/>
+                                        <p:tgtEl>
+                                          <p:spTgt spid="22"/>
+                                        </p:tgtEl>
+                                      </p:cBhvr>
+                                    </p:animEffect>
+                                  </p:childTnLst>
+                                </p:cTn>
+                              </p:par>
+                              <p:par>
+                                <p:cTn id="65" presetID="10" presetClass="entr" presetSubtype="0" fill="hold" grpId="0" nodeType="withEffect">
+                                  <p:stCondLst>
+                                    <p:cond delay="1500"/>
+                                  </p:stCondLst>
+                                  <p:childTnLst>
+                                    <p:set>
+                                      <p:cBhvr>
+                                        <p:cTn id="66" dur="1" fill="hold">
+                                          <p:stCondLst>
+                                            <p:cond delay="0"/>
+                                          </p:stCondLst>
+                                        </p:cTn>
+                                        <p:tgtEl>
+                                          <p:spTgt spid="23"/>
+                                        </p:tgtEl>
+                                        <p:attrNameLst>
+                                          <p:attrName>style.visibility</p:attrName>
+                                        </p:attrNameLst>
+                                      </p:cBhvr>
+                                      <p:to>
+                                        <p:strVal val="visible"/>
+                                      </p:to>
+                                    </p:set>
+                                    <p:animEffect transition="in" filter="fade">
+                                      <p:cBhvr>
+                                        <p:cTn id="67" dur="500"/>
+                                        <p:tgtEl>
+                                          <p:spTgt spid="23"/>
+                                        </p:tgtEl>
+                                      </p:cBhvr>
+                                    </p:animEffect>
+                                  </p:childTnLst>
+                                </p:cTn>
+                              </p:par>
+                              <p:par>
+                                <p:cTn id="68" presetID="10" presetClass="entr" presetSubtype="0" fill="hold" grpId="0" nodeType="withEffect">
+                                  <p:stCondLst>
+                                    <p:cond delay="1800"/>
+                                  </p:stCondLst>
+                                  <p:childTnLst>
+                                    <p:set>
+                                      <p:cBhvr>
+                                        <p:cTn id="69" dur="1" fill="hold">
+                                          <p:stCondLst>
+                                            <p:cond delay="0"/>
+                                          </p:stCondLst>
+                                        </p:cTn>
+                                        <p:tgtEl>
+                                          <p:spTgt spid="24"/>
+                                        </p:tgtEl>
+                                        <p:attrNameLst>
+                                          <p:attrName>style.visibility</p:attrName>
+                                        </p:attrNameLst>
+                                      </p:cBhvr>
+                                      <p:to>
+                                        <p:strVal val="visible"/>
+                                      </p:to>
+                                    </p:set>
+                                    <p:animEffect transition="in" filter="fade">
+                                      <p:cBhvr>
+                                        <p:cTn id="70" dur="500"/>
+                                        <p:tgtEl>
+                                          <p:spTgt spid="24"/>
+                                        </p:tgtEl>
+                                      </p:cBhvr>
+                                    </p:animEffect>
+                                  </p:childTnLst>
+                                </p:cTn>
+                              </p:par>
+                              <p:par>
+                                <p:cTn id="71" presetID="10" presetClass="entr" presetSubtype="0" fill="hold" grpId="0" nodeType="withEffect">
+                                  <p:stCondLst>
+                                    <p:cond delay="1800"/>
+                                  </p:stCondLst>
+                                  <p:childTnLst>
+                                    <p:set>
+                                      <p:cBhvr>
+                                        <p:cTn id="72" dur="1" fill="hold">
+                                          <p:stCondLst>
+                                            <p:cond delay="0"/>
+                                          </p:stCondLst>
+                                        </p:cTn>
+                                        <p:tgtEl>
+                                          <p:spTgt spid="25"/>
+                                        </p:tgtEl>
+                                        <p:attrNameLst>
+                                          <p:attrName>style.visibility</p:attrName>
+                                        </p:attrNameLst>
+                                      </p:cBhvr>
+                                      <p:to>
+                                        <p:strVal val="visible"/>
+                                      </p:to>
+                                    </p:set>
+                                    <p:animEffect transition="in" filter="fade">
+                                      <p:cBhvr>
+                                        <p:cTn id="73" dur="500"/>
+                                        <p:tgtEl>
+                                          <p:spTgt spid="25"/>
+                                        </p:tgtEl>
+                                      </p:cBhvr>
+                                    </p:animEffect>
+                                  </p:childTnLst>
+                                </p:cTn>
+                              </p:par>
+                              <p:par>
+                                <p:cTn id="74" presetID="10" presetClass="entr" presetSubtype="0" fill="hold" grpId="0" nodeType="withEffect">
+                                  <p:stCondLst>
+                                    <p:cond delay="1800"/>
+                                  </p:stCondLst>
+                                  <p:childTnLst>
+                                    <p:set>
+                                      <p:cBhvr>
+                                        <p:cTn id="75" dur="1" fill="hold">
+                                          <p:stCondLst>
+                                            <p:cond delay="0"/>
+                                          </p:stCondLst>
+                                        </p:cTn>
+                                        <p:tgtEl>
+                                          <p:spTgt spid="26"/>
+                                        </p:tgtEl>
+                                        <p:attrNameLst>
+                                          <p:attrName>style.visibility</p:attrName>
+                                        </p:attrNameLst>
+                                      </p:cBhvr>
+                                      <p:to>
+                                        <p:strVal val="visible"/>
+                                      </p:to>
+                                    </p:set>
+                                    <p:animEffect transition="in" filter="fade">
+                                      <p:cBhvr>
+                                        <p:cTn id="76" dur="500"/>
+                                        <p:tgtEl>
+                                          <p:spTgt spid="26"/>
+                                        </p:tgtEl>
+                                      </p:cBhvr>
+                                    </p:animEffect>
+                                  </p:childTnLst>
+                                </p:cTn>
+                              </p:par>
+                              <p:par>
+                                <p:cTn id="77" presetID="10" presetClass="entr" presetSubtype="0" fill="hold" grpId="0" nodeType="withEffect">
+                                  <p:stCondLst>
+                                    <p:cond delay="1800"/>
+                                  </p:stCondLst>
+                                  <p:childTnLst>
+                                    <p:set>
+                                      <p:cBhvr>
+                                        <p:cTn id="78" dur="1" fill="hold">
+                                          <p:stCondLst>
+                                            <p:cond delay="0"/>
+                                          </p:stCondLst>
+                                        </p:cTn>
+                                        <p:tgtEl>
+                                          <p:spTgt spid="27"/>
+                                        </p:tgtEl>
+                                        <p:attrNameLst>
+                                          <p:attrName>style.visibility</p:attrName>
+                                        </p:attrNameLst>
+                                      </p:cBhvr>
+                                      <p:to>
+                                        <p:strVal val="visible"/>
+                                      </p:to>
+                                    </p:set>
+                                    <p:animEffect transition="in" filter="fade">
+                                      <p:cBhvr>
+                                        <p:cTn id="79" dur="500"/>
+                                        <p:tgtEl>
+                                          <p:spTgt spid="27"/>
+                                        </p:tgtEl>
+                                      </p:cBhvr>
+                                    </p:animEffect>
+                                  </p:childTnLst>
+                                </p:cTn>
+                              </p:par>
+                              <p:par>
+                                <p:cTn id="80" presetID="10" presetClass="entr" presetSubtype="0" fill="hold" grpId="0" nodeType="withEffect">
+                                  <p:stCondLst>
+                                    <p:cond delay="1800"/>
+                                  </p:stCondLst>
+                                  <p:childTnLst>
+                                    <p:set>
+                                      <p:cBhvr>
+                                        <p:cTn id="81" dur="1" fill="hold">
+                                          <p:stCondLst>
+                                            <p:cond delay="0"/>
+                                          </p:stCondLst>
+                                        </p:cTn>
+                                        <p:tgtEl>
+                                          <p:spTgt spid="28"/>
+                                        </p:tgtEl>
+                                        <p:attrNameLst>
+                                          <p:attrName>style.visibility</p:attrName>
+                                        </p:attrNameLst>
+                                      </p:cBhvr>
+                                      <p:to>
+                                        <p:strVal val="visible"/>
+                                      </p:to>
+                                    </p:set>
+                                    <p:animEffect transition="in" filter="fade">
+                                      <p:cBhvr>
+                                        <p:cTn id="82" dur="500"/>
+                                        <p:tgtEl>
+                                          <p:spTgt spid="28"/>
+                                        </p:tgtEl>
+                                      </p:cBhvr>
+                                    </p:animEffect>
+                                  </p:childTnLst>
+                                </p:cTn>
+                              </p:par>
+                            </p:childTnLst>
+                          </p:cTn>
+                        </p:par>
+                      </p:childTnLst>
+                    </p:cTn>
+                  </p:par>
+                </p:childTnLst>
+              </p:cTn>
+              <p:prevCondLst>
+                <p:cond evt="onPrev" delay="0">
+                  <p:tgtEl>
+                    <p:sldTgt/>
+                  </p:tgtEl>
+                </p:cond>
+              </p:prevCondLst>
+              <p:nextCondLst>
+                <p:cond evt="onNext" delay="0">
+                  <p:tgtEl>
+                    <p:sldTgt/>
+                  </p:tgtEl>
+                </p:cond>
+              </p:nextCondLst>
+            </p:seq>
+          </p:childTnLst>
+        </p:cTn>
+      </p:par>
+    </p:tnLst>
+    <p:bldLst>
+      <p:bldP spid="3" grpId="0" animBg="1"/>
+      <p:bldP spid="4" grpId="0" animBg="1"/>
+      <p:bldP spid="5" grpId="0" animBg="1"/>
+      <p:bldP spid="6" grpId="0" animBg="1"/>
+      <p:bldP spid="7" grpId="0" animBg="1"/>
+      <p:bldP spid="8" grpId="0" animBg="1"/>
+      <p:bldP spid="9" grpId="0" animBg="1"/>
+      <p:bldP spid="10" grpId="0" animBg="1"/>
+      <p:bldP spid="12" grpId="0" animBg="1"/>
+      <p:bldP spid="13" grpId="0" animBg="1"/>
+      <p:bldP spid="14" grpId="0" animBg="1"/>
+      <p:bldP spid="15" grpId="0" animBg="1"/>
+      <p:bldP spid="17" grpId="0" animBg="1"/>
+      <p:bldP spid="18" grpId="0" animBg="1"/>
+      <p:bldP spid="19" grpId="0" animBg="1"/>
+      <p:bldP spid="20" grpId="0" animBg="1"/>
+      <p:bldP spid="22" grpId="0" animBg="1"/>
+      <p:bldP spid="23" grpId="0" animBg="1"/>
+      <p:bldP spid="24" grpId="0" animBg="1"/>
+      <p:bldP spid="25" grpId="0" animBg="1"/>
+      <p:bldP spid="27" grpId="0" animBg="1"/>
+      <p:bldP spid="28" grpId="0" animBg="1"/>
+    </p:bldLst>
+  </p:timing>
 </p:sld>
 </file>
 
@@ -6472,7 +10782,7 @@
                 <a:ea typeface="Barlow" pitchFamily="34" charset="-122"/>
                 <a:cs typeface="Barlow" pitchFamily="34" charset="-120"/>
               </a:rPr>
-              <a:t>Le site web, pour toute l'école</a:t>
+              <a:t>Le site web et l'application iPhone et Android</a:t>
             </a:r>
             <a:endParaRPr lang="en-US" sz="1700" dirty="0"/>
           </a:p>
@@ -6535,7 +10845,7 @@
                 <a:ea typeface="Barlow" pitchFamily="34" charset="-122"/>
                 <a:cs typeface="Barlow" pitchFamily="34" charset="-120"/>
               </a:rPr>
-              <a:t>L'application mobile, sur iPhone et Android</a:t>
+              <a:t>Les annonces ciblées et l'agenda synchronisé</a:t>
             </a:r>
             <a:endParaRPr lang="en-US" sz="1700" dirty="0"/>
           </a:p>
@@ -6598,7 +10908,7 @@
                 <a:ea typeface="Barlow" pitchFamily="34" charset="-122"/>
                 <a:cs typeface="Barlow" pitchFamily="34" charset="-120"/>
               </a:rPr>
-              <a:t>La bibliothèque de cours</a:t>
+              <a:t>La bibliothèque, les devoirs et les activités</a:t>
             </a:r>
             <a:endParaRPr lang="en-US" sz="1700" dirty="0"/>
           </a:p>
@@ -6661,7 +10971,7 @@
                 <a:ea typeface="Barlow" pitchFamily="34" charset="-122"/>
                 <a:cs typeface="Barlow" pitchFamily="34" charset="-120"/>
               </a:rPr>
-              <a:t>Les jeux, les quiz et les devoirs notés</a:t>
+              <a:t>L'appel en classe par QR code</a:t>
             </a:r>
             <a:endParaRPr lang="en-US" sz="1700" dirty="0"/>
           </a:p>
@@ -6906,7 +11216,7 @@
                 <a:ea typeface="Barlow" pitchFamily="34" charset="-122"/>
                 <a:cs typeface="Barlow" pitchFamily="34" charset="-120"/>
               </a:rPr>
-              <a:t>Les annonces ciblées par filière et par groupe, à la place des envois Gmail</a:t>
+              <a:t>Les notifications sur le téléphone et la publication sur les stores</a:t>
             </a:r>
             <a:endParaRPr lang="en-US" sz="1700" dirty="0"/>
           </a:p>
@@ -7048,7 +11358,7 @@
                 <a:ea typeface="Barlow Condensed" pitchFamily="34" charset="-122"/>
                 <a:cs typeface="Barlow Condensed" pitchFamily="34" charset="-120"/>
               </a:rPr>
-              <a:t>HESTIM Planner — l'école, à l'heure.</a:t>
+              <a:t>HESTIM Planner, l'école à l'heure.</a:t>
             </a:r>
             <a:endParaRPr lang="en-US" sz="3000" dirty="0"/>
           </a:p>
@@ -7146,6 +11456,814 @@
   <p:clrMapOvr>
     <a:masterClrMapping/>
   </p:clrMapOvr>
+  <p:transition spd="med">
+    <p:fade/>
+  </p:transition>
+  <p:timing>
+    <p:tnLst>
+      <p:par>
+        <p:cTn id="1" dur="indefinite" restart="never" nodeType="tmRoot">
+          <p:childTnLst>
+            <p:seq concurrent="1" nextAc="seek">
+              <p:cTn id="2" dur="indefinite" nodeType="mainSeq">
+                <p:childTnLst>
+                  <p:par>
+                    <p:cTn id="3" fill="hold">
+                      <p:stCondLst>
+                        <p:cond delay="indefinite"/>
+                        <p:cond evt="onBegin" delay="0">
+                          <p:tn val="2"/>
+                        </p:cond>
+                      </p:stCondLst>
+                      <p:childTnLst>
+                        <p:par>
+                          <p:cTn id="4" fill="hold">
+                            <p:stCondLst>
+                              <p:cond delay="0"/>
+                            </p:stCondLst>
+                            <p:childTnLst>
+                              <p:par>
+                                <p:cTn id="5" presetID="10" presetClass="entr" presetSubtype="0" fill="hold" grpId="0" nodeType="afterEffect">
+                                  <p:stCondLst>
+                                    <p:cond delay="0"/>
+                                  </p:stCondLst>
+                                  <p:childTnLst>
+                                    <p:set>
+                                      <p:cBhvr>
+                                        <p:cTn id="6" dur="1" fill="hold">
+                                          <p:stCondLst>
+                                            <p:cond delay="0"/>
+                                          </p:stCondLst>
+                                        </p:cTn>
+                                        <p:tgtEl>
+                                          <p:spTgt spid="3"/>
+                                        </p:tgtEl>
+                                        <p:attrNameLst>
+                                          <p:attrName>style.visibility</p:attrName>
+                                        </p:attrNameLst>
+                                      </p:cBhvr>
+                                      <p:to>
+                                        <p:strVal val="visible"/>
+                                      </p:to>
+                                    </p:set>
+                                    <p:animEffect transition="in" filter="fade">
+                                      <p:cBhvr>
+                                        <p:cTn id="7" dur="500"/>
+                                        <p:tgtEl>
+                                          <p:spTgt spid="3"/>
+                                        </p:tgtEl>
+                                      </p:cBhvr>
+                                    </p:animEffect>
+                                  </p:childTnLst>
+                                </p:cTn>
+                              </p:par>
+                              <p:par>
+                                <p:cTn id="8" presetID="10" presetClass="entr" presetSubtype="0" fill="hold" grpId="0" nodeType="withEffect">
+                                  <p:stCondLst>
+                                    <p:cond delay="300"/>
+                                  </p:stCondLst>
+                                  <p:childTnLst>
+                                    <p:set>
+                                      <p:cBhvr>
+                                        <p:cTn id="9" dur="1" fill="hold">
+                                          <p:stCondLst>
+                                            <p:cond delay="0"/>
+                                          </p:stCondLst>
+                                        </p:cTn>
+                                        <p:tgtEl>
+                                          <p:spTgt spid="4"/>
+                                        </p:tgtEl>
+                                        <p:attrNameLst>
+                                          <p:attrName>style.visibility</p:attrName>
+                                        </p:attrNameLst>
+                                      </p:cBhvr>
+                                      <p:to>
+                                        <p:strVal val="visible"/>
+                                      </p:to>
+                                    </p:set>
+                                    <p:animEffect transition="in" filter="fade">
+                                      <p:cBhvr>
+                                        <p:cTn id="10" dur="500"/>
+                                        <p:tgtEl>
+                                          <p:spTgt spid="4"/>
+                                        </p:tgtEl>
+                                      </p:cBhvr>
+                                    </p:animEffect>
+                                  </p:childTnLst>
+                                </p:cTn>
+                              </p:par>
+                              <p:par>
+                                <p:cTn id="11" presetID="10" presetClass="entr" presetSubtype="0" fill="hold" grpId="0" nodeType="withEffect">
+                                  <p:stCondLst>
+                                    <p:cond delay="300"/>
+                                  </p:stCondLst>
+                                  <p:childTnLst>
+                                    <p:set>
+                                      <p:cBhvr>
+                                        <p:cTn id="12" dur="1" fill="hold">
+                                          <p:stCondLst>
+                                            <p:cond delay="0"/>
+                                          </p:stCondLst>
+                                        </p:cTn>
+                                        <p:tgtEl>
+                                          <p:spTgt spid="5"/>
+                                        </p:tgtEl>
+                                        <p:attrNameLst>
+                                          <p:attrName>style.visibility</p:attrName>
+                                        </p:attrNameLst>
+                                      </p:cBhvr>
+                                      <p:to>
+                                        <p:strVal val="visible"/>
+                                      </p:to>
+                                    </p:set>
+                                    <p:animEffect transition="in" filter="fade">
+                                      <p:cBhvr>
+                                        <p:cTn id="13" dur="500"/>
+                                        <p:tgtEl>
+                                          <p:spTgt spid="5"/>
+                                        </p:tgtEl>
+                                      </p:cBhvr>
+                                    </p:animEffect>
+                                  </p:childTnLst>
+                                </p:cTn>
+                              </p:par>
+                              <p:par>
+                                <p:cTn id="14" presetID="10" presetClass="entr" presetSubtype="0" fill="hold" grpId="0" nodeType="withEffect">
+                                  <p:stCondLst>
+                                    <p:cond delay="600"/>
+                                  </p:stCondLst>
+                                  <p:childTnLst>
+                                    <p:set>
+                                      <p:cBhvr>
+                                        <p:cTn id="15" dur="1" fill="hold">
+                                          <p:stCondLst>
+                                            <p:cond delay="0"/>
+                                          </p:stCondLst>
+                                        </p:cTn>
+                                        <p:tgtEl>
+                                          <p:spTgt spid="6"/>
+                                        </p:tgtEl>
+                                        <p:attrNameLst>
+                                          <p:attrName>style.visibility</p:attrName>
+                                        </p:attrNameLst>
+                                      </p:cBhvr>
+                                      <p:to>
+                                        <p:strVal val="visible"/>
+                                      </p:to>
+                                    </p:set>
+                                    <p:animEffect transition="in" filter="fade">
+                                      <p:cBhvr>
+                                        <p:cTn id="16" dur="500"/>
+                                        <p:tgtEl>
+                                          <p:spTgt spid="6"/>
+                                        </p:tgtEl>
+                                      </p:cBhvr>
+                                    </p:animEffect>
+                                  </p:childTnLst>
+                                </p:cTn>
+                              </p:par>
+                              <p:par>
+                                <p:cTn id="17" presetID="10" presetClass="entr" presetSubtype="0" fill="hold" grpId="0" nodeType="withEffect">
+                                  <p:stCondLst>
+                                    <p:cond delay="600"/>
+                                  </p:stCondLst>
+                                  <p:childTnLst>
+                                    <p:set>
+                                      <p:cBhvr>
+                                        <p:cTn id="18" dur="1" fill="hold">
+                                          <p:stCondLst>
+                                            <p:cond delay="0"/>
+                                          </p:stCondLst>
+                                        </p:cTn>
+                                        <p:tgtEl>
+                                          <p:spTgt spid="7"/>
+                                        </p:tgtEl>
+                                        <p:attrNameLst>
+                                          <p:attrName>style.visibility</p:attrName>
+                                        </p:attrNameLst>
+                                      </p:cBhvr>
+                                      <p:to>
+                                        <p:strVal val="visible"/>
+                                      </p:to>
+                                    </p:set>
+                                    <p:animEffect transition="in" filter="fade">
+                                      <p:cBhvr>
+                                        <p:cTn id="19" dur="500"/>
+                                        <p:tgtEl>
+                                          <p:spTgt spid="7"/>
+                                        </p:tgtEl>
+                                      </p:cBhvr>
+                                    </p:animEffect>
+                                  </p:childTnLst>
+                                </p:cTn>
+                              </p:par>
+                              <p:par>
+                                <p:cTn id="20" presetID="10" presetClass="entr" presetSubtype="0" fill="hold" grpId="0" nodeType="withEffect">
+                                  <p:stCondLst>
+                                    <p:cond delay="900"/>
+                                  </p:stCondLst>
+                                  <p:childTnLst>
+                                    <p:set>
+                                      <p:cBhvr>
+                                        <p:cTn id="21" dur="1" fill="hold">
+                                          <p:stCondLst>
+                                            <p:cond delay="0"/>
+                                          </p:stCondLst>
+                                        </p:cTn>
+                                        <p:tgtEl>
+                                          <p:spTgt spid="8"/>
+                                        </p:tgtEl>
+                                        <p:attrNameLst>
+                                          <p:attrName>style.visibility</p:attrName>
+                                        </p:attrNameLst>
+                                      </p:cBhvr>
+                                      <p:to>
+                                        <p:strVal val="visible"/>
+                                      </p:to>
+                                    </p:set>
+                                    <p:animEffect transition="in" filter="fade">
+                                      <p:cBhvr>
+                                        <p:cTn id="22" dur="500"/>
+                                        <p:tgtEl>
+                                          <p:spTgt spid="8"/>
+                                        </p:tgtEl>
+                                      </p:cBhvr>
+                                    </p:animEffect>
+                                  </p:childTnLst>
+                                </p:cTn>
+                              </p:par>
+                              <p:par>
+                                <p:cTn id="23" presetID="10" presetClass="entr" presetSubtype="0" fill="hold" grpId="0" nodeType="withEffect">
+                                  <p:stCondLst>
+                                    <p:cond delay="900"/>
+                                  </p:stCondLst>
+                                  <p:childTnLst>
+                                    <p:set>
+                                      <p:cBhvr>
+                                        <p:cTn id="24" dur="1" fill="hold">
+                                          <p:stCondLst>
+                                            <p:cond delay="0"/>
+                                          </p:stCondLst>
+                                        </p:cTn>
+                                        <p:tgtEl>
+                                          <p:spTgt spid="9"/>
+                                        </p:tgtEl>
+                                        <p:attrNameLst>
+                                          <p:attrName>style.visibility</p:attrName>
+                                        </p:attrNameLst>
+                                      </p:cBhvr>
+                                      <p:to>
+                                        <p:strVal val="visible"/>
+                                      </p:to>
+                                    </p:set>
+                                    <p:animEffect transition="in" filter="fade">
+                                      <p:cBhvr>
+                                        <p:cTn id="25" dur="500"/>
+                                        <p:tgtEl>
+                                          <p:spTgt spid="9"/>
+                                        </p:tgtEl>
+                                      </p:cBhvr>
+                                    </p:animEffect>
+                                  </p:childTnLst>
+                                </p:cTn>
+                              </p:par>
+                              <p:par>
+                                <p:cTn id="26" presetID="10" presetClass="entr" presetSubtype="0" fill="hold" grpId="0" nodeType="withEffect">
+                                  <p:stCondLst>
+                                    <p:cond delay="1200"/>
+                                  </p:stCondLst>
+                                  <p:childTnLst>
+                                    <p:set>
+                                      <p:cBhvr>
+                                        <p:cTn id="27" dur="1" fill="hold">
+                                          <p:stCondLst>
+                                            <p:cond delay="0"/>
+                                          </p:stCondLst>
+                                        </p:cTn>
+                                        <p:tgtEl>
+                                          <p:spTgt spid="10"/>
+                                        </p:tgtEl>
+                                        <p:attrNameLst>
+                                          <p:attrName>style.visibility</p:attrName>
+                                        </p:attrNameLst>
+                                      </p:cBhvr>
+                                      <p:to>
+                                        <p:strVal val="visible"/>
+                                      </p:to>
+                                    </p:set>
+                                    <p:animEffect transition="in" filter="fade">
+                                      <p:cBhvr>
+                                        <p:cTn id="28" dur="500"/>
+                                        <p:tgtEl>
+                                          <p:spTgt spid="10"/>
+                                        </p:tgtEl>
+                                      </p:cBhvr>
+                                    </p:animEffect>
+                                  </p:childTnLst>
+                                </p:cTn>
+                              </p:par>
+                              <p:par>
+                                <p:cTn id="29" presetID="10" presetClass="entr" presetSubtype="0" fill="hold" grpId="0" nodeType="withEffect">
+                                  <p:stCondLst>
+                                    <p:cond delay="1200"/>
+                                  </p:stCondLst>
+                                  <p:childTnLst>
+                                    <p:set>
+                                      <p:cBhvr>
+                                        <p:cTn id="30" dur="1" fill="hold">
+                                          <p:stCondLst>
+                                            <p:cond delay="0"/>
+                                          </p:stCondLst>
+                                        </p:cTn>
+                                        <p:tgtEl>
+                                          <p:spTgt spid="11"/>
+                                        </p:tgtEl>
+                                        <p:attrNameLst>
+                                          <p:attrName>style.visibility</p:attrName>
+                                        </p:attrNameLst>
+                                      </p:cBhvr>
+                                      <p:to>
+                                        <p:strVal val="visible"/>
+                                      </p:to>
+                                    </p:set>
+                                    <p:animEffect transition="in" filter="fade">
+                                      <p:cBhvr>
+                                        <p:cTn id="31" dur="500"/>
+                                        <p:tgtEl>
+                                          <p:spTgt spid="11"/>
+                                        </p:tgtEl>
+                                      </p:cBhvr>
+                                    </p:animEffect>
+                                  </p:childTnLst>
+                                </p:cTn>
+                              </p:par>
+                              <p:par>
+                                <p:cTn id="32" presetID="10" presetClass="entr" presetSubtype="0" fill="hold" grpId="0" nodeType="withEffect">
+                                  <p:stCondLst>
+                                    <p:cond delay="1500"/>
+                                  </p:stCondLst>
+                                  <p:childTnLst>
+                                    <p:set>
+                                      <p:cBhvr>
+                                        <p:cTn id="33" dur="1" fill="hold">
+                                          <p:stCondLst>
+                                            <p:cond delay="0"/>
+                                          </p:stCondLst>
+                                        </p:cTn>
+                                        <p:tgtEl>
+                                          <p:spTgt spid="12"/>
+                                        </p:tgtEl>
+                                        <p:attrNameLst>
+                                          <p:attrName>style.visibility</p:attrName>
+                                        </p:attrNameLst>
+                                      </p:cBhvr>
+                                      <p:to>
+                                        <p:strVal val="visible"/>
+                                      </p:to>
+                                    </p:set>
+                                    <p:animEffect transition="in" filter="fade">
+                                      <p:cBhvr>
+                                        <p:cTn id="34" dur="500"/>
+                                        <p:tgtEl>
+                                          <p:spTgt spid="12"/>
+                                        </p:tgtEl>
+                                      </p:cBhvr>
+                                    </p:animEffect>
+                                  </p:childTnLst>
+                                </p:cTn>
+                              </p:par>
+                              <p:par>
+                                <p:cTn id="35" presetID="10" presetClass="entr" presetSubtype="0" fill="hold" grpId="0" nodeType="withEffect">
+                                  <p:stCondLst>
+                                    <p:cond delay="1800"/>
+                                  </p:stCondLst>
+                                  <p:childTnLst>
+                                    <p:set>
+                                      <p:cBhvr>
+                                        <p:cTn id="36" dur="1" fill="hold">
+                                          <p:stCondLst>
+                                            <p:cond delay="0"/>
+                                          </p:stCondLst>
+                                        </p:cTn>
+                                        <p:tgtEl>
+                                          <p:spTgt spid="13"/>
+                                        </p:tgtEl>
+                                        <p:attrNameLst>
+                                          <p:attrName>style.visibility</p:attrName>
+                                        </p:attrNameLst>
+                                      </p:cBhvr>
+                                      <p:to>
+                                        <p:strVal val="visible"/>
+                                      </p:to>
+                                    </p:set>
+                                    <p:animEffect transition="in" filter="fade">
+                                      <p:cBhvr>
+                                        <p:cTn id="37" dur="500"/>
+                                        <p:tgtEl>
+                                          <p:spTgt spid="13"/>
+                                        </p:tgtEl>
+                                      </p:cBhvr>
+                                    </p:animEffect>
+                                  </p:childTnLst>
+                                </p:cTn>
+                              </p:par>
+                              <p:par>
+                                <p:cTn id="38" presetID="10" presetClass="entr" presetSubtype="0" fill="hold" grpId="0" nodeType="withEffect">
+                                  <p:stCondLst>
+                                    <p:cond delay="1800"/>
+                                  </p:stCondLst>
+                                  <p:childTnLst>
+                                    <p:set>
+                                      <p:cBhvr>
+                                        <p:cTn id="39" dur="1" fill="hold">
+                                          <p:stCondLst>
+                                            <p:cond delay="0"/>
+                                          </p:stCondLst>
+                                        </p:cTn>
+                                        <p:tgtEl>
+                                          <p:spTgt spid="14"/>
+                                        </p:tgtEl>
+                                        <p:attrNameLst>
+                                          <p:attrName>style.visibility</p:attrName>
+                                        </p:attrNameLst>
+                                      </p:cBhvr>
+                                      <p:to>
+                                        <p:strVal val="visible"/>
+                                      </p:to>
+                                    </p:set>
+                                    <p:animEffect transition="in" filter="fade">
+                                      <p:cBhvr>
+                                        <p:cTn id="40" dur="500"/>
+                                        <p:tgtEl>
+                                          <p:spTgt spid="14"/>
+                                        </p:tgtEl>
+                                      </p:cBhvr>
+                                    </p:animEffect>
+                                  </p:childTnLst>
+                                </p:cTn>
+                              </p:par>
+                              <p:par>
+                                <p:cTn id="41" presetID="10" presetClass="entr" presetSubtype="0" fill="hold" grpId="0" nodeType="withEffect">
+                                  <p:stCondLst>
+                                    <p:cond delay="1800"/>
+                                  </p:stCondLst>
+                                  <p:childTnLst>
+                                    <p:set>
+                                      <p:cBhvr>
+                                        <p:cTn id="42" dur="1" fill="hold">
+                                          <p:stCondLst>
+                                            <p:cond delay="0"/>
+                                          </p:stCondLst>
+                                        </p:cTn>
+                                        <p:tgtEl>
+                                          <p:spTgt spid="15"/>
+                                        </p:tgtEl>
+                                        <p:attrNameLst>
+                                          <p:attrName>style.visibility</p:attrName>
+                                        </p:attrNameLst>
+                                      </p:cBhvr>
+                                      <p:to>
+                                        <p:strVal val="visible"/>
+                                      </p:to>
+                                    </p:set>
+                                    <p:animEffect transition="in" filter="fade">
+                                      <p:cBhvr>
+                                        <p:cTn id="43" dur="500"/>
+                                        <p:tgtEl>
+                                          <p:spTgt spid="15"/>
+                                        </p:tgtEl>
+                                      </p:cBhvr>
+                                    </p:animEffect>
+                                  </p:childTnLst>
+                                </p:cTn>
+                              </p:par>
+                              <p:par>
+                                <p:cTn id="44" presetID="10" presetClass="entr" presetSubtype="0" fill="hold" grpId="0" nodeType="withEffect">
+                                  <p:stCondLst>
+                                    <p:cond delay="2100"/>
+                                  </p:stCondLst>
+                                  <p:childTnLst>
+                                    <p:set>
+                                      <p:cBhvr>
+                                        <p:cTn id="45" dur="1" fill="hold">
+                                          <p:stCondLst>
+                                            <p:cond delay="0"/>
+                                          </p:stCondLst>
+                                        </p:cTn>
+                                        <p:tgtEl>
+                                          <p:spTgt spid="16"/>
+                                        </p:tgtEl>
+                                        <p:attrNameLst>
+                                          <p:attrName>style.visibility</p:attrName>
+                                        </p:attrNameLst>
+                                      </p:cBhvr>
+                                      <p:to>
+                                        <p:strVal val="visible"/>
+                                      </p:to>
+                                    </p:set>
+                                    <p:animEffect transition="in" filter="fade">
+                                      <p:cBhvr>
+                                        <p:cTn id="46" dur="500"/>
+                                        <p:tgtEl>
+                                          <p:spTgt spid="16"/>
+                                        </p:tgtEl>
+                                      </p:cBhvr>
+                                    </p:animEffect>
+                                  </p:childTnLst>
+                                </p:cTn>
+                              </p:par>
+                              <p:par>
+                                <p:cTn id="47" presetID="10" presetClass="entr" presetSubtype="0" fill="hold" grpId="0" nodeType="withEffect">
+                                  <p:stCondLst>
+                                    <p:cond delay="2100"/>
+                                  </p:stCondLst>
+                                  <p:childTnLst>
+                                    <p:set>
+                                      <p:cBhvr>
+                                        <p:cTn id="48" dur="1" fill="hold">
+                                          <p:stCondLst>
+                                            <p:cond delay="0"/>
+                                          </p:stCondLst>
+                                        </p:cTn>
+                                        <p:tgtEl>
+                                          <p:spTgt spid="17"/>
+                                        </p:tgtEl>
+                                        <p:attrNameLst>
+                                          <p:attrName>style.visibility</p:attrName>
+                                        </p:attrNameLst>
+                                      </p:cBhvr>
+                                      <p:to>
+                                        <p:strVal val="visible"/>
+                                      </p:to>
+                                    </p:set>
+                                    <p:animEffect transition="in" filter="fade">
+                                      <p:cBhvr>
+                                        <p:cTn id="49" dur="500"/>
+                                        <p:tgtEl>
+                                          <p:spTgt spid="17"/>
+                                        </p:tgtEl>
+                                      </p:cBhvr>
+                                    </p:animEffect>
+                                  </p:childTnLst>
+                                </p:cTn>
+                              </p:par>
+                              <p:par>
+                                <p:cTn id="50" presetID="10" presetClass="entr" presetSubtype="0" fill="hold" grpId="0" nodeType="withEffect">
+                                  <p:stCondLst>
+                                    <p:cond delay="2100"/>
+                                  </p:stCondLst>
+                                  <p:childTnLst>
+                                    <p:set>
+                                      <p:cBhvr>
+                                        <p:cTn id="51" dur="1" fill="hold">
+                                          <p:stCondLst>
+                                            <p:cond delay="0"/>
+                                          </p:stCondLst>
+                                        </p:cTn>
+                                        <p:tgtEl>
+                                          <p:spTgt spid="18"/>
+                                        </p:tgtEl>
+                                        <p:attrNameLst>
+                                          <p:attrName>style.visibility</p:attrName>
+                                        </p:attrNameLst>
+                                      </p:cBhvr>
+                                      <p:to>
+                                        <p:strVal val="visible"/>
+                                      </p:to>
+                                    </p:set>
+                                    <p:animEffect transition="in" filter="fade">
+                                      <p:cBhvr>
+                                        <p:cTn id="52" dur="500"/>
+                                        <p:tgtEl>
+                                          <p:spTgt spid="18"/>
+                                        </p:tgtEl>
+                                      </p:cBhvr>
+                                    </p:animEffect>
+                                  </p:childTnLst>
+                                </p:cTn>
+                              </p:par>
+                              <p:par>
+                                <p:cTn id="53" presetID="10" presetClass="entr" presetSubtype="0" fill="hold" grpId="0" nodeType="withEffect">
+                                  <p:stCondLst>
+                                    <p:cond delay="2400"/>
+                                  </p:stCondLst>
+                                  <p:childTnLst>
+                                    <p:set>
+                                      <p:cBhvr>
+                                        <p:cTn id="54" dur="1" fill="hold">
+                                          <p:stCondLst>
+                                            <p:cond delay="0"/>
+                                          </p:stCondLst>
+                                        </p:cTn>
+                                        <p:tgtEl>
+                                          <p:spTgt spid="19"/>
+                                        </p:tgtEl>
+                                        <p:attrNameLst>
+                                          <p:attrName>style.visibility</p:attrName>
+                                        </p:attrNameLst>
+                                      </p:cBhvr>
+                                      <p:to>
+                                        <p:strVal val="visible"/>
+                                      </p:to>
+                                    </p:set>
+                                    <p:animEffect transition="in" filter="fade">
+                                      <p:cBhvr>
+                                        <p:cTn id="55" dur="500"/>
+                                        <p:tgtEl>
+                                          <p:spTgt spid="19"/>
+                                        </p:tgtEl>
+                                      </p:cBhvr>
+                                    </p:animEffect>
+                                  </p:childTnLst>
+                                </p:cTn>
+                              </p:par>
+                              <p:par>
+                                <p:cTn id="56" presetID="10" presetClass="entr" presetSubtype="0" fill="hold" grpId="0" nodeType="withEffect">
+                                  <p:stCondLst>
+                                    <p:cond delay="2400"/>
+                                  </p:stCondLst>
+                                  <p:childTnLst>
+                                    <p:set>
+                                      <p:cBhvr>
+                                        <p:cTn id="57" dur="1" fill="hold">
+                                          <p:stCondLst>
+                                            <p:cond delay="0"/>
+                                          </p:stCondLst>
+                                        </p:cTn>
+                                        <p:tgtEl>
+                                          <p:spTgt spid="20"/>
+                                        </p:tgtEl>
+                                        <p:attrNameLst>
+                                          <p:attrName>style.visibility</p:attrName>
+                                        </p:attrNameLst>
+                                      </p:cBhvr>
+                                      <p:to>
+                                        <p:strVal val="visible"/>
+                                      </p:to>
+                                    </p:set>
+                                    <p:animEffect transition="in" filter="fade">
+                                      <p:cBhvr>
+                                        <p:cTn id="58" dur="500"/>
+                                        <p:tgtEl>
+                                          <p:spTgt spid="20"/>
+                                        </p:tgtEl>
+                                      </p:cBhvr>
+                                    </p:animEffect>
+                                  </p:childTnLst>
+                                </p:cTn>
+                              </p:par>
+                              <p:par>
+                                <p:cTn id="59" presetID="10" presetClass="entr" presetSubtype="0" fill="hold" grpId="0" nodeType="withEffect">
+                                  <p:stCondLst>
+                                    <p:cond delay="2400"/>
+                                  </p:stCondLst>
+                                  <p:childTnLst>
+                                    <p:set>
+                                      <p:cBhvr>
+                                        <p:cTn id="60" dur="1" fill="hold">
+                                          <p:stCondLst>
+                                            <p:cond delay="0"/>
+                                          </p:stCondLst>
+                                        </p:cTn>
+                                        <p:tgtEl>
+                                          <p:spTgt spid="21"/>
+                                        </p:tgtEl>
+                                        <p:attrNameLst>
+                                          <p:attrName>style.visibility</p:attrName>
+                                        </p:attrNameLst>
+                                      </p:cBhvr>
+                                      <p:to>
+                                        <p:strVal val="visible"/>
+                                      </p:to>
+                                    </p:set>
+                                    <p:animEffect transition="in" filter="fade">
+                                      <p:cBhvr>
+                                        <p:cTn id="61" dur="500"/>
+                                        <p:tgtEl>
+                                          <p:spTgt spid="21"/>
+                                        </p:tgtEl>
+                                      </p:cBhvr>
+                                    </p:animEffect>
+                                  </p:childTnLst>
+                                </p:cTn>
+                              </p:par>
+                              <p:par>
+                                <p:cTn id="62" presetID="10" presetClass="entr" presetSubtype="0" fill="hold" grpId="0" nodeType="withEffect">
+                                  <p:stCondLst>
+                                    <p:cond delay="2700"/>
+                                  </p:stCondLst>
+                                  <p:childTnLst>
+                                    <p:set>
+                                      <p:cBhvr>
+                                        <p:cTn id="63" dur="1" fill="hold">
+                                          <p:stCondLst>
+                                            <p:cond delay="0"/>
+                                          </p:stCondLst>
+                                        </p:cTn>
+                                        <p:tgtEl>
+                                          <p:spTgt spid="22"/>
+                                        </p:tgtEl>
+                                        <p:attrNameLst>
+                                          <p:attrName>style.visibility</p:attrName>
+                                        </p:attrNameLst>
+                                      </p:cBhvr>
+                                      <p:to>
+                                        <p:strVal val="visible"/>
+                                      </p:to>
+                                    </p:set>
+                                    <p:animEffect transition="in" filter="fade">
+                                      <p:cBhvr>
+                                        <p:cTn id="64" dur="500"/>
+                                        <p:tgtEl>
+                                          <p:spTgt spid="22"/>
+                                        </p:tgtEl>
+                                      </p:cBhvr>
+                                    </p:animEffect>
+                                  </p:childTnLst>
+                                </p:cTn>
+                              </p:par>
+                              <p:par>
+                                <p:cTn id="65" presetID="10" presetClass="entr" presetSubtype="0" fill="hold" grpId="0" nodeType="withEffect">
+                                  <p:stCondLst>
+                                    <p:cond delay="3000"/>
+                                  </p:stCondLst>
+                                  <p:childTnLst>
+                                    <p:set>
+                                      <p:cBhvr>
+                                        <p:cTn id="66" dur="1" fill="hold">
+                                          <p:stCondLst>
+                                            <p:cond delay="0"/>
+                                          </p:stCondLst>
+                                        </p:cTn>
+                                        <p:tgtEl>
+                                          <p:spTgt spid="23"/>
+                                        </p:tgtEl>
+                                        <p:attrNameLst>
+                                          <p:attrName>style.visibility</p:attrName>
+                                        </p:attrNameLst>
+                                      </p:cBhvr>
+                                      <p:to>
+                                        <p:strVal val="visible"/>
+                                      </p:to>
+                                    </p:set>
+                                    <p:animEffect transition="in" filter="fade">
+                                      <p:cBhvr>
+                                        <p:cTn id="67" dur="500"/>
+                                        <p:tgtEl>
+                                          <p:spTgt spid="23"/>
+                                        </p:tgtEl>
+                                      </p:cBhvr>
+                                    </p:animEffect>
+                                  </p:childTnLst>
+                                </p:cTn>
+                              </p:par>
+                            </p:childTnLst>
+                          </p:cTn>
+                        </p:par>
+                      </p:childTnLst>
+                    </p:cTn>
+                  </p:par>
+                </p:childTnLst>
+              </p:cTn>
+              <p:prevCondLst>
+                <p:cond evt="onPrev" delay="0">
+                  <p:tgtEl>
+                    <p:sldTgt/>
+                  </p:tgtEl>
+                </p:cond>
+              </p:prevCondLst>
+              <p:nextCondLst>
+                <p:cond evt="onNext" delay="0">
+                  <p:tgtEl>
+                    <p:sldTgt/>
+                  </p:tgtEl>
+                </p:cond>
+              </p:nextCondLst>
+            </p:seq>
+          </p:childTnLst>
+        </p:cTn>
+      </p:par>
+    </p:tnLst>
+    <p:bldLst>
+      <p:bldP spid="3" grpId="0" animBg="1"/>
+      <p:bldP spid="5" grpId="0" animBg="1"/>
+      <p:bldP spid="7" grpId="0" animBg="1"/>
+      <p:bldP spid="9" grpId="0" animBg="1"/>
+      <p:bldP spid="11" grpId="0" animBg="1"/>
+      <p:bldP spid="12" grpId="0" animBg="1"/>
+      <p:bldP spid="13" grpId="0" animBg="1"/>
+      <p:bldP spid="14" grpId="0" animBg="1"/>
+      <p:bldP spid="15" grpId="0" animBg="1"/>
+      <p:bldP spid="16" grpId="0" animBg="1"/>
+      <p:bldP spid="17" grpId="0" animBg="1"/>
+      <p:bldP spid="18" grpId="0" animBg="1"/>
+      <p:bldP spid="19" grpId="0" animBg="1"/>
+      <p:bldP spid="20" grpId="0" animBg="1"/>
+      <p:bldP spid="21" grpId="0" animBg="1"/>
+      <p:bldP spid="22" grpId="0" animBg="1"/>
+      <p:bldP spid="23" grpId="0" animBg="1"/>
+    </p:bldLst>
+  </p:timing>
 </p:sld>
 </file>
 
